--- a/public/documents/countries/senegal.pptx
+++ b/public/documents/countries/senegal.pptx
@@ -120,7 +120,7 @@
 </p:presentation>
 </file>
 
-<file path=ppt/charts/chart7.xml><?xml version="1.0" encoding="utf-8"?>
+<file path=ppt/charts/chart14.xml><?xml version="1.0" encoding="utf-8"?>
 <c:chartSpace xmlns:c="http://schemas.openxmlformats.org/drawingml/2006/chart" xmlns:a="http://schemas.openxmlformats.org/drawingml/2006/main" xmlns:r="http://schemas.openxmlformats.org/officeDocument/2006/relationships">
   <c:date1904 val="0"/>
   <c:roundedCorners val="1"/>
@@ -365,7 +365,7 @@
 </c:chartSpace>
 </file>
 
-<file path=ppt/charts/chart8.xml><?xml version="1.0" encoding="utf-8"?>
+<file path=ppt/charts/chart15.xml><?xml version="1.0" encoding="utf-8"?>
 <c:chartSpace xmlns:c="http://schemas.openxmlformats.org/drawingml/2006/chart" xmlns:a="http://schemas.openxmlformats.org/drawingml/2006/main" xmlns:r="http://schemas.openxmlformats.org/officeDocument/2006/relationships">
   <c:date1904 val="0"/>
   <c:roundedCorners val="1"/>
@@ -673,7 +673,7 @@
 </c:chartSpace>
 </file>
 
-<file path=ppt/charts/chart9.xml><?xml version="1.0" encoding="utf-8"?>
+<file path=ppt/charts/chart16.xml><?xml version="1.0" encoding="utf-8"?>
 <c:chartSpace xmlns:c="http://schemas.openxmlformats.org/drawingml/2006/chart" xmlns:a="http://schemas.openxmlformats.org/drawingml/2006/main" xmlns:r="http://schemas.openxmlformats.org/officeDocument/2006/relationships">
   <c:date1904 val="0"/>
   <c:roundedCorners val="1"/>
@@ -3023,7 +3023,7 @@
       </p:sp>
       <p:pic>
         <p:nvPicPr>
-          <p:cNvPr id="5" name="Image 1" descr="C:\Users\Utilisateur\dev\gsw-dossiers\public\images\logo-icon.png">    </p:cNvPr>
+          <p:cNvPr id="5" name="Image 1" descr="C:\Users\Utilisateur\dev\green-solutions-web\public\images\logo-icon.png">    </p:cNvPr>
           <p:cNvPicPr>
             <a:picLocks noChangeAspect="1"/>
           </p:cNvPicPr>
@@ -3047,7 +3047,7 @@
       </p:pic>
       <p:pic>
         <p:nvPicPr>
-          <p:cNvPr id="6" name="Image 2" descr="C:\Users\Utilisateur\dev\gsw-dossiers\scripts\dossiers\drapeaux\senegal.png">    </p:cNvPr>
+          <p:cNvPr id="6" name="Image 2" descr="C:\Users\Utilisateur\dev\green-solutions-web\scripts\dossiers\drapeaux\senegal.png">    </p:cNvPr>
           <p:cNvPicPr>
             <a:picLocks noChangeAspect="1"/>
           </p:cNvPicPr>
@@ -6219,7 +6219,7 @@
       </p:sp>
       <p:pic>
         <p:nvPicPr>
-          <p:cNvPr id="6" name="Image 1" descr="C:\Users\Utilisateur\dev\gsw-dossiers\scripts\dossiers\sceau-aim-clair.png">    </p:cNvPr>
+          <p:cNvPr id="6" name="Image 1" descr="C:\Users\Utilisateur\dev\green-solutions-web\scripts\dossiers\sceau-aim-clair.png">    </p:cNvPr>
           <p:cNvPicPr>
             <a:picLocks noChangeAspect="1"/>
           </p:cNvPicPr>

--- a/public/documents/countries/senegal.pptx
+++ b/public/documents/countries/senegal.pptx
@@ -19,9 +19,11 @@
     <p:sldId id="267" r:id="rId13"/>
     <p:sldId id="268" r:id="rId14"/>
     <p:sldId id="269" r:id="rId15"/>
+    <p:sldId id="270" r:id="rId16"/>
+    <p:sldId id="271" r:id="rId17"/>
   </p:sldIdLst>
   <p:notesMasterIdLst>
-    <p:notesMasterId r:id="rId16"/>
+    <p:notesMasterId r:id="rId18"/>
   </p:notesMasterIdLst>
   <p:sldSz cx="12192000" cy="6858000"/>
   <p:notesSz cx="6858000" cy="12192000"/>
@@ -120,7 +122,266 @@
 </p:presentation>
 </file>
 
-<file path=ppt/charts/chart14.xml><?xml version="1.0" encoding="utf-8"?>
+<file path=ppt/charts/chart80.xml><?xml version="1.0" encoding="utf-8"?>
+<c:chartSpace xmlns:c="http://schemas.openxmlformats.org/drawingml/2006/chart" xmlns:a="http://schemas.openxmlformats.org/drawingml/2006/main" xmlns:r="http://schemas.openxmlformats.org/officeDocument/2006/relationships">
+  <c:date1904 val="0"/>
+  <c:roundedCorners val="1"/>
+  <c:chart>
+    <c:autoTitleDeleted val="1"/>
+    <c:plotArea>
+      <c:layout/>
+      <c:barChart>
+        <c:barDir val="col"/>
+        <c:grouping val="clustered"/>
+        <c:varyColors val="0"/>
+        <c:ser>
+          <c:idx val="0"/>
+          <c:order val="0"/>
+          <c:tx>
+            <c:strRef>
+              <c:f>Sheet1!$B$1</c:f>
+              <c:strCache>
+                <c:ptCount val="1"/>
+                <c:pt idx="0">
+                  <c:v>Indice mondial du nombre et de la durée des sécheresses</c:v>
+                </c:pt>
+              </c:strCache>
+            </c:strRef>
+          </c:tx>
+          <c:spPr>
+            <a:solidFill>
+              <a:srgbClr val="1D4E6B"/>
+            </a:solidFill>
+            <a:effectLst/>
+          </c:spPr>
+          <c:invertIfNegative val="0"/>
+          <c:dLbls>
+            <c:numFmt formatCode="[$-40C]0" sourceLinked="0"/>
+            <c:txPr>
+              <a:bodyPr/>
+              <a:lstStyle/>
+              <a:p>
+                <a:pPr>
+                  <a:defRPr b="0" i="0" strike="noStrike" sz="1100" u="none">
+                    <a:solidFill>
+                      <a:srgbClr val="0F2E40"/>
+                    </a:solidFill>
+                    <a:latin typeface="Calibri"/>
+                  </a:defRPr>
+                </a:pPr>
+              </a:p>
+            </c:txPr>
+            <c:showLegendKey val="0"/>
+            <c:showVal val="1"/>
+            <c:showCatName val="0"/>
+            <c:showSerName val="0"/>
+            <c:showPercent val="0"/>
+            <c:showBubbleSize val="0"/>
+            <c:showLeaderLines val="0"/>
+          </c:dLbls>
+          <c:dPt>
+            <c:idx val="0"/>
+            <c:invertIfNegative val="0"/>
+            <c:bubble3D val="0"/>
+            <c:spPr>
+              <a:solidFill>
+                <a:srgbClr val="1D4E6B"/>
+              </a:solidFill>
+              <a:effectLst/>
+            </c:spPr>
+          </c:dPt>
+          <c:dPt>
+            <c:idx val="1"/>
+            <c:invertIfNegative val="0"/>
+            <c:bubble3D val="0"/>
+            <c:spPr>
+              <a:solidFill>
+                <a:srgbClr val="D98C2B"/>
+              </a:solidFill>
+              <a:effectLst/>
+            </c:spPr>
+          </c:dPt>
+          <c:cat>
+            <c:multiLvlStrRef>
+              <c:f>Sheet1!$A$2:$A$3</c:f>
+              <c:multiLvlStrCache>
+                <c:ptCount val="2"/>
+                <c:lvl>
+                  <c:pt idx="0">
+                    <c:v>1980–1999</c:v>
+                  </c:pt>
+                  <c:pt idx="1">
+                    <c:v>Depuis 2000</c:v>
+                  </c:pt>
+                </c:lvl>
+              </c:multiLvlStrCache>
+            </c:multiLvlStrRef>
+          </c:cat>
+          <c:val>
+            <c:numRef>
+              <c:f>Sheet1!$B$2:$B$3</c:f>
+              <c:numCache>
+                <c:formatCode>General</c:formatCode>
+                <c:ptCount val="2"/>
+                <c:pt idx="0">
+                  <c:v>100</c:v>
+                </c:pt>
+                <c:pt idx="1">
+                  <c:v>129</c:v>
+                </c:pt>
+              </c:numCache>
+            </c:numRef>
+          </c:val>
+        </c:ser>
+        <c:dLbls>
+          <c:numFmt formatCode="[$-40C]0" sourceLinked="0"/>
+          <c:txPr>
+            <a:bodyPr/>
+            <a:lstStyle/>
+            <a:p>
+              <a:pPr>
+                <a:defRPr b="0" i="0" strike="noStrike" sz="1100" u="none">
+                  <a:solidFill>
+                    <a:srgbClr val="0F2E40"/>
+                  </a:solidFill>
+                  <a:latin typeface="Calibri"/>
+                </a:defRPr>
+              </a:pPr>
+            </a:p>
+          </c:txPr>
+          <c:showLegendKey val="0"/>
+          <c:showVal val="1"/>
+          <c:showCatName val="0"/>
+          <c:showSerName val="0"/>
+          <c:showPercent val="0"/>
+          <c:showBubbleSize val="0"/>
+          <c:showLeaderLines val="0"/>
+        </c:dLbls>
+        <c:gapWidth val="150"/>
+        <c:overlap val="0"/>
+        <c:axId val="2094734554"/>
+        <c:axId val="2094734552"/>
+        <c:axId val="2094734556"/>
+      </c:barChart>
+      <c:catAx>
+        <c:axId val="2094734554"/>
+        <c:scaling>
+          <c:orientation val="minMax"/>
+        </c:scaling>
+        <c:delete val="0"/>
+        <c:axPos val="b"/>
+        <c:numFmt formatCode="General" sourceLinked="1"/>
+        <c:majorTickMark val="out"/>
+        <c:minorTickMark val="none"/>
+        <c:tickLblPos val="low"/>
+        <c:spPr>
+          <a:ln w="12700" cap="flat">
+            <a:solidFill>
+              <a:srgbClr val="888888"/>
+            </a:solidFill>
+            <a:prstDash val="solid"/>
+            <a:round/>
+          </a:ln>
+        </c:spPr>
+        <c:txPr>
+          <a:bodyPr/>
+          <a:lstStyle/>
+          <a:p>
+            <a:pPr>
+              <a:defRPr sz="1100" b="0" i="0" u="none" strike="noStrike">
+                <a:solidFill>
+                  <a:srgbClr val="6B7D87"/>
+                </a:solidFill>
+                <a:latin typeface="Calibri"/>
+              </a:defRPr>
+            </a:pPr>
+            <a:endParaRPr lang="en-US"/>
+          </a:p>
+        </c:txPr>
+        <c:crossAx val="2094734552"/>
+        <c:crosses val="autoZero"/>
+        <c:auto val="1"/>
+        <c:lblAlgn val="ctr"/>
+        <c:noMultiLvlLbl val="1"/>
+      </c:catAx>
+      <c:valAx>
+        <c:axId val="2094734552"/>
+        <c:scaling>
+          <c:orientation val="minMax"/>
+          <c:max val="140"/>
+          <c:min val="0"/>
+        </c:scaling>
+        <c:delete val="0"/>
+        <c:axPos val="l"/>
+        <c:majorGridlines>
+          <c:spPr>
+            <a:ln w="9525" cap="flat">
+              <a:solidFill>
+                <a:srgbClr val="D8E1E7"/>
+              </a:solidFill>
+              <a:prstDash val="solid"/>
+              <a:round/>
+            </a:ln>
+          </c:spPr>
+        </c:majorGridlines>
+        <c:numFmt formatCode="General" sourceLinked="0"/>
+        <c:majorTickMark val="out"/>
+        <c:minorTickMark val="none"/>
+        <c:tickLblPos val="nextTo"/>
+        <c:spPr>
+          <a:ln w="12700" cap="flat">
+            <a:solidFill>
+              <a:srgbClr val="888888"/>
+            </a:solidFill>
+            <a:prstDash val="solid"/>
+            <a:round/>
+          </a:ln>
+        </c:spPr>
+        <c:txPr>
+          <a:bodyPr/>
+          <a:lstStyle/>
+          <a:p>
+            <a:pPr>
+              <a:defRPr sz="1100" b="0" i="0" u="none" strike="noStrike">
+                <a:solidFill>
+                  <a:srgbClr val="6B7D87"/>
+                </a:solidFill>
+                <a:latin typeface="Calibri"/>
+              </a:defRPr>
+            </a:pPr>
+            <a:endParaRPr lang="en-US"/>
+          </a:p>
+        </c:txPr>
+        <c:crossAx val="2094734554"/>
+        <c:crosses val="autoZero"/>
+        <c:crossBetween val="between"/>
+        <c:majorUnit val="20"/>
+      </c:valAx>
+      <c:spPr>
+        <a:noFill/>
+        <a:ln>
+          <a:noFill/>
+        </a:ln>
+        <a:effectLst/>
+      </c:spPr>
+    </c:plotArea>
+    <c:plotVisOnly val="1"/>
+    <c:dispBlanksAs val="span"/>
+  </c:chart>
+  <c:spPr>
+    <a:noFill/>
+    <a:ln>
+      <a:noFill/>
+    </a:ln>
+    <a:effectLst/>
+  </c:spPr>
+  <c:externalData r:id="rId1">
+    <c:autoUpdate val="0"/>
+  </c:externalData>
+</c:chartSpace>
+</file>
+
+<file path=ppt/charts/chart81.xml><?xml version="1.0" encoding="utf-8"?>
 <c:chartSpace xmlns:c="http://schemas.openxmlformats.org/drawingml/2006/chart" xmlns:a="http://schemas.openxmlformats.org/drawingml/2006/main" xmlns:r="http://schemas.openxmlformats.org/officeDocument/2006/relationships">
   <c:date1904 val="0"/>
   <c:roundedCorners val="1"/>
@@ -365,7 +626,7 @@
 </c:chartSpace>
 </file>
 
-<file path=ppt/charts/chart15.xml><?xml version="1.0" encoding="utf-8"?>
+<file path=ppt/charts/chart82.xml><?xml version="1.0" encoding="utf-8"?>
 <c:chartSpace xmlns:c="http://schemas.openxmlformats.org/drawingml/2006/chart" xmlns:a="http://schemas.openxmlformats.org/drawingml/2006/main" xmlns:r="http://schemas.openxmlformats.org/officeDocument/2006/relationships">
   <c:date1904 val="0"/>
   <c:roundedCorners val="1"/>
@@ -673,7 +934,7 @@
 </c:chartSpace>
 </file>
 
-<file path=ppt/charts/chart16.xml><?xml version="1.0" encoding="utf-8"?>
+<file path=ppt/charts/chart83.xml><?xml version="1.0" encoding="utf-8"?>
 <c:chartSpace xmlns:c="http://schemas.openxmlformats.org/drawingml/2006/chart" xmlns:a="http://schemas.openxmlformats.org/drawingml/2006/main" xmlns:r="http://schemas.openxmlformats.org/officeDocument/2006/relationships">
   <c:date1904 val="0"/>
   <c:roundedCorners val="1"/>
@@ -1885,6 +2146,182 @@
             <a:fld id="{F7021451-1387-4CA6-816F-3879F97B5CBC}" type="slidenum">
               <a:rPr lang="en-US"/>
               <a:t>14</a:t>
+            </a:fld>
+            <a:endParaRPr lang="en-US"/>
+          </a:p>
+        </p:txBody>
+      </p:sp>
+    </p:spTree>
+    <p:extLst>
+      <p:ext uri="{BB962C8B-B14F-4D97-AF65-F5344CB8AC3E}">
+        <p14:creationId xmlns:p14="http://schemas.microsoft.com/office/powerpoint/2010/main" val="1024086991"/>
+      </p:ext>
+    </p:extLst>
+  </p:cSld>
+  <p:clrMapOvr>
+    <a:masterClrMapping/>
+  </p:clrMapOvr>
+</p:notes>
+</file>
+
+<file path=ppt/notesSlides/notesSlide15.xml><?xml version="1.0" encoding="utf-8"?>
+<p:notes xmlns:a="http://schemas.openxmlformats.org/drawingml/2006/main" xmlns:r="http://schemas.openxmlformats.org/officeDocument/2006/relationships" xmlns:p="http://schemas.openxmlformats.org/presentationml/2006/main">
+  <p:cSld>
+    <p:spTree>
+      <p:nvGrpSpPr>
+        <p:cNvPr id="1" name=""/>
+        <p:cNvGrpSpPr/>
+        <p:nvPr/>
+      </p:nvGrpSpPr>
+      <p:grpSpPr>
+        <a:xfrm>
+          <a:off x="0" y="0"/>
+          <a:ext cx="0" cy="0"/>
+          <a:chOff x="0" y="0"/>
+          <a:chExt cx="0" cy="0"/>
+        </a:xfrm>
+      </p:grpSpPr>
+      <p:sp>
+        <p:nvSpPr>
+          <p:cNvPr id="2" name="Slide Image Placeholder 1"/>
+          <p:cNvSpPr>
+            <a:spLocks noGrp="1" noRot="1" noChangeAspect="1"/>
+          </p:cNvSpPr>
+          <p:nvPr>
+            <p:ph type="sldImg"/>
+          </p:nvPr>
+        </p:nvSpPr>
+        <p:spPr/>
+      </p:sp>
+      <p:sp>
+        <p:nvSpPr>
+          <p:cNvPr id="3" name="Notes Placeholder 2"/>
+          <p:cNvSpPr>
+            <a:spLocks noGrp="1"/>
+          </p:cNvSpPr>
+          <p:nvPr>
+            <p:ph type="body" idx="1"/>
+          </p:nvPr>
+        </p:nvSpPr>
+        <p:spPr/>
+        <p:txBody>
+          <a:bodyPr/>
+          <a:lstStyle/>
+          <a:p>
+            <a:r>
+              <a:rPr lang="en-US" dirty="0"/>
+              <a:t/>
+            </a:r>
+            <a:endParaRPr lang="en-US" dirty="0"/>
+          </a:p>
+        </p:txBody>
+      </p:sp>
+      <p:sp>
+        <p:nvSpPr>
+          <p:cNvPr id="4" name="Slide Number Placeholder 3"/>
+          <p:cNvSpPr>
+            <a:spLocks noGrp="1"/>
+          </p:cNvSpPr>
+          <p:nvPr>
+            <p:ph type="sldNum" sz="quarter" idx="10"/>
+          </p:nvPr>
+        </p:nvSpPr>
+        <p:spPr/>
+        <p:txBody>
+          <a:bodyPr/>
+          <a:lstStyle/>
+          <a:p>
+            <a:fld id="{F7021451-1387-4CA6-816F-3879F97B5CBC}" type="slidenum">
+              <a:rPr lang="en-US"/>
+              <a:t>15</a:t>
+            </a:fld>
+            <a:endParaRPr lang="en-US"/>
+          </a:p>
+        </p:txBody>
+      </p:sp>
+    </p:spTree>
+    <p:extLst>
+      <p:ext uri="{BB962C8B-B14F-4D97-AF65-F5344CB8AC3E}">
+        <p14:creationId xmlns:p14="http://schemas.microsoft.com/office/powerpoint/2010/main" val="1024086991"/>
+      </p:ext>
+    </p:extLst>
+  </p:cSld>
+  <p:clrMapOvr>
+    <a:masterClrMapping/>
+  </p:clrMapOvr>
+</p:notes>
+</file>
+
+<file path=ppt/notesSlides/notesSlide16.xml><?xml version="1.0" encoding="utf-8"?>
+<p:notes xmlns:a="http://schemas.openxmlformats.org/drawingml/2006/main" xmlns:r="http://schemas.openxmlformats.org/officeDocument/2006/relationships" xmlns:p="http://schemas.openxmlformats.org/presentationml/2006/main">
+  <p:cSld>
+    <p:spTree>
+      <p:nvGrpSpPr>
+        <p:cNvPr id="1" name=""/>
+        <p:cNvGrpSpPr/>
+        <p:nvPr/>
+      </p:nvGrpSpPr>
+      <p:grpSpPr>
+        <a:xfrm>
+          <a:off x="0" y="0"/>
+          <a:ext cx="0" cy="0"/>
+          <a:chOff x="0" y="0"/>
+          <a:chExt cx="0" cy="0"/>
+        </a:xfrm>
+      </p:grpSpPr>
+      <p:sp>
+        <p:nvSpPr>
+          <p:cNvPr id="2" name="Slide Image Placeholder 1"/>
+          <p:cNvSpPr>
+            <a:spLocks noGrp="1" noRot="1" noChangeAspect="1"/>
+          </p:cNvSpPr>
+          <p:nvPr>
+            <p:ph type="sldImg"/>
+          </p:nvPr>
+        </p:nvSpPr>
+        <p:spPr/>
+      </p:sp>
+      <p:sp>
+        <p:nvSpPr>
+          <p:cNvPr id="3" name="Notes Placeholder 2"/>
+          <p:cNvSpPr>
+            <a:spLocks noGrp="1"/>
+          </p:cNvSpPr>
+          <p:nvPr>
+            <p:ph type="body" idx="1"/>
+          </p:nvPr>
+        </p:nvSpPr>
+        <p:spPr/>
+        <p:txBody>
+          <a:bodyPr/>
+          <a:lstStyle/>
+          <a:p>
+            <a:r>
+              <a:rPr lang="en-US" dirty="0"/>
+              <a:t/>
+            </a:r>
+            <a:endParaRPr lang="en-US" dirty="0"/>
+          </a:p>
+        </p:txBody>
+      </p:sp>
+      <p:sp>
+        <p:nvSpPr>
+          <p:cNvPr id="4" name="Slide Number Placeholder 3"/>
+          <p:cNvSpPr>
+            <a:spLocks noGrp="1"/>
+          </p:cNvSpPr>
+          <p:nvPr>
+            <p:ph type="sldNum" sz="quarter" idx="10"/>
+          </p:nvPr>
+        </p:nvSpPr>
+        <p:spPr/>
+        <p:txBody>
+          <a:bodyPr/>
+          <a:lstStyle/>
+          <a:p>
+            <a:fld id="{F7021451-1387-4CA6-816F-3879F97B5CBC}" type="slidenum">
+              <a:rPr lang="en-US"/>
+              <a:t>16</a:t>
             </a:fld>
             <a:endParaRPr lang="en-US"/>
           </a:p>
@@ -3023,7 +3460,7 @@
       </p:sp>
       <p:pic>
         <p:nvPicPr>
-          <p:cNvPr id="5" name="Image 1" descr="C:\Users\Utilisateur\dev\green-solutions-web\public\images\logo-icon.png">    </p:cNvPr>
+          <p:cNvPr id="5" name="Image 1" descr="/workspace/scratch/50eb4f7d8e13/green-solutions-web/public/images/logo-icon.png">    </p:cNvPr>
           <p:cNvPicPr>
             <a:picLocks noChangeAspect="1"/>
           </p:cNvPicPr>
@@ -3047,7 +3484,7 @@
       </p:pic>
       <p:pic>
         <p:nvPicPr>
-          <p:cNvPr id="6" name="Image 2" descr="C:\Users\Utilisateur\dev\green-solutions-web\scripts\dossiers\drapeaux\senegal.png">    </p:cNvPr>
+          <p:cNvPr id="6" name="Image 2" descr="/workspace/scratch/50eb4f7d8e13/green-solutions-web/scripts/dossiers/drapeaux/senegal.png">    </p:cNvPr>
           <p:cNvPicPr>
             <a:picLocks noChangeAspect="1"/>
           </p:cNvPicPr>
@@ -3397,7 +3834,7 @@
                 <a:ea typeface="Calibri" pitchFamily="34" charset="-122"/>
                 <a:cs typeface="Calibri" pitchFamily="34" charset="-120"/>
               </a:rPr>
-              <a:t>ORDRES DE GRANDEUR</a:t>
+              <a:t>Le reste de la gamme</a:t>
             </a:r>
             <a:endParaRPr lang="en-US" sz="1150" dirty="0"/>
           </a:p>
@@ -3436,42 +3873,340 @@
                 <a:ea typeface="Cambria" pitchFamily="34" charset="-122"/>
                 <a:cs typeface="Cambria" pitchFamily="34" charset="-120"/>
               </a:rPr>
-              <a:t>Économie d'eau attendue selon le mode d'irrigation</a:t>
+              <a:t>Protéger les cultures, fixer les sols</a:t>
             </a:r>
             <a:endParaRPr lang="en-US" sz="3000" dirty="0"/>
           </a:p>
         </p:txBody>
       </p:sp>
-      <p:graphicFrame>
-        <p:nvGraphicFramePr>
-          <p:cNvPr id="4" name="Chart 0" descr=""/>
-          <p:cNvGraphicFramePr/>
-          <p:nvPr/>
-        </p:nvGraphicFramePr>
-        <p:xfrm>
-          <a:off x="594360" y="1783080"/>
-          <a:ext cx="7360920" cy="3977640"/>
-        </p:xfrm>
-        <a:graphic xmlns:a="http://schemas.openxmlformats.org/drawingml/2006/main">
-          <a:graphicData uri="http://schemas.openxmlformats.org/drawingml/2006/chart">
-            <c:chart xmlns:c="http://schemas.openxmlformats.org/drawingml/2006/chart" r:id="rId1"/>
-          </a:graphicData>
-        </a:graphic>
-      </p:graphicFrame>
-      <p:sp>
-        <p:nvSpPr>
-          <p:cNvPr id="5" name="Shape 2"/>
+      <p:sp>
+        <p:nvSpPr>
+          <p:cNvPr id="4" name="Text 2"/>
+          <p:cNvSpPr txBox="1"/>
+          <p:nvPr/>
+        </p:nvSpPr>
+        <p:spPr>
+          <a:xfrm>
+            <a:off x="594360" y="1783080"/>
+            <a:ext cx="5227168" cy="411480"/>
+          </a:xfrm>
+          <a:prstGeom prst="rect">
+            <a:avLst/>
+          </a:prstGeom>
+          <a:noFill/>
+          <a:ln/>
+        </p:spPr>
+        <p:txBody>
+          <a:bodyPr wrap="square" lIns="0" tIns="0" rIns="0" bIns="0" rtlCol="0" anchor="ctr"/>
+          <a:lstStyle/>
+          <a:p>
+            <a:pPr algn="l" indent="0" marL="0">
+              <a:buNone/>
+            </a:pPr>
+            <a:r>
+              <a:rPr lang="en-US" sz="1600" b="1" dirty="0">
+                <a:solidFill>
+                  <a:srgbClr val="1D4E6B"/>
+                </a:solidFill>
+                <a:latin typeface="Cambria" pitchFamily="34" charset="0"/>
+                <a:ea typeface="Cambria" pitchFamily="34" charset="-122"/>
+                <a:cs typeface="Cambria" pitchFamily="34" charset="-120"/>
+              </a:rPr>
+              <a:t>NAPEMA® — protéger sans résidu</a:t>
+            </a:r>
+            <a:endParaRPr lang="en-US" sz="1600" dirty="0"/>
+          </a:p>
+        </p:txBody>
+      </p:sp>
+      <p:sp>
+        <p:nvSpPr>
+          <p:cNvPr id="5" name="Text 3"/>
+          <p:cNvSpPr txBox="1"/>
+          <p:nvPr/>
+        </p:nvSpPr>
+        <p:spPr>
+          <a:xfrm>
+            <a:off x="594360" y="2286000"/>
+            <a:ext cx="5227168" cy="2468880"/>
+          </a:xfrm>
+          <a:prstGeom prst="rect">
+            <a:avLst/>
+          </a:prstGeom>
+          <a:noFill/>
+          <a:ln/>
+        </p:spPr>
+        <p:txBody>
+          <a:bodyPr wrap="square" lIns="0" tIns="0" rIns="0" bIns="0" rtlCol="0" anchor="t"/>
+          <a:lstStyle/>
+          <a:p>
+            <a:pPr algn="l" marL="342900" indent="-342900">
+              <a:lnSpc>
+                <a:spcPct val="122000"/>
+              </a:lnSpc>
+              <a:spcAft>
+                <a:spcPts val="1000"/>
+              </a:spcAft>
+              <a:buSzPct val="100000"/>
+              <a:buChar char="•"/>
+            </a:pPr>
+            <a:r>
+              <a:rPr lang="en-US" sz="1350" dirty="0">
+                <a:solidFill>
+                  <a:srgbClr val="2F3E47"/>
+                </a:solidFill>
+                <a:latin typeface="Calibri" pitchFamily="34" charset="0"/>
+                <a:ea typeface="Calibri" pitchFamily="34" charset="-122"/>
+                <a:cs typeface="Calibri" pitchFamily="34" charset="-120"/>
+              </a:rPr>
+              <a:t>Lutte contre maladies, parasites, champignons et ravageurs, sans molécule de synthèse.</a:t>
+            </a:r>
+            <a:endParaRPr lang="en-US" sz="1350" dirty="0"/>
+          </a:p>
+          <a:p>
+            <a:pPr algn="l" marL="342900" indent="-342900">
+              <a:lnSpc>
+                <a:spcPct val="122000"/>
+              </a:lnSpc>
+              <a:spcAft>
+                <a:spcPts val="1000"/>
+              </a:spcAft>
+              <a:buSzPct val="100000"/>
+              <a:buChar char="•"/>
+            </a:pPr>
+            <a:r>
+              <a:rPr lang="en-US" sz="1350" dirty="0">
+                <a:solidFill>
+                  <a:srgbClr val="2F3E47"/>
+                </a:solidFill>
+                <a:latin typeface="Calibri" pitchFamily="34" charset="0"/>
+                <a:ea typeface="Calibri" pitchFamily="34" charset="-122"/>
+                <a:cs typeface="Calibri" pitchFamily="34" charset="-120"/>
+              </a:rPr>
+              <a:t>Pulvérisation foliaire et racinaire, à effet préventif comme curatif.</a:t>
+            </a:r>
+            <a:endParaRPr lang="en-US" sz="1350" dirty="0"/>
+          </a:p>
+          <a:p>
+            <a:pPr algn="l" marL="342900" indent="-342900">
+              <a:lnSpc>
+                <a:spcPct val="122000"/>
+              </a:lnSpc>
+              <a:spcAft>
+                <a:spcPts val="1000"/>
+              </a:spcAft>
+              <a:buSzPct val="100000"/>
+              <a:buChar char="•"/>
+            </a:pPr>
+            <a:r>
+              <a:rPr lang="en-US" sz="1350" dirty="0">
+                <a:solidFill>
+                  <a:srgbClr val="2F3E47"/>
+                </a:solidFill>
+                <a:latin typeface="Calibri" pitchFamily="34" charset="0"/>
+                <a:ea typeface="Calibri" pitchFamily="34" charset="-122"/>
+                <a:cs typeface="Calibri" pitchFamily="34" charset="-120"/>
+              </a:rPr>
+              <a:t>Aucun résidu dans le sol, la plante ou l'air : pollinisateurs et auxiliaires préservés.</a:t>
+            </a:r>
+            <a:endParaRPr lang="en-US" sz="1350" dirty="0"/>
+          </a:p>
+          <a:p>
+            <a:pPr algn="l" marL="342900" indent="-342900">
+              <a:lnSpc>
+                <a:spcPct val="122000"/>
+              </a:lnSpc>
+              <a:spcAft>
+                <a:spcPts val="1000"/>
+              </a:spcAft>
+              <a:buSzPct val="100000"/>
+              <a:buChar char="•"/>
+            </a:pPr>
+            <a:r>
+              <a:rPr lang="en-US" sz="1350" dirty="0">
+                <a:solidFill>
+                  <a:srgbClr val="2F3E47"/>
+                </a:solidFill>
+                <a:latin typeface="Calibri" pitchFamily="34" charset="0"/>
+                <a:ea typeface="Calibri" pitchFamily="34" charset="-122"/>
+                <a:cs typeface="Calibri" pitchFamily="34" charset="-120"/>
+              </a:rPr>
+              <a:t>Formulé sur mesure pour un problème précis : cochenille, HLB des agrumes, nématodes.</a:t>
+            </a:r>
+            <a:endParaRPr lang="en-US" sz="1350" dirty="0"/>
+          </a:p>
+        </p:txBody>
+      </p:sp>
+      <p:sp>
+        <p:nvSpPr>
+          <p:cNvPr id="6" name="Text 4"/>
+          <p:cNvSpPr txBox="1"/>
+          <p:nvPr/>
+        </p:nvSpPr>
+        <p:spPr>
+          <a:xfrm>
+            <a:off x="6370168" y="1783080"/>
+            <a:ext cx="5227168" cy="411480"/>
+          </a:xfrm>
+          <a:prstGeom prst="rect">
+            <a:avLst/>
+          </a:prstGeom>
+          <a:noFill/>
+          <a:ln/>
+        </p:spPr>
+        <p:txBody>
+          <a:bodyPr wrap="square" lIns="0" tIns="0" rIns="0" bIns="0" rtlCol="0" anchor="ctr"/>
+          <a:lstStyle/>
+          <a:p>
+            <a:pPr algn="l" indent="0" marL="0">
+              <a:buNone/>
+            </a:pPr>
+            <a:r>
+              <a:rPr lang="en-US" sz="1600" b="1" dirty="0">
+                <a:solidFill>
+                  <a:srgbClr val="1D4E6B"/>
+                </a:solidFill>
+                <a:latin typeface="Cambria" pitchFamily="34" charset="0"/>
+                <a:ea typeface="Cambria" pitchFamily="34" charset="-122"/>
+                <a:cs typeface="Cambria" pitchFamily="34" charset="-120"/>
+              </a:rPr>
+              <a:t>Paulownia ALTIFOLIA® — l'arbre des régions chaudes</a:t>
+            </a:r>
+            <a:endParaRPr lang="en-US" sz="1600" dirty="0"/>
+          </a:p>
+        </p:txBody>
+      </p:sp>
+      <p:sp>
+        <p:nvSpPr>
+          <p:cNvPr id="7" name="Text 5"/>
+          <p:cNvSpPr txBox="1"/>
+          <p:nvPr/>
+        </p:nvSpPr>
+        <p:spPr>
+          <a:xfrm>
+            <a:off x="6370168" y="2286000"/>
+            <a:ext cx="5227168" cy="2468880"/>
+          </a:xfrm>
+          <a:prstGeom prst="rect">
+            <a:avLst/>
+          </a:prstGeom>
+          <a:noFill/>
+          <a:ln/>
+        </p:spPr>
+        <p:txBody>
+          <a:bodyPr wrap="square" lIns="0" tIns="0" rIns="0" bIns="0" rtlCol="0" anchor="t"/>
+          <a:lstStyle/>
+          <a:p>
+            <a:pPr algn="l" marL="342900" indent="-342900">
+              <a:lnSpc>
+                <a:spcPct val="122000"/>
+              </a:lnSpc>
+              <a:spcAft>
+                <a:spcPts val="1000"/>
+              </a:spcAft>
+              <a:buSzPct val="100000"/>
+              <a:buChar char="•"/>
+            </a:pPr>
+            <a:r>
+              <a:rPr lang="en-US" sz="1350" dirty="0">
+                <a:solidFill>
+                  <a:srgbClr val="2F3E47"/>
+                </a:solidFill>
+                <a:latin typeface="Calibri" pitchFamily="34" charset="0"/>
+                <a:ea typeface="Calibri" pitchFamily="34" charset="-122"/>
+                <a:cs typeface="Calibri" pitchFamily="34" charset="-120"/>
+              </a:rPr>
+              <a:t>13 à 15 m en six à huit ans, avec un tronc de gros diamètre.</a:t>
+            </a:r>
+            <a:endParaRPr lang="en-US" sz="1350" dirty="0"/>
+          </a:p>
+          <a:p>
+            <a:pPr algn="l" marL="342900" indent="-342900">
+              <a:lnSpc>
+                <a:spcPct val="122000"/>
+              </a:lnSpc>
+              <a:spcAft>
+                <a:spcPts val="1000"/>
+              </a:spcAft>
+              <a:buSzPct val="100000"/>
+              <a:buChar char="•"/>
+            </a:pPr>
+            <a:r>
+              <a:rPr lang="en-US" sz="1350" dirty="0">
+                <a:solidFill>
+                  <a:srgbClr val="2F3E47"/>
+                </a:solidFill>
+                <a:latin typeface="Calibri" pitchFamily="34" charset="0"/>
+                <a:ea typeface="Calibri" pitchFamily="34" charset="-122"/>
+                <a:cs typeface="Calibri" pitchFamily="34" charset="-120"/>
+              </a:rPr>
+              <a:t>Associé à 100 g d'EVERGREEN® par plant, l'irrigation nécessaire diminue de 50 %.</a:t>
+            </a:r>
+            <a:endParaRPr lang="en-US" sz="1350" dirty="0"/>
+          </a:p>
+          <a:p>
+            <a:pPr algn="l" marL="342900" indent="-342900">
+              <a:lnSpc>
+                <a:spcPct val="122000"/>
+              </a:lnSpc>
+              <a:spcAft>
+                <a:spcPts val="1000"/>
+              </a:spcAft>
+              <a:buSzPct val="100000"/>
+              <a:buChar char="•"/>
+            </a:pPr>
+            <a:r>
+              <a:rPr lang="en-US" sz="1350" dirty="0">
+                <a:solidFill>
+                  <a:srgbClr val="2F3E47"/>
+                </a:solidFill>
+                <a:latin typeface="Calibri" pitchFamily="34" charset="0"/>
+                <a:ea typeface="Calibri" pitchFamily="34" charset="-122"/>
+                <a:cs typeface="Calibri" pitchFamily="34" charset="-120"/>
+              </a:rPr>
+              <a:t>Résiste de −25 °C à +45 °C ; son bois ne s'enflamme qu'à partir de 426 °C.</a:t>
+            </a:r>
+            <a:endParaRPr lang="en-US" sz="1350" dirty="0"/>
+          </a:p>
+          <a:p>
+            <a:pPr algn="l" marL="342900" indent="-342900">
+              <a:lnSpc>
+                <a:spcPct val="122000"/>
+              </a:lnSpc>
+              <a:spcAft>
+                <a:spcPts val="1000"/>
+              </a:spcAft>
+              <a:buSzPct val="100000"/>
+              <a:buChar char="•"/>
+            </a:pPr>
+            <a:r>
+              <a:rPr lang="en-US" sz="1350" dirty="0">
+                <a:solidFill>
+                  <a:srgbClr val="2F3E47"/>
+                </a:solidFill>
+                <a:latin typeface="Calibri" pitchFamily="34" charset="0"/>
+                <a:ea typeface="Calibri" pitchFamily="34" charset="-122"/>
+                <a:cs typeface="Calibri" pitchFamily="34" charset="-120"/>
+              </a:rPr>
+              <a:t>Brise-vent, protection des sols contre l'érosion, 400 à 700 kg de miel par hectare.</a:t>
+            </a:r>
+            <a:endParaRPr lang="en-US" sz="1350" dirty="0"/>
+          </a:p>
+        </p:txBody>
+      </p:sp>
+      <p:sp>
+        <p:nvSpPr>
+          <p:cNvPr id="8" name="Shape 6"/>
           <p:cNvSpPr/>
           <p:nvPr/>
         </p:nvSpPr>
         <p:spPr>
           <a:xfrm>
-            <a:off x="8275320" y="1783080"/>
-            <a:ext cx="3291840" cy="3977640"/>
+            <a:off x="594360" y="4846320"/>
+            <a:ext cx="11002975" cy="960120"/>
           </a:xfrm>
           <a:prstGeom prst="roundRect">
             <a:avLst>
-              <a:gd name="adj" fmla="val 2778"/>
+              <a:gd name="adj" fmla="val 7619"/>
             </a:avLst>
           </a:prstGeom>
           <a:solidFill>
@@ -3487,53 +4222,14 @@
       </p:sp>
       <p:sp>
         <p:nvSpPr>
-          <p:cNvPr id="6" name="Text 3"/>
-          <p:cNvSpPr txBox="1"/>
-          <p:nvPr/>
-        </p:nvSpPr>
-        <p:spPr>
-          <a:xfrm>
-            <a:off x="8503920" y="2011680"/>
-            <a:ext cx="2834640" cy="457200"/>
-          </a:xfrm>
-          <a:prstGeom prst="rect">
-            <a:avLst/>
-          </a:prstGeom>
-          <a:noFill/>
-          <a:ln/>
-        </p:spPr>
-        <p:txBody>
-          <a:bodyPr wrap="square" lIns="0" tIns="0" rIns="0" bIns="0" rtlCol="0" anchor="ctr"/>
-          <a:lstStyle/>
-          <a:p>
-            <a:pPr algn="l" indent="0" marL="0">
-              <a:buNone/>
-            </a:pPr>
-            <a:r>
-              <a:rPr lang="en-US" sz="1300" b="1" dirty="0">
-                <a:solidFill>
-                  <a:srgbClr val="1D4E6B"/>
-                </a:solidFill>
-                <a:latin typeface="Cambria" pitchFamily="34" charset="0"/>
-                <a:ea typeface="Cambria" pitchFamily="34" charset="-122"/>
-                <a:cs typeface="Cambria" pitchFamily="34" charset="-120"/>
-              </a:rPr>
-              <a:t>À lire avec prudence</a:t>
-            </a:r>
-            <a:endParaRPr lang="en-US" sz="1300" dirty="0"/>
-          </a:p>
-        </p:txBody>
-      </p:sp>
-      <p:sp>
-        <p:nvSpPr>
-          <p:cNvPr id="7" name="Text 4"/>
-          <p:cNvSpPr txBox="1"/>
-          <p:nvPr/>
-        </p:nvSpPr>
-        <p:spPr>
-          <a:xfrm>
-            <a:off x="8503920" y="2560320"/>
-            <a:ext cx="2834640" cy="3017520"/>
+          <p:cNvPr id="9" name="Text 7"/>
+          <p:cNvSpPr txBox="1"/>
+          <p:nvPr/>
+        </p:nvSpPr>
+        <p:spPr>
+          <a:xfrm>
+            <a:off x="822960" y="4983480"/>
+            <a:ext cx="10545775" cy="713232"/>
           </a:xfrm>
           <a:prstGeom prst="rect">
             <a:avLst/>
@@ -3547,57 +4243,28 @@
           <a:p>
             <a:pPr algn="l" indent="0" marL="0">
               <a:lnSpc>
-                <a:spcPct val="125000"/>
+                <a:spcPct val="118000"/>
               </a:lnSpc>
               <a:buNone/>
             </a:pPr>
             <a:r>
-              <a:rPr lang="en-US" sz="1200" dirty="0">
-                <a:solidFill>
-                  <a:srgbClr val="2F3E47"/>
-                </a:solidFill>
-                <a:latin typeface="Calibri" pitchFamily="34" charset="0"/>
-                <a:ea typeface="Calibri" pitchFamily="34" charset="-122"/>
-                <a:cs typeface="Calibri" pitchFamily="34" charset="-120"/>
-              </a:rPr>
-              <a:t>Ces fourchettes sont indicatives et fondées sur les gains documentés de nos hydro-rétenteurs.</a:t>
-            </a:r>
-            <a:endParaRPr lang="en-US" sz="1200" dirty="0"/>
-          </a:p>
-          <a:p>
-            <a:pPr algn="l" indent="0" marL="0">
-              <a:lnSpc>
-                <a:spcPct val="125000"/>
-              </a:lnSpc>
-              <a:buNone/>
-            </a:pPr>
-            <a:endParaRPr lang="en-US" sz="1200" dirty="0"/>
-          </a:p>
-          <a:p>
-            <a:pPr algn="l" indent="0" marL="0">
-              <a:lnSpc>
-                <a:spcPct val="125000"/>
-              </a:lnSpc>
-              <a:buNone/>
-            </a:pPr>
-            <a:r>
-              <a:rPr lang="en-US" sz="1200" dirty="0">
-                <a:solidFill>
-                  <a:srgbClr val="2F3E47"/>
-                </a:solidFill>
-                <a:latin typeface="Calibri" pitchFamily="34" charset="0"/>
-                <a:ea typeface="Calibri" pitchFamily="34" charset="-122"/>
-                <a:cs typeface="Calibri" pitchFamily="34" charset="-120"/>
-              </a:rPr>
-              <a:t>Le résultat réel dépend du sol, du climat et de la culture. Ces chiffres donnent un ordre de grandeur : ils ne constituent en aucun cas une valeur garantie, contractuelle ou absolue.</a:t>
-            </a:r>
-            <a:endParaRPr lang="en-US" sz="1200" dirty="0"/>
-          </a:p>
-        </p:txBody>
-      </p:sp>
-      <p:sp>
-        <p:nvSpPr>
-          <p:cNvPr id="8" name="Text 5"/>
+              <a:rPr lang="en-US" sz="1100" dirty="0">
+                <a:solidFill>
+                  <a:srgbClr val="6B7D87"/>
+                </a:solidFill>
+                <a:latin typeface="Calibri" pitchFamily="34" charset="0"/>
+                <a:ea typeface="Calibri" pitchFamily="34" charset="-122"/>
+                <a:cs typeface="Calibri" pitchFamily="34" charset="-120"/>
+              </a:rPr>
+              <a:t>Plants livrés en pot (25 à 30 cm), certifiés indemnes de maladies et remplacés sous garantie en cas de perte. Première coupe à la fin de la sixième année, bois valorisé autour de 400 à 450 € le m³.</a:t>
+            </a:r>
+            <a:endParaRPr lang="en-US" sz="1100" dirty="0"/>
+          </a:p>
+        </p:txBody>
+      </p:sp>
+      <p:sp>
+        <p:nvSpPr>
+          <p:cNvPr id="10" name="Text 8"/>
           <p:cNvSpPr txBox="1"/>
           <p:nvPr/>
         </p:nvSpPr>
@@ -3638,7 +4305,7 @@
       </p:sp>
       <p:sp>
         <p:nvSpPr>
-          <p:cNvPr id="9" name="Text 6"/>
+          <p:cNvPr id="11" name="Text 9"/>
           <p:cNvSpPr txBox="1"/>
           <p:nvPr/>
         </p:nvSpPr>
@@ -3742,7 +4409,7 @@
                 <a:ea typeface="Calibri" pitchFamily="34" charset="-122"/>
                 <a:cs typeface="Calibri" pitchFamily="34" charset="-120"/>
               </a:rPr>
-              <a:t>TROIS TERRAINS PRIORITAIRES</a:t>
+              <a:t>ORDRES DE GRANDEUR</a:t>
             </a:r>
             <a:endParaRPr lang="en-US" sz="1150" dirty="0"/>
           </a:p>
@@ -3781,26 +4448,42 @@
                 <a:ea typeface="Cambria" pitchFamily="34" charset="-122"/>
                 <a:cs typeface="Cambria" pitchFamily="34" charset="-120"/>
               </a:rPr>
-              <a:t>Où engager les premiers essais</a:t>
+              <a:t>Économie d'eau attendue selon le mode d'irrigation</a:t>
             </a:r>
             <a:endParaRPr lang="en-US" sz="3000" dirty="0"/>
           </a:p>
         </p:txBody>
       </p:sp>
-      <p:sp>
-        <p:nvSpPr>
-          <p:cNvPr id="4" name="Shape 2"/>
+      <p:graphicFrame>
+        <p:nvGraphicFramePr>
+          <p:cNvPr id="4" name="Chart 0" descr=""/>
+          <p:cNvGraphicFramePr/>
+          <p:nvPr/>
+        </p:nvGraphicFramePr>
+        <p:xfrm>
+          <a:off x="594360" y="1783080"/>
+          <a:ext cx="7360920" cy="3977640"/>
+        </p:xfrm>
+        <a:graphic xmlns:a="http://schemas.openxmlformats.org/drawingml/2006/main">
+          <a:graphicData uri="http://schemas.openxmlformats.org/drawingml/2006/chart">
+            <c:chart xmlns:c="http://schemas.openxmlformats.org/drawingml/2006/chart" r:id="rId1"/>
+          </a:graphicData>
+        </a:graphic>
+      </p:graphicFrame>
+      <p:sp>
+        <p:nvSpPr>
+          <p:cNvPr id="5" name="Shape 2"/>
           <p:cNvSpPr/>
           <p:nvPr/>
         </p:nvSpPr>
         <p:spPr>
           <a:xfrm>
-            <a:off x="594360" y="1783080"/>
-            <a:ext cx="3472586" cy="4069080"/>
+            <a:off x="8275320" y="1783080"/>
+            <a:ext cx="3291840" cy="3977640"/>
           </a:xfrm>
           <a:prstGeom prst="roundRect">
             <a:avLst>
-              <a:gd name="adj" fmla="val 2633"/>
+              <a:gd name="adj" fmla="val 2778"/>
             </a:avLst>
           </a:prstGeom>
           <a:solidFill>
@@ -3814,30 +4497,6 @@
           </a:ln>
         </p:spPr>
       </p:sp>
-      <p:pic>
-        <p:nvPicPr>
-          <p:cNvPr id="5" name="Image 0" descr="preencoded.png">    </p:cNvPr>
-          <p:cNvPicPr>
-            <a:picLocks noChangeAspect="1"/>
-          </p:cNvPicPr>
-          <p:nvPr/>
-        </p:nvPicPr>
-        <p:blipFill>
-          <a:blip r:embed="rId1"/>
-          <a:stretch>
-            <a:fillRect/>
-          </a:stretch>
-        </p:blipFill>
-        <p:spPr>
-          <a:xfrm>
-            <a:off x="594360" y="1783080"/>
-            <a:ext cx="3472586" cy="1691640"/>
-          </a:xfrm>
-          <a:prstGeom prst="rect">
-            <a:avLst/>
-          </a:prstGeom>
-        </p:spPr>
-      </p:pic>
       <p:sp>
         <p:nvSpPr>
           <p:cNvPr id="6" name="Text 3"/>
@@ -3846,8 +4505,8 @@
         </p:nvSpPr>
         <p:spPr>
           <a:xfrm>
-            <a:off x="795528" y="3639312"/>
-            <a:ext cx="3070250" cy="384048"/>
+            <a:off x="8503920" y="2011680"/>
+            <a:ext cx="2834640" cy="457200"/>
           </a:xfrm>
           <a:prstGeom prst="rect">
             <a:avLst/>
@@ -3863,7 +4522,7 @@
               <a:buNone/>
             </a:pPr>
             <a:r>
-              <a:rPr lang="en-US" sz="1500" b="1" dirty="0">
+              <a:rPr lang="en-US" sz="1300" b="1" dirty="0">
                 <a:solidFill>
                   <a:srgbClr val="1D4E6B"/>
                 </a:solidFill>
@@ -3871,9 +4530,9 @@
                 <a:ea typeface="Cambria" pitchFamily="34" charset="-122"/>
                 <a:cs typeface="Cambria" pitchFamily="34" charset="-120"/>
               </a:rPr>
-              <a:t>Vallée du fleuve Sénégal</a:t>
-            </a:r>
-            <a:endParaRPr lang="en-US" sz="1500" dirty="0"/>
+              <a:t>À lire avec prudence</a:t>
+            </a:r>
+            <a:endParaRPr lang="en-US" sz="1300" dirty="0"/>
           </a:p>
         </p:txBody>
       </p:sp>
@@ -3885,580 +4544,72 @@
         </p:nvSpPr>
         <p:spPr>
           <a:xfrm>
-            <a:off x="795528" y="4041648"/>
-            <a:ext cx="3070250" cy="329184"/>
-          </a:xfrm>
-          <a:prstGeom prst="rect">
-            <a:avLst/>
-          </a:prstGeom>
-          <a:noFill/>
-          <a:ln/>
-        </p:spPr>
-        <p:txBody>
-          <a:bodyPr wrap="square" lIns="0" tIns="0" rIns="0" bIns="0" rtlCol="0" anchor="ctr"/>
+            <a:off x="8503920" y="2560320"/>
+            <a:ext cx="2834640" cy="3017520"/>
+          </a:xfrm>
+          <a:prstGeom prst="rect">
+            <a:avLst/>
+          </a:prstGeom>
+          <a:noFill/>
+          <a:ln/>
+        </p:spPr>
+        <p:txBody>
+          <a:bodyPr wrap="square" lIns="0" tIns="0" rIns="0" bIns="0" rtlCol="0" anchor="t"/>
           <a:lstStyle/>
           <a:p>
             <a:pPr algn="l" indent="0" marL="0">
-              <a:buNone/>
-            </a:pPr>
-            <a:r>
-              <a:rPr lang="en-US" sz="1250" b="1" dirty="0">
-                <a:solidFill>
-                  <a:srgbClr val="9A5F12"/>
-                </a:solidFill>
-                <a:latin typeface="Calibri" pitchFamily="34" charset="0"/>
-                <a:ea typeface="Calibri" pitchFamily="34" charset="-122"/>
-                <a:cs typeface="Calibri" pitchFamily="34" charset="-120"/>
-              </a:rPr>
-              <a:t>Riz et oignon irrigués</a:t>
-            </a:r>
-            <a:endParaRPr lang="en-US" sz="1250" dirty="0"/>
+              <a:lnSpc>
+                <a:spcPct val="125000"/>
+              </a:lnSpc>
+              <a:buNone/>
+            </a:pPr>
+            <a:r>
+              <a:rPr lang="en-US" sz="1200" dirty="0">
+                <a:solidFill>
+                  <a:srgbClr val="2F3E47"/>
+                </a:solidFill>
+                <a:latin typeface="Calibri" pitchFamily="34" charset="0"/>
+                <a:ea typeface="Calibri" pitchFamily="34" charset="-122"/>
+                <a:cs typeface="Calibri" pitchFamily="34" charset="-120"/>
+              </a:rPr>
+              <a:t>Ces fourchettes sont indicatives et fondées sur les gains documentés de nos hydro-rétenteurs.</a:t>
+            </a:r>
+            <a:endParaRPr lang="en-US" sz="1200" dirty="0"/>
+          </a:p>
+          <a:p>
+            <a:pPr algn="l" indent="0" marL="0">
+              <a:lnSpc>
+                <a:spcPct val="125000"/>
+              </a:lnSpc>
+              <a:buNone/>
+            </a:pPr>
+            <a:endParaRPr lang="en-US" sz="1200" dirty="0"/>
+          </a:p>
+          <a:p>
+            <a:pPr algn="l" indent="0" marL="0">
+              <a:lnSpc>
+                <a:spcPct val="125000"/>
+              </a:lnSpc>
+              <a:buNone/>
+            </a:pPr>
+            <a:r>
+              <a:rPr lang="en-US" sz="1200" dirty="0">
+                <a:solidFill>
+                  <a:srgbClr val="2F3E47"/>
+                </a:solidFill>
+                <a:latin typeface="Calibri" pitchFamily="34" charset="0"/>
+                <a:ea typeface="Calibri" pitchFamily="34" charset="-122"/>
+                <a:cs typeface="Calibri" pitchFamily="34" charset="-120"/>
+              </a:rPr>
+              <a:t>Le résultat réel dépend du sol, du climat et de la culture. Ces chiffres donnent un ordre de grandeur : ils ne constituent en aucun cas une valeur garantie, contractuelle ou absolue.</a:t>
+            </a:r>
+            <a:endParaRPr lang="en-US" sz="1200" dirty="0"/>
           </a:p>
         </p:txBody>
       </p:sp>
       <p:sp>
         <p:nvSpPr>
           <p:cNvPr id="8" name="Text 5"/>
-          <p:cNvSpPr txBox="1"/>
-          <p:nvPr/>
-        </p:nvSpPr>
-        <p:spPr>
-          <a:xfrm>
-            <a:off x="795528" y="4407408"/>
-            <a:ext cx="3070250" cy="1280160"/>
-          </a:xfrm>
-          <a:prstGeom prst="rect">
-            <a:avLst/>
-          </a:prstGeom>
-          <a:noFill/>
-          <a:ln/>
-        </p:spPr>
-        <p:txBody>
-          <a:bodyPr wrap="square" lIns="0" tIns="0" rIns="0" bIns="0" rtlCol="0" anchor="t"/>
-          <a:lstStyle/>
-          <a:p>
-            <a:pPr algn="l" marL="342900" indent="-342900">
-              <a:lnSpc>
-                <a:spcPct val="116000"/>
-              </a:lnSpc>
-              <a:spcAft>
-                <a:spcPts val="700"/>
-              </a:spcAft>
-              <a:buSzPct val="100000"/>
-              <a:buChar char="•"/>
-            </a:pPr>
-            <a:r>
-              <a:rPr lang="en-US" sz="1150" dirty="0">
-                <a:solidFill>
-                  <a:srgbClr val="2F3E47"/>
-                </a:solidFill>
-                <a:latin typeface="Calibri" pitchFamily="34" charset="0"/>
-                <a:ea typeface="Calibri" pitchFamily="34" charset="-122"/>
-                <a:cs typeface="Calibri" pitchFamily="34" charset="-120"/>
-              </a:rPr>
-              <a:t>Périmètres irrigués aménagés par la SAED, de Saint-Louis à Matam.</a:t>
-            </a:r>
-            <a:endParaRPr lang="en-US" sz="1150" dirty="0"/>
-          </a:p>
-          <a:p>
-            <a:pPr algn="l" marL="342900" indent="-342900">
-              <a:lnSpc>
-                <a:spcPct val="116000"/>
-              </a:lnSpc>
-              <a:spcAft>
-                <a:spcPts val="700"/>
-              </a:spcAft>
-              <a:buSzPct val="100000"/>
-              <a:buChar char="•"/>
-            </a:pPr>
-            <a:r>
-              <a:rPr lang="en-US" sz="1150" dirty="0">
-                <a:solidFill>
-                  <a:srgbClr val="2F3E47"/>
-                </a:solidFill>
-                <a:latin typeface="Calibri" pitchFamily="34" charset="0"/>
-                <a:ea typeface="Calibri" pitchFamily="34" charset="-122"/>
-                <a:cs typeface="Calibri" pitchFamily="34" charset="-120"/>
-              </a:rPr>
-              <a:t>Pompage coûteux et parcelles sableuses en bordure : l'eau économisée se lit sur la facture.</a:t>
-            </a:r>
-            <a:endParaRPr lang="en-US" sz="1150" dirty="0"/>
-          </a:p>
-          <a:p>
-            <a:pPr algn="l" marL="342900" indent="-342900">
-              <a:lnSpc>
-                <a:spcPct val="116000"/>
-              </a:lnSpc>
-              <a:spcAft>
-                <a:spcPts val="700"/>
-              </a:spcAft>
-              <a:buSzPct val="100000"/>
-              <a:buChar char="•"/>
-            </a:pPr>
-            <a:r>
-              <a:rPr lang="en-US" sz="1150" dirty="0">
-                <a:solidFill>
-                  <a:srgbClr val="2F3E47"/>
-                </a:solidFill>
-                <a:latin typeface="Calibri" pitchFamily="34" charset="0"/>
-                <a:ea typeface="Calibri" pitchFamily="34" charset="-122"/>
-                <a:cs typeface="Calibri" pitchFamily="34" charset="-120"/>
-              </a:rPr>
-              <a:t>Organisations paysannes structurées, capables de suivre un essai sur une campagne.</a:t>
-            </a:r>
-            <a:endParaRPr lang="en-US" sz="1150" dirty="0"/>
-          </a:p>
-        </p:txBody>
-      </p:sp>
-      <p:sp>
-        <p:nvSpPr>
-          <p:cNvPr id="9" name="Shape 6"/>
-          <p:cNvSpPr/>
-          <p:nvPr/>
-        </p:nvSpPr>
-        <p:spPr>
-          <a:xfrm>
-            <a:off x="4359554" y="1783080"/>
-            <a:ext cx="3472586" cy="4069080"/>
-          </a:xfrm>
-          <a:prstGeom prst="roundRect">
-            <a:avLst>
-              <a:gd name="adj" fmla="val 2633"/>
-            </a:avLst>
-          </a:prstGeom>
-          <a:solidFill>
-            <a:srgbClr val="EEF2F5"/>
-          </a:solidFill>
-          <a:ln w="9525">
-            <a:solidFill>
-              <a:srgbClr val="D8E1E7"/>
-            </a:solidFill>
-            <a:prstDash val="solid"/>
-          </a:ln>
-        </p:spPr>
-      </p:sp>
-      <p:pic>
-        <p:nvPicPr>
-          <p:cNvPr id="10" name="Image 1" descr="preencoded.png">    </p:cNvPr>
-          <p:cNvPicPr>
-            <a:picLocks noChangeAspect="1"/>
-          </p:cNvPicPr>
-          <p:nvPr/>
-        </p:nvPicPr>
-        <p:blipFill>
-          <a:blip r:embed="rId2"/>
-          <a:stretch>
-            <a:fillRect/>
-          </a:stretch>
-        </p:blipFill>
-        <p:spPr>
-          <a:xfrm>
-            <a:off x="4359554" y="1783080"/>
-            <a:ext cx="3472586" cy="1691640"/>
-          </a:xfrm>
-          <a:prstGeom prst="rect">
-            <a:avLst/>
-          </a:prstGeom>
-        </p:spPr>
-      </p:pic>
-      <p:sp>
-        <p:nvSpPr>
-          <p:cNvPr id="11" name="Text 7"/>
-          <p:cNvSpPr txBox="1"/>
-          <p:nvPr/>
-        </p:nvSpPr>
-        <p:spPr>
-          <a:xfrm>
-            <a:off x="4560722" y="3639312"/>
-            <a:ext cx="3070250" cy="384048"/>
-          </a:xfrm>
-          <a:prstGeom prst="rect">
-            <a:avLst/>
-          </a:prstGeom>
-          <a:noFill/>
-          <a:ln/>
-        </p:spPr>
-        <p:txBody>
-          <a:bodyPr wrap="square" lIns="0" tIns="0" rIns="0" bIns="0" rtlCol="0" anchor="ctr"/>
-          <a:lstStyle/>
-          <a:p>
-            <a:pPr algn="l" indent="0" marL="0">
-              <a:buNone/>
-            </a:pPr>
-            <a:r>
-              <a:rPr lang="en-US" sz="1500" b="1" dirty="0">
-                <a:solidFill>
-                  <a:srgbClr val="1D4E6B"/>
-                </a:solidFill>
-                <a:latin typeface="Cambria" pitchFamily="34" charset="0"/>
-                <a:ea typeface="Cambria" pitchFamily="34" charset="-122"/>
-                <a:cs typeface="Cambria" pitchFamily="34" charset="-120"/>
-              </a:rPr>
-              <a:t>Niayes</a:t>
-            </a:r>
-            <a:endParaRPr lang="en-US" sz="1500" dirty="0"/>
-          </a:p>
-        </p:txBody>
-      </p:sp>
-      <p:sp>
-        <p:nvSpPr>
-          <p:cNvPr id="12" name="Text 8"/>
-          <p:cNvSpPr txBox="1"/>
-          <p:nvPr/>
-        </p:nvSpPr>
-        <p:spPr>
-          <a:xfrm>
-            <a:off x="4560722" y="4041648"/>
-            <a:ext cx="3070250" cy="329184"/>
-          </a:xfrm>
-          <a:prstGeom prst="rect">
-            <a:avLst/>
-          </a:prstGeom>
-          <a:noFill/>
-          <a:ln/>
-        </p:spPr>
-        <p:txBody>
-          <a:bodyPr wrap="square" lIns="0" tIns="0" rIns="0" bIns="0" rtlCol="0" anchor="ctr"/>
-          <a:lstStyle/>
-          <a:p>
-            <a:pPr algn="l" indent="0" marL="0">
-              <a:buNone/>
-            </a:pPr>
-            <a:r>
-              <a:rPr lang="en-US" sz="1250" b="1" dirty="0">
-                <a:solidFill>
-                  <a:srgbClr val="9A5F12"/>
-                </a:solidFill>
-                <a:latin typeface="Calibri" pitchFamily="34" charset="0"/>
-                <a:ea typeface="Calibri" pitchFamily="34" charset="-122"/>
-                <a:cs typeface="Calibri" pitchFamily="34" charset="-120"/>
-              </a:rPr>
-              <a:t>Premier bassin maraîcher</a:t>
-            </a:r>
-            <a:endParaRPr lang="en-US" sz="1250" dirty="0"/>
-          </a:p>
-        </p:txBody>
-      </p:sp>
-      <p:sp>
-        <p:nvSpPr>
-          <p:cNvPr id="13" name="Text 9"/>
-          <p:cNvSpPr txBox="1"/>
-          <p:nvPr/>
-        </p:nvSpPr>
-        <p:spPr>
-          <a:xfrm>
-            <a:off x="4560722" y="4407408"/>
-            <a:ext cx="3070250" cy="1280160"/>
-          </a:xfrm>
-          <a:prstGeom prst="rect">
-            <a:avLst/>
-          </a:prstGeom>
-          <a:noFill/>
-          <a:ln/>
-        </p:spPr>
-        <p:txBody>
-          <a:bodyPr wrap="square" lIns="0" tIns="0" rIns="0" bIns="0" rtlCol="0" anchor="t"/>
-          <a:lstStyle/>
-          <a:p>
-            <a:pPr algn="l" marL="342900" indent="-342900">
-              <a:lnSpc>
-                <a:spcPct val="116000"/>
-              </a:lnSpc>
-              <a:spcAft>
-                <a:spcPts val="700"/>
-              </a:spcAft>
-              <a:buSzPct val="100000"/>
-              <a:buChar char="•"/>
-            </a:pPr>
-            <a:r>
-              <a:rPr lang="en-US" sz="1150" dirty="0">
-                <a:solidFill>
-                  <a:srgbClr val="2F3E47"/>
-                </a:solidFill>
-                <a:latin typeface="Calibri" pitchFamily="34" charset="0"/>
-                <a:ea typeface="Calibri" pitchFamily="34" charset="-122"/>
-                <a:cs typeface="Calibri" pitchFamily="34" charset="-120"/>
-              </a:rPr>
-              <a:t>Bande côtière de Dakar à Saint-Louis, qui produit l'essentiel des légumes du pays.</a:t>
-            </a:r>
-            <a:endParaRPr lang="en-US" sz="1150" dirty="0"/>
-          </a:p>
-          <a:p>
-            <a:pPr algn="l" marL="342900" indent="-342900">
-              <a:lnSpc>
-                <a:spcPct val="116000"/>
-              </a:lnSpc>
-              <a:spcAft>
-                <a:spcPts val="700"/>
-              </a:spcAft>
-              <a:buSzPct val="100000"/>
-              <a:buChar char="•"/>
-            </a:pPr>
-            <a:r>
-              <a:rPr lang="en-US" sz="1150" dirty="0">
-                <a:solidFill>
-                  <a:srgbClr val="2F3E47"/>
-                </a:solidFill>
-                <a:latin typeface="Calibri" pitchFamily="34" charset="0"/>
-                <a:ea typeface="Calibri" pitchFamily="34" charset="-122"/>
-                <a:cs typeface="Calibri" pitchFamily="34" charset="-120"/>
-              </a:rPr>
-              <a:t>Nappes peu profondes en baisse et salinisation près de la mer.</a:t>
-            </a:r>
-            <a:endParaRPr lang="en-US" sz="1150" dirty="0"/>
-          </a:p>
-          <a:p>
-            <a:pPr algn="l" marL="342900" indent="-342900">
-              <a:lnSpc>
-                <a:spcPct val="116000"/>
-              </a:lnSpc>
-              <a:spcAft>
-                <a:spcPts val="700"/>
-              </a:spcAft>
-              <a:buSzPct val="100000"/>
-              <a:buChar char="•"/>
-            </a:pPr>
-            <a:r>
-              <a:rPr lang="en-US" sz="1150" dirty="0">
-                <a:solidFill>
-                  <a:srgbClr val="2F3E47"/>
-                </a:solidFill>
-                <a:latin typeface="Calibri" pitchFamily="34" charset="0"/>
-                <a:ea typeface="Calibri" pitchFamily="34" charset="-122"/>
-                <a:cs typeface="Calibri" pitchFamily="34" charset="-120"/>
-              </a:rPr>
-              <a:t>Cultures à cycle court et à forte valeur : un essai se conclut en une saison.</a:t>
-            </a:r>
-            <a:endParaRPr lang="en-US" sz="1150" dirty="0"/>
-          </a:p>
-        </p:txBody>
-      </p:sp>
-      <p:sp>
-        <p:nvSpPr>
-          <p:cNvPr id="14" name="Shape 10"/>
-          <p:cNvSpPr/>
-          <p:nvPr/>
-        </p:nvSpPr>
-        <p:spPr>
-          <a:xfrm>
-            <a:off x="8124749" y="1783080"/>
-            <a:ext cx="3472586" cy="4069080"/>
-          </a:xfrm>
-          <a:prstGeom prst="roundRect">
-            <a:avLst>
-              <a:gd name="adj" fmla="val 2633"/>
-            </a:avLst>
-          </a:prstGeom>
-          <a:solidFill>
-            <a:srgbClr val="EEF2F5"/>
-          </a:solidFill>
-          <a:ln w="9525">
-            <a:solidFill>
-              <a:srgbClr val="D8E1E7"/>
-            </a:solidFill>
-            <a:prstDash val="solid"/>
-          </a:ln>
-        </p:spPr>
-      </p:sp>
-      <p:pic>
-        <p:nvPicPr>
-          <p:cNvPr id="15" name="Image 2" descr="preencoded.png">    </p:cNvPr>
-          <p:cNvPicPr>
-            <a:picLocks noChangeAspect="1"/>
-          </p:cNvPicPr>
-          <p:nvPr/>
-        </p:nvPicPr>
-        <p:blipFill>
-          <a:blip r:embed="rId3"/>
-          <a:stretch>
-            <a:fillRect/>
-          </a:stretch>
-        </p:blipFill>
-        <p:spPr>
-          <a:xfrm>
-            <a:off x="8124749" y="1783080"/>
-            <a:ext cx="3472586" cy="1691640"/>
-          </a:xfrm>
-          <a:prstGeom prst="rect">
-            <a:avLst/>
-          </a:prstGeom>
-        </p:spPr>
-      </p:pic>
-      <p:sp>
-        <p:nvSpPr>
-          <p:cNvPr id="16" name="Text 11"/>
-          <p:cNvSpPr txBox="1"/>
-          <p:nvPr/>
-        </p:nvSpPr>
-        <p:spPr>
-          <a:xfrm>
-            <a:off x="8325917" y="3639312"/>
-            <a:ext cx="3070250" cy="384048"/>
-          </a:xfrm>
-          <a:prstGeom prst="rect">
-            <a:avLst/>
-          </a:prstGeom>
-          <a:noFill/>
-          <a:ln/>
-        </p:spPr>
-        <p:txBody>
-          <a:bodyPr wrap="square" lIns="0" tIns="0" rIns="0" bIns="0" rtlCol="0" anchor="ctr"/>
-          <a:lstStyle/>
-          <a:p>
-            <a:pPr algn="l" indent="0" marL="0">
-              <a:buNone/>
-            </a:pPr>
-            <a:r>
-              <a:rPr lang="en-US" sz="1500" b="1" dirty="0">
-                <a:solidFill>
-                  <a:srgbClr val="1D4E6B"/>
-                </a:solidFill>
-                <a:latin typeface="Cambria" pitchFamily="34" charset="0"/>
-                <a:ea typeface="Cambria" pitchFamily="34" charset="-122"/>
-                <a:cs typeface="Cambria" pitchFamily="34" charset="-120"/>
-              </a:rPr>
-              <a:t>Bassin arachidier</a:t>
-            </a:r>
-            <a:endParaRPr lang="en-US" sz="1500" dirty="0"/>
-          </a:p>
-        </p:txBody>
-      </p:sp>
-      <p:sp>
-        <p:nvSpPr>
-          <p:cNvPr id="17" name="Text 12"/>
-          <p:cNvSpPr txBox="1"/>
-          <p:nvPr/>
-        </p:nvSpPr>
-        <p:spPr>
-          <a:xfrm>
-            <a:off x="8325917" y="4041648"/>
-            <a:ext cx="3070250" cy="329184"/>
-          </a:xfrm>
-          <a:prstGeom prst="rect">
-            <a:avLst/>
-          </a:prstGeom>
-          <a:noFill/>
-          <a:ln/>
-        </p:spPr>
-        <p:txBody>
-          <a:bodyPr wrap="square" lIns="0" tIns="0" rIns="0" bIns="0" rtlCol="0" anchor="ctr"/>
-          <a:lstStyle/>
-          <a:p>
-            <a:pPr algn="l" indent="0" marL="0">
-              <a:buNone/>
-            </a:pPr>
-            <a:r>
-              <a:rPr lang="en-US" sz="1250" b="1" dirty="0">
-                <a:solidFill>
-                  <a:srgbClr val="9A5F12"/>
-                </a:solidFill>
-                <a:latin typeface="Calibri" pitchFamily="34" charset="0"/>
-                <a:ea typeface="Calibri" pitchFamily="34" charset="-122"/>
-                <a:cs typeface="Calibri" pitchFamily="34" charset="-120"/>
-              </a:rPr>
-              <a:t>Arachide et mil pluviaux</a:t>
-            </a:r>
-            <a:endParaRPr lang="en-US" sz="1250" dirty="0"/>
-          </a:p>
-        </p:txBody>
-      </p:sp>
-      <p:sp>
-        <p:nvSpPr>
-          <p:cNvPr id="18" name="Text 13"/>
-          <p:cNvSpPr txBox="1"/>
-          <p:nvPr/>
-        </p:nvSpPr>
-        <p:spPr>
-          <a:xfrm>
-            <a:off x="8325917" y="4407408"/>
-            <a:ext cx="3070250" cy="1280160"/>
-          </a:xfrm>
-          <a:prstGeom prst="rect">
-            <a:avLst/>
-          </a:prstGeom>
-          <a:noFill/>
-          <a:ln/>
-        </p:spPr>
-        <p:txBody>
-          <a:bodyPr wrap="square" lIns="0" tIns="0" rIns="0" bIns="0" rtlCol="0" anchor="t"/>
-          <a:lstStyle/>
-          <a:p>
-            <a:pPr algn="l" marL="342900" indent="-342900">
-              <a:lnSpc>
-                <a:spcPct val="116000"/>
-              </a:lnSpc>
-              <a:spcAft>
-                <a:spcPts val="700"/>
-              </a:spcAft>
-              <a:buSzPct val="100000"/>
-              <a:buChar char="•"/>
-            </a:pPr>
-            <a:r>
-              <a:rPr lang="en-US" sz="1150" dirty="0">
-                <a:solidFill>
-                  <a:srgbClr val="2F3E47"/>
-                </a:solidFill>
-                <a:latin typeface="Calibri" pitchFamily="34" charset="0"/>
-                <a:ea typeface="Calibri" pitchFamily="34" charset="-122"/>
-                <a:cs typeface="Calibri" pitchFamily="34" charset="-120"/>
-              </a:rPr>
-              <a:t>Arachide et mil sur sols sableux épuisés, dans le centre du pays.</a:t>
-            </a:r>
-            <a:endParaRPr lang="en-US" sz="1150" dirty="0"/>
-          </a:p>
-          <a:p>
-            <a:pPr algn="l" marL="342900" indent="-342900">
-              <a:lnSpc>
-                <a:spcPct val="116000"/>
-              </a:lnSpc>
-              <a:spcAft>
-                <a:spcPts val="700"/>
-              </a:spcAft>
-              <a:buSzPct val="100000"/>
-              <a:buChar char="•"/>
-            </a:pPr>
-            <a:r>
-              <a:rPr lang="en-US" sz="1150" dirty="0">
-                <a:solidFill>
-                  <a:srgbClr val="2F3E47"/>
-                </a:solidFill>
-                <a:latin typeface="Calibri" pitchFamily="34" charset="0"/>
-                <a:ea typeface="Calibri" pitchFamily="34" charset="-122"/>
-                <a:cs typeface="Calibri" pitchFamily="34" charset="-120"/>
-              </a:rPr>
-              <a:t>Semis exposés aux pauses de pluie de début d'hivernage.</a:t>
-            </a:r>
-            <a:endParaRPr lang="en-US" sz="1150" dirty="0"/>
-          </a:p>
-          <a:p>
-            <a:pPr algn="l" marL="342900" indent="-342900">
-              <a:lnSpc>
-                <a:spcPct val="116000"/>
-              </a:lnSpc>
-              <a:spcAft>
-                <a:spcPts val="700"/>
-              </a:spcAft>
-              <a:buSzPct val="100000"/>
-              <a:buChar char="•"/>
-            </a:pPr>
-            <a:r>
-              <a:rPr lang="en-US" sz="1150" dirty="0">
-                <a:solidFill>
-                  <a:srgbClr val="2F3E47"/>
-                </a:solidFill>
-                <a:latin typeface="Calibri" pitchFamily="34" charset="0"/>
-                <a:ea typeface="Calibri" pitchFamily="34" charset="-122"/>
-                <a:cs typeface="Calibri" pitchFamily="34" charset="-120"/>
-              </a:rPr>
-              <a:t>Coopératives et huiliers capables de regrouper les commandes.</a:t>
-            </a:r>
-            <a:endParaRPr lang="en-US" sz="1150" dirty="0"/>
-          </a:p>
-        </p:txBody>
-      </p:sp>
-      <p:sp>
-        <p:nvSpPr>
-          <p:cNvPr id="19" name="Text 14"/>
           <p:cNvSpPr txBox="1"/>
           <p:nvPr/>
         </p:nvSpPr>
@@ -4499,7 +4650,7 @@
       </p:sp>
       <p:sp>
         <p:nvSpPr>
-          <p:cNvPr id="20" name="Text 15"/>
+          <p:cNvPr id="9" name="Text 6"/>
           <p:cNvSpPr txBox="1"/>
           <p:nvPr/>
         </p:nvSpPr>
@@ -4603,7 +4754,7 @@
                 <a:ea typeface="Calibri" pitchFamily="34" charset="-122"/>
                 <a:cs typeface="Calibri" pitchFamily="34" charset="-120"/>
               </a:rPr>
-              <a:t>COMMENT NOUS PROCÉDONS</a:t>
+              <a:t>TROIS TERRAINS PRIORITAIRES</a:t>
             </a:r>
             <a:endParaRPr lang="en-US" sz="1150" dirty="0"/>
           </a:p>
@@ -4642,7 +4793,7 @@
                 <a:ea typeface="Cambria" pitchFamily="34" charset="-122"/>
                 <a:cs typeface="Cambria" pitchFamily="34" charset="-120"/>
               </a:rPr>
-              <a:t>Un déploiement par étapes, mesuré à chaque palier</a:t>
+              <a:t>Où engager les premiers essais</a:t>
             </a:r>
             <a:endParaRPr lang="en-US" sz="3000" dirty="0"/>
           </a:p>
@@ -4656,12 +4807,12 @@
         </p:nvSpPr>
         <p:spPr>
           <a:xfrm>
-            <a:off x="594360" y="1874520"/>
-            <a:ext cx="2545004" cy="2834640"/>
+            <a:off x="594360" y="1783080"/>
+            <a:ext cx="3472586" cy="4069080"/>
           </a:xfrm>
           <a:prstGeom prst="roundRect">
             <a:avLst>
-              <a:gd name="adj" fmla="val 3593"/>
+              <a:gd name="adj" fmla="val 2633"/>
             </a:avLst>
           </a:prstGeom>
           <a:solidFill>
@@ -4675,36 +4826,40 @@
           </a:ln>
         </p:spPr>
       </p:sp>
-      <p:sp>
-        <p:nvSpPr>
-          <p:cNvPr id="5" name="Shape 3"/>
-          <p:cNvSpPr/>
-          <p:nvPr/>
-        </p:nvSpPr>
-        <p:spPr>
-          <a:xfrm>
-            <a:off x="822960" y="2103120"/>
-            <a:ext cx="566928" cy="566928"/>
-          </a:xfrm>
-          <a:prstGeom prst="ellipse">
-            <a:avLst/>
-          </a:prstGeom>
-          <a:solidFill>
-            <a:srgbClr val="1D4E6B"/>
-          </a:solidFill>
-          <a:ln/>
-        </p:spPr>
-      </p:sp>
-      <p:sp>
-        <p:nvSpPr>
-          <p:cNvPr id="6" name="Text 4"/>
-          <p:cNvSpPr txBox="1"/>
-          <p:nvPr/>
-        </p:nvSpPr>
-        <p:spPr>
-          <a:xfrm>
-            <a:off x="822960" y="2103120"/>
-            <a:ext cx="566928" cy="566928"/>
+      <p:pic>
+        <p:nvPicPr>
+          <p:cNvPr id="5" name="Image 0" descr="preencoded.png">    </p:cNvPr>
+          <p:cNvPicPr>
+            <a:picLocks noChangeAspect="1"/>
+          </p:cNvPicPr>
+          <p:nvPr/>
+        </p:nvPicPr>
+        <p:blipFill>
+          <a:blip r:embed="rId1"/>
+          <a:stretch>
+            <a:fillRect/>
+          </a:stretch>
+        </p:blipFill>
+        <p:spPr>
+          <a:xfrm>
+            <a:off x="594360" y="1783080"/>
+            <a:ext cx="3472586" cy="1691640"/>
+          </a:xfrm>
+          <a:prstGeom prst="rect">
+            <a:avLst/>
+          </a:prstGeom>
+        </p:spPr>
+      </p:pic>
+      <p:sp>
+        <p:nvSpPr>
+          <p:cNvPr id="6" name="Text 3"/>
+          <p:cNvSpPr txBox="1"/>
+          <p:nvPr/>
+        </p:nvSpPr>
+        <p:spPr>
+          <a:xfrm>
+            <a:off x="795528" y="3639312"/>
+            <a:ext cx="3070250" cy="384048"/>
           </a:xfrm>
           <a:prstGeom prst="rect">
             <a:avLst/>
@@ -4716,34 +4871,34 @@
           <a:bodyPr wrap="square" lIns="0" tIns="0" rIns="0" bIns="0" rtlCol="0" anchor="ctr"/>
           <a:lstStyle/>
           <a:p>
-            <a:pPr algn="ctr" indent="0" marL="0">
-              <a:buNone/>
-            </a:pPr>
-            <a:r>
-              <a:rPr lang="en-US" sz="1600" b="1" dirty="0">
-                <a:solidFill>
-                  <a:srgbClr val="FFFFFF"/>
+            <a:pPr algn="l" indent="0" marL="0">
+              <a:buNone/>
+            </a:pPr>
+            <a:r>
+              <a:rPr lang="en-US" sz="1500" b="1" dirty="0">
+                <a:solidFill>
+                  <a:srgbClr val="1D4E6B"/>
                 </a:solidFill>
                 <a:latin typeface="Cambria" pitchFamily="34" charset="0"/>
                 <a:ea typeface="Cambria" pitchFamily="34" charset="-122"/>
                 <a:cs typeface="Cambria" pitchFamily="34" charset="-120"/>
               </a:rPr>
-              <a:t>1</a:t>
-            </a:r>
-            <a:endParaRPr lang="en-US" sz="1600" dirty="0"/>
-          </a:p>
-        </p:txBody>
-      </p:sp>
-      <p:sp>
-        <p:nvSpPr>
-          <p:cNvPr id="7" name="Text 5"/>
-          <p:cNvSpPr txBox="1"/>
-          <p:nvPr/>
-        </p:nvSpPr>
-        <p:spPr>
-          <a:xfrm>
-            <a:off x="822960" y="2788920"/>
-            <a:ext cx="2087804" cy="457200"/>
+              <a:t>Vallée du fleuve Sénégal</a:t>
+            </a:r>
+            <a:endParaRPr lang="en-US" sz="1500" dirty="0"/>
+          </a:p>
+        </p:txBody>
+      </p:sp>
+      <p:sp>
+        <p:nvSpPr>
+          <p:cNvPr id="7" name="Text 4"/>
+          <p:cNvSpPr txBox="1"/>
+          <p:nvPr/>
+        </p:nvSpPr>
+        <p:spPr>
+          <a:xfrm>
+            <a:off x="795528" y="4041648"/>
+            <a:ext cx="3070250" cy="329184"/>
           </a:xfrm>
           <a:prstGeom prst="rect">
             <a:avLst/>
@@ -4759,30 +4914,30 @@
               <a:buNone/>
             </a:pPr>
             <a:r>
-              <a:rPr lang="en-US" sz="1400" b="1" dirty="0">
-                <a:solidFill>
-                  <a:srgbClr val="1D4E6B"/>
-                </a:solidFill>
-                <a:latin typeface="Cambria" pitchFamily="34" charset="0"/>
-                <a:ea typeface="Cambria" pitchFamily="34" charset="-122"/>
-                <a:cs typeface="Cambria" pitchFamily="34" charset="-120"/>
-              </a:rPr>
-              <a:t>Diagnostic</a:t>
-            </a:r>
-            <a:endParaRPr lang="en-US" sz="1400" dirty="0"/>
-          </a:p>
-        </p:txBody>
-      </p:sp>
-      <p:sp>
-        <p:nvSpPr>
-          <p:cNvPr id="8" name="Text 6"/>
-          <p:cNvSpPr txBox="1"/>
-          <p:nvPr/>
-        </p:nvSpPr>
-        <p:spPr>
-          <a:xfrm>
-            <a:off x="822960" y="3291840"/>
-            <a:ext cx="2087804" cy="1234440"/>
+              <a:rPr lang="en-US" sz="1250" b="1" dirty="0">
+                <a:solidFill>
+                  <a:srgbClr val="9A5F12"/>
+                </a:solidFill>
+                <a:latin typeface="Calibri" pitchFamily="34" charset="0"/>
+                <a:ea typeface="Calibri" pitchFamily="34" charset="-122"/>
+                <a:cs typeface="Calibri" pitchFamily="34" charset="-120"/>
+              </a:rPr>
+              <a:t>Riz et oignon irrigués</a:t>
+            </a:r>
+            <a:endParaRPr lang="en-US" sz="1250" dirty="0"/>
+          </a:p>
+        </p:txBody>
+      </p:sp>
+      <p:sp>
+        <p:nvSpPr>
+          <p:cNvPr id="8" name="Text 5"/>
+          <p:cNvSpPr txBox="1"/>
+          <p:nvPr/>
+        </p:nvSpPr>
+        <p:spPr>
+          <a:xfrm>
+            <a:off x="795528" y="4407408"/>
+            <a:ext cx="3070250" cy="1280160"/>
           </a:xfrm>
           <a:prstGeom prst="rect">
             <a:avLst/>
@@ -4794,14 +4949,18 @@
           <a:bodyPr wrap="square" lIns="0" tIns="0" rIns="0" bIns="0" rtlCol="0" anchor="t"/>
           <a:lstStyle/>
           <a:p>
-            <a:pPr algn="l" indent="0" marL="0">
+            <a:pPr algn="l" marL="342900" indent="-342900">
               <a:lnSpc>
-                <a:spcPct val="120000"/>
+                <a:spcPct val="116000"/>
               </a:lnSpc>
-              <a:buNone/>
-            </a:pPr>
-            <a:r>
-              <a:rPr lang="en-US" sz="1200" dirty="0">
+              <a:spcAft>
+                <a:spcPts val="700"/>
+              </a:spcAft>
+              <a:buSzPct val="100000"/>
+              <a:buChar char="•"/>
+            </a:pPr>
+            <a:r>
+              <a:rPr lang="en-US" sz="1150" dirty="0">
                 <a:solidFill>
                   <a:srgbClr val="2F3E47"/>
                 </a:solidFill>
@@ -4809,26 +4968,74 @@
                 <a:ea typeface="Calibri" pitchFamily="34" charset="-122"/>
                 <a:cs typeface="Calibri" pitchFamily="34" charset="-120"/>
               </a:rPr>
-              <a:t>Analyse du sol, du mode d'arrosage et de la culture. Aucun engagement à ce stade.</a:t>
-            </a:r>
-            <a:endParaRPr lang="en-US" sz="1200" dirty="0"/>
-          </a:p>
-        </p:txBody>
-      </p:sp>
-      <p:sp>
-        <p:nvSpPr>
-          <p:cNvPr id="9" name="Shape 7"/>
+              <a:t>Périmètres irrigués aménagés par la SAED, de Saint-Louis à Matam.</a:t>
+            </a:r>
+            <a:endParaRPr lang="en-US" sz="1150" dirty="0"/>
+          </a:p>
+          <a:p>
+            <a:pPr algn="l" marL="342900" indent="-342900">
+              <a:lnSpc>
+                <a:spcPct val="116000"/>
+              </a:lnSpc>
+              <a:spcAft>
+                <a:spcPts val="700"/>
+              </a:spcAft>
+              <a:buSzPct val="100000"/>
+              <a:buChar char="•"/>
+            </a:pPr>
+            <a:r>
+              <a:rPr lang="en-US" sz="1150" dirty="0">
+                <a:solidFill>
+                  <a:srgbClr val="2F3E47"/>
+                </a:solidFill>
+                <a:latin typeface="Calibri" pitchFamily="34" charset="0"/>
+                <a:ea typeface="Calibri" pitchFamily="34" charset="-122"/>
+                <a:cs typeface="Calibri" pitchFamily="34" charset="-120"/>
+              </a:rPr>
+              <a:t>Pompage coûteux et parcelles sableuses en bordure : l'eau économisée se lit sur la facture.</a:t>
+            </a:r>
+            <a:endParaRPr lang="en-US" sz="1150" dirty="0"/>
+          </a:p>
+          <a:p>
+            <a:pPr algn="l" marL="342900" indent="-342900">
+              <a:lnSpc>
+                <a:spcPct val="116000"/>
+              </a:lnSpc>
+              <a:spcAft>
+                <a:spcPts val="700"/>
+              </a:spcAft>
+              <a:buSzPct val="100000"/>
+              <a:buChar char="•"/>
+            </a:pPr>
+            <a:r>
+              <a:rPr lang="en-US" sz="1150" dirty="0">
+                <a:solidFill>
+                  <a:srgbClr val="2F3E47"/>
+                </a:solidFill>
+                <a:latin typeface="Calibri" pitchFamily="34" charset="0"/>
+                <a:ea typeface="Calibri" pitchFamily="34" charset="-122"/>
+                <a:cs typeface="Calibri" pitchFamily="34" charset="-120"/>
+              </a:rPr>
+              <a:t>Organisations paysannes structurées, capables de suivre un essai sur une campagne.</a:t>
+            </a:r>
+            <a:endParaRPr lang="en-US" sz="1150" dirty="0"/>
+          </a:p>
+        </p:txBody>
+      </p:sp>
+      <p:sp>
+        <p:nvSpPr>
+          <p:cNvPr id="9" name="Shape 6"/>
           <p:cNvSpPr/>
           <p:nvPr/>
         </p:nvSpPr>
         <p:spPr>
           <a:xfrm>
-            <a:off x="3413684" y="1874520"/>
-            <a:ext cx="2545004" cy="2834640"/>
+            <a:off x="4359554" y="1783080"/>
+            <a:ext cx="3472586" cy="4069080"/>
           </a:xfrm>
           <a:prstGeom prst="roundRect">
             <a:avLst>
-              <a:gd name="adj" fmla="val 3593"/>
+              <a:gd name="adj" fmla="val 2633"/>
             </a:avLst>
           </a:prstGeom>
           <a:solidFill>
@@ -4842,36 +5049,40 @@
           </a:ln>
         </p:spPr>
       </p:sp>
-      <p:sp>
-        <p:nvSpPr>
-          <p:cNvPr id="10" name="Shape 8"/>
-          <p:cNvSpPr/>
-          <p:nvPr/>
-        </p:nvSpPr>
-        <p:spPr>
-          <a:xfrm>
-            <a:off x="3642284" y="2103120"/>
-            <a:ext cx="566928" cy="566928"/>
-          </a:xfrm>
-          <a:prstGeom prst="ellipse">
-            <a:avLst/>
-          </a:prstGeom>
-          <a:solidFill>
-            <a:srgbClr val="1D4E6B"/>
-          </a:solidFill>
-          <a:ln/>
-        </p:spPr>
-      </p:sp>
-      <p:sp>
-        <p:nvSpPr>
-          <p:cNvPr id="11" name="Text 9"/>
-          <p:cNvSpPr txBox="1"/>
-          <p:nvPr/>
-        </p:nvSpPr>
-        <p:spPr>
-          <a:xfrm>
-            <a:off x="3642284" y="2103120"/>
-            <a:ext cx="566928" cy="566928"/>
+      <p:pic>
+        <p:nvPicPr>
+          <p:cNvPr id="10" name="Image 1" descr="preencoded.png">    </p:cNvPr>
+          <p:cNvPicPr>
+            <a:picLocks noChangeAspect="1"/>
+          </p:cNvPicPr>
+          <p:nvPr/>
+        </p:nvPicPr>
+        <p:blipFill>
+          <a:blip r:embed="rId2"/>
+          <a:stretch>
+            <a:fillRect/>
+          </a:stretch>
+        </p:blipFill>
+        <p:spPr>
+          <a:xfrm>
+            <a:off x="4359554" y="1783080"/>
+            <a:ext cx="3472586" cy="1691640"/>
+          </a:xfrm>
+          <a:prstGeom prst="rect">
+            <a:avLst/>
+          </a:prstGeom>
+        </p:spPr>
+      </p:pic>
+      <p:sp>
+        <p:nvSpPr>
+          <p:cNvPr id="11" name="Text 7"/>
+          <p:cNvSpPr txBox="1"/>
+          <p:nvPr/>
+        </p:nvSpPr>
+        <p:spPr>
+          <a:xfrm>
+            <a:off x="4560722" y="3639312"/>
+            <a:ext cx="3070250" cy="384048"/>
           </a:xfrm>
           <a:prstGeom prst="rect">
             <a:avLst/>
@@ -4883,34 +5094,34 @@
           <a:bodyPr wrap="square" lIns="0" tIns="0" rIns="0" bIns="0" rtlCol="0" anchor="ctr"/>
           <a:lstStyle/>
           <a:p>
-            <a:pPr algn="ctr" indent="0" marL="0">
-              <a:buNone/>
-            </a:pPr>
-            <a:r>
-              <a:rPr lang="en-US" sz="1600" b="1" dirty="0">
-                <a:solidFill>
-                  <a:srgbClr val="FFFFFF"/>
+            <a:pPr algn="l" indent="0" marL="0">
+              <a:buNone/>
+            </a:pPr>
+            <a:r>
+              <a:rPr lang="en-US" sz="1500" b="1" dirty="0">
+                <a:solidFill>
+                  <a:srgbClr val="1D4E6B"/>
                 </a:solidFill>
                 <a:latin typeface="Cambria" pitchFamily="34" charset="0"/>
                 <a:ea typeface="Cambria" pitchFamily="34" charset="-122"/>
                 <a:cs typeface="Cambria" pitchFamily="34" charset="-120"/>
               </a:rPr>
-              <a:t>2</a:t>
-            </a:r>
-            <a:endParaRPr lang="en-US" sz="1600" dirty="0"/>
-          </a:p>
-        </p:txBody>
-      </p:sp>
-      <p:sp>
-        <p:nvSpPr>
-          <p:cNvPr id="12" name="Text 10"/>
-          <p:cNvSpPr txBox="1"/>
-          <p:nvPr/>
-        </p:nvSpPr>
-        <p:spPr>
-          <a:xfrm>
-            <a:off x="3642284" y="2788920"/>
-            <a:ext cx="2087804" cy="457200"/>
+              <a:t>Niayes</a:t>
+            </a:r>
+            <a:endParaRPr lang="en-US" sz="1500" dirty="0"/>
+          </a:p>
+        </p:txBody>
+      </p:sp>
+      <p:sp>
+        <p:nvSpPr>
+          <p:cNvPr id="12" name="Text 8"/>
+          <p:cNvSpPr txBox="1"/>
+          <p:nvPr/>
+        </p:nvSpPr>
+        <p:spPr>
+          <a:xfrm>
+            <a:off x="4560722" y="4041648"/>
+            <a:ext cx="3070250" cy="329184"/>
           </a:xfrm>
           <a:prstGeom prst="rect">
             <a:avLst/>
@@ -4926,30 +5137,30 @@
               <a:buNone/>
             </a:pPr>
             <a:r>
-              <a:rPr lang="en-US" sz="1400" b="1" dirty="0">
-                <a:solidFill>
-                  <a:srgbClr val="1D4E6B"/>
-                </a:solidFill>
-                <a:latin typeface="Cambria" pitchFamily="34" charset="0"/>
-                <a:ea typeface="Cambria" pitchFamily="34" charset="-122"/>
-                <a:cs typeface="Cambria" pitchFamily="34" charset="-120"/>
-              </a:rPr>
-              <a:t>Parcelle témoin</a:t>
-            </a:r>
-            <a:endParaRPr lang="en-US" sz="1400" dirty="0"/>
-          </a:p>
-        </p:txBody>
-      </p:sp>
-      <p:sp>
-        <p:nvSpPr>
-          <p:cNvPr id="13" name="Text 11"/>
-          <p:cNvSpPr txBox="1"/>
-          <p:nvPr/>
-        </p:nvSpPr>
-        <p:spPr>
-          <a:xfrm>
-            <a:off x="3642284" y="3291840"/>
-            <a:ext cx="2087804" cy="1234440"/>
+              <a:rPr lang="en-US" sz="1250" b="1" dirty="0">
+                <a:solidFill>
+                  <a:srgbClr val="9A5F12"/>
+                </a:solidFill>
+                <a:latin typeface="Calibri" pitchFamily="34" charset="0"/>
+                <a:ea typeface="Calibri" pitchFamily="34" charset="-122"/>
+                <a:cs typeface="Calibri" pitchFamily="34" charset="-120"/>
+              </a:rPr>
+              <a:t>Premier bassin maraîcher</a:t>
+            </a:r>
+            <a:endParaRPr lang="en-US" sz="1250" dirty="0"/>
+          </a:p>
+        </p:txBody>
+      </p:sp>
+      <p:sp>
+        <p:nvSpPr>
+          <p:cNvPr id="13" name="Text 9"/>
+          <p:cNvSpPr txBox="1"/>
+          <p:nvPr/>
+        </p:nvSpPr>
+        <p:spPr>
+          <a:xfrm>
+            <a:off x="4560722" y="4407408"/>
+            <a:ext cx="3070250" cy="1280160"/>
           </a:xfrm>
           <a:prstGeom prst="rect">
             <a:avLst/>
@@ -4961,14 +5172,18 @@
           <a:bodyPr wrap="square" lIns="0" tIns="0" rIns="0" bIns="0" rtlCol="0" anchor="t"/>
           <a:lstStyle/>
           <a:p>
-            <a:pPr algn="l" indent="0" marL="0">
+            <a:pPr algn="l" marL="342900" indent="-342900">
               <a:lnSpc>
-                <a:spcPct val="120000"/>
+                <a:spcPct val="116000"/>
               </a:lnSpc>
-              <a:buNone/>
-            </a:pPr>
-            <a:r>
-              <a:rPr lang="en-US" sz="1200" dirty="0">
+              <a:spcAft>
+                <a:spcPts val="700"/>
+              </a:spcAft>
+              <a:buSzPct val="100000"/>
+              <a:buChar char="•"/>
+            </a:pPr>
+            <a:r>
+              <a:rPr lang="en-US" sz="1150" dirty="0">
                 <a:solidFill>
                   <a:srgbClr val="2F3E47"/>
                 </a:solidFill>
@@ -4976,26 +5191,74 @@
                 <a:ea typeface="Calibri" pitchFamily="34" charset="-122"/>
                 <a:cs typeface="Calibri" pitchFamily="34" charset="-120"/>
               </a:rPr>
-              <a:t>Un essai comparatif sur un bloc, avec parcelle témoin conduite à l'identique.</a:t>
-            </a:r>
-            <a:endParaRPr lang="en-US" sz="1200" dirty="0"/>
-          </a:p>
-        </p:txBody>
-      </p:sp>
-      <p:sp>
-        <p:nvSpPr>
-          <p:cNvPr id="14" name="Shape 12"/>
+              <a:t>Bande côtière de Dakar à Saint-Louis, qui produit l'essentiel des légumes du pays.</a:t>
+            </a:r>
+            <a:endParaRPr lang="en-US" sz="1150" dirty="0"/>
+          </a:p>
+          <a:p>
+            <a:pPr algn="l" marL="342900" indent="-342900">
+              <a:lnSpc>
+                <a:spcPct val="116000"/>
+              </a:lnSpc>
+              <a:spcAft>
+                <a:spcPts val="700"/>
+              </a:spcAft>
+              <a:buSzPct val="100000"/>
+              <a:buChar char="•"/>
+            </a:pPr>
+            <a:r>
+              <a:rPr lang="en-US" sz="1150" dirty="0">
+                <a:solidFill>
+                  <a:srgbClr val="2F3E47"/>
+                </a:solidFill>
+                <a:latin typeface="Calibri" pitchFamily="34" charset="0"/>
+                <a:ea typeface="Calibri" pitchFamily="34" charset="-122"/>
+                <a:cs typeface="Calibri" pitchFamily="34" charset="-120"/>
+              </a:rPr>
+              <a:t>Nappes peu profondes en baisse et salinisation près de la mer.</a:t>
+            </a:r>
+            <a:endParaRPr lang="en-US" sz="1150" dirty="0"/>
+          </a:p>
+          <a:p>
+            <a:pPr algn="l" marL="342900" indent="-342900">
+              <a:lnSpc>
+                <a:spcPct val="116000"/>
+              </a:lnSpc>
+              <a:spcAft>
+                <a:spcPts val="700"/>
+              </a:spcAft>
+              <a:buSzPct val="100000"/>
+              <a:buChar char="•"/>
+            </a:pPr>
+            <a:r>
+              <a:rPr lang="en-US" sz="1150" dirty="0">
+                <a:solidFill>
+                  <a:srgbClr val="2F3E47"/>
+                </a:solidFill>
+                <a:latin typeface="Calibri" pitchFamily="34" charset="0"/>
+                <a:ea typeface="Calibri" pitchFamily="34" charset="-122"/>
+                <a:cs typeface="Calibri" pitchFamily="34" charset="-120"/>
+              </a:rPr>
+              <a:t>Cultures à cycle court et à forte valeur : un essai se conclut en une saison.</a:t>
+            </a:r>
+            <a:endParaRPr lang="en-US" sz="1150" dirty="0"/>
+          </a:p>
+        </p:txBody>
+      </p:sp>
+      <p:sp>
+        <p:nvSpPr>
+          <p:cNvPr id="14" name="Shape 10"/>
           <p:cNvSpPr/>
           <p:nvPr/>
         </p:nvSpPr>
         <p:spPr>
           <a:xfrm>
-            <a:off x="6233008" y="1874520"/>
-            <a:ext cx="2545004" cy="2834640"/>
+            <a:off x="8124749" y="1783080"/>
+            <a:ext cx="3472586" cy="4069080"/>
           </a:xfrm>
           <a:prstGeom prst="roundRect">
             <a:avLst>
-              <a:gd name="adj" fmla="val 3593"/>
+              <a:gd name="adj" fmla="val 2633"/>
             </a:avLst>
           </a:prstGeom>
           <a:solidFill>
@@ -5009,36 +5272,40 @@
           </a:ln>
         </p:spPr>
       </p:sp>
-      <p:sp>
-        <p:nvSpPr>
-          <p:cNvPr id="15" name="Shape 13"/>
-          <p:cNvSpPr/>
-          <p:nvPr/>
-        </p:nvSpPr>
-        <p:spPr>
-          <a:xfrm>
-            <a:off x="6461608" y="2103120"/>
-            <a:ext cx="566928" cy="566928"/>
-          </a:xfrm>
-          <a:prstGeom prst="ellipse">
-            <a:avLst/>
-          </a:prstGeom>
-          <a:solidFill>
-            <a:srgbClr val="1D4E6B"/>
-          </a:solidFill>
-          <a:ln/>
-        </p:spPr>
-      </p:sp>
-      <p:sp>
-        <p:nvSpPr>
-          <p:cNvPr id="16" name="Text 14"/>
-          <p:cNvSpPr txBox="1"/>
-          <p:nvPr/>
-        </p:nvSpPr>
-        <p:spPr>
-          <a:xfrm>
-            <a:off x="6461608" y="2103120"/>
-            <a:ext cx="566928" cy="566928"/>
+      <p:pic>
+        <p:nvPicPr>
+          <p:cNvPr id="15" name="Image 2" descr="preencoded.png">    </p:cNvPr>
+          <p:cNvPicPr>
+            <a:picLocks noChangeAspect="1"/>
+          </p:cNvPicPr>
+          <p:nvPr/>
+        </p:nvPicPr>
+        <p:blipFill>
+          <a:blip r:embed="rId3"/>
+          <a:stretch>
+            <a:fillRect/>
+          </a:stretch>
+        </p:blipFill>
+        <p:spPr>
+          <a:xfrm>
+            <a:off x="8124749" y="1783080"/>
+            <a:ext cx="3472586" cy="1691640"/>
+          </a:xfrm>
+          <a:prstGeom prst="rect">
+            <a:avLst/>
+          </a:prstGeom>
+        </p:spPr>
+      </p:pic>
+      <p:sp>
+        <p:nvSpPr>
+          <p:cNvPr id="16" name="Text 11"/>
+          <p:cNvSpPr txBox="1"/>
+          <p:nvPr/>
+        </p:nvSpPr>
+        <p:spPr>
+          <a:xfrm>
+            <a:off x="8325917" y="3639312"/>
+            <a:ext cx="3070250" cy="384048"/>
           </a:xfrm>
           <a:prstGeom prst="rect">
             <a:avLst/>
@@ -5050,34 +5317,34 @@
           <a:bodyPr wrap="square" lIns="0" tIns="0" rIns="0" bIns="0" rtlCol="0" anchor="ctr"/>
           <a:lstStyle/>
           <a:p>
-            <a:pPr algn="ctr" indent="0" marL="0">
-              <a:buNone/>
-            </a:pPr>
-            <a:r>
-              <a:rPr lang="en-US" sz="1600" b="1" dirty="0">
-                <a:solidFill>
-                  <a:srgbClr val="FFFFFF"/>
+            <a:pPr algn="l" indent="0" marL="0">
+              <a:buNone/>
+            </a:pPr>
+            <a:r>
+              <a:rPr lang="en-US" sz="1500" b="1" dirty="0">
+                <a:solidFill>
+                  <a:srgbClr val="1D4E6B"/>
                 </a:solidFill>
                 <a:latin typeface="Cambria" pitchFamily="34" charset="0"/>
                 <a:ea typeface="Cambria" pitchFamily="34" charset="-122"/>
                 <a:cs typeface="Cambria" pitchFamily="34" charset="-120"/>
               </a:rPr>
-              <a:t>3</a:t>
-            </a:r>
-            <a:endParaRPr lang="en-US" sz="1600" dirty="0"/>
-          </a:p>
-        </p:txBody>
-      </p:sp>
-      <p:sp>
-        <p:nvSpPr>
-          <p:cNvPr id="17" name="Text 15"/>
-          <p:cNvSpPr txBox="1"/>
-          <p:nvPr/>
-        </p:nvSpPr>
-        <p:spPr>
-          <a:xfrm>
-            <a:off x="6461608" y="2788920"/>
-            <a:ext cx="2087804" cy="457200"/>
+              <a:t>Bassin arachidier</a:t>
+            </a:r>
+            <a:endParaRPr lang="en-US" sz="1500" dirty="0"/>
+          </a:p>
+        </p:txBody>
+      </p:sp>
+      <p:sp>
+        <p:nvSpPr>
+          <p:cNvPr id="17" name="Text 12"/>
+          <p:cNvSpPr txBox="1"/>
+          <p:nvPr/>
+        </p:nvSpPr>
+        <p:spPr>
+          <a:xfrm>
+            <a:off x="8325917" y="4041648"/>
+            <a:ext cx="3070250" cy="329184"/>
           </a:xfrm>
           <a:prstGeom prst="rect">
             <a:avLst/>
@@ -5093,30 +5360,30 @@
               <a:buNone/>
             </a:pPr>
             <a:r>
-              <a:rPr lang="en-US" sz="1400" b="1" dirty="0">
-                <a:solidFill>
-                  <a:srgbClr val="1D4E6B"/>
-                </a:solidFill>
-                <a:latin typeface="Cambria" pitchFamily="34" charset="0"/>
-                <a:ea typeface="Cambria" pitchFamily="34" charset="-122"/>
-                <a:cs typeface="Cambria" pitchFamily="34" charset="-120"/>
-              </a:rPr>
-              <a:t>Mesure</a:t>
-            </a:r>
-            <a:endParaRPr lang="en-US" sz="1400" dirty="0"/>
-          </a:p>
-        </p:txBody>
-      </p:sp>
-      <p:sp>
-        <p:nvSpPr>
-          <p:cNvPr id="18" name="Text 16"/>
-          <p:cNvSpPr txBox="1"/>
-          <p:nvPr/>
-        </p:nvSpPr>
-        <p:spPr>
-          <a:xfrm>
-            <a:off x="6461608" y="3291840"/>
-            <a:ext cx="2087804" cy="1234440"/>
+              <a:rPr lang="en-US" sz="1250" b="1" dirty="0">
+                <a:solidFill>
+                  <a:srgbClr val="9A5F12"/>
+                </a:solidFill>
+                <a:latin typeface="Calibri" pitchFamily="34" charset="0"/>
+                <a:ea typeface="Calibri" pitchFamily="34" charset="-122"/>
+                <a:cs typeface="Calibri" pitchFamily="34" charset="-120"/>
+              </a:rPr>
+              <a:t>Arachide et mil pluviaux</a:t>
+            </a:r>
+            <a:endParaRPr lang="en-US" sz="1250" dirty="0"/>
+          </a:p>
+        </p:txBody>
+      </p:sp>
+      <p:sp>
+        <p:nvSpPr>
+          <p:cNvPr id="18" name="Text 13"/>
+          <p:cNvSpPr txBox="1"/>
+          <p:nvPr/>
+        </p:nvSpPr>
+        <p:spPr>
+          <a:xfrm>
+            <a:off x="8325917" y="4407408"/>
+            <a:ext cx="3070250" cy="1280160"/>
           </a:xfrm>
           <a:prstGeom prst="rect">
             <a:avLst/>
@@ -5128,14 +5395,18 @@
           <a:bodyPr wrap="square" lIns="0" tIns="0" rIns="0" bIns="0" rtlCol="0" anchor="t"/>
           <a:lstStyle/>
           <a:p>
-            <a:pPr algn="l" indent="0" marL="0">
+            <a:pPr algn="l" marL="342900" indent="-342900">
               <a:lnSpc>
-                <a:spcPct val="120000"/>
+                <a:spcPct val="116000"/>
               </a:lnSpc>
-              <a:buNone/>
-            </a:pPr>
-            <a:r>
-              <a:rPr lang="en-US" sz="1200" dirty="0">
+              <a:spcAft>
+                <a:spcPts val="700"/>
+              </a:spcAft>
+              <a:buSzPct val="100000"/>
+              <a:buChar char="•"/>
+            </a:pPr>
+            <a:r>
+              <a:rPr lang="en-US" sz="1150" dirty="0">
                 <a:solidFill>
                   <a:srgbClr val="2F3E47"/>
                 </a:solidFill>
@@ -5143,166 +5414,23 @@
                 <a:ea typeface="Calibri" pitchFamily="34" charset="-122"/>
                 <a:cs typeface="Calibri" pitchFamily="34" charset="-120"/>
               </a:rPr>
-              <a:t>Relevés de levée, de consommation d'eau et de rendement sur une campagne complète.</a:t>
-            </a:r>
-            <a:endParaRPr lang="en-US" sz="1200" dirty="0"/>
-          </a:p>
-        </p:txBody>
-      </p:sp>
-      <p:sp>
-        <p:nvSpPr>
-          <p:cNvPr id="19" name="Shape 17"/>
-          <p:cNvSpPr/>
-          <p:nvPr/>
-        </p:nvSpPr>
-        <p:spPr>
-          <a:xfrm>
-            <a:off x="9052331" y="1874520"/>
-            <a:ext cx="2545004" cy="2834640"/>
-          </a:xfrm>
-          <a:prstGeom prst="roundRect">
-            <a:avLst>
-              <a:gd name="adj" fmla="val 3593"/>
-            </a:avLst>
-          </a:prstGeom>
-          <a:solidFill>
-            <a:srgbClr val="EEF2F5"/>
-          </a:solidFill>
-          <a:ln w="9525">
-            <a:solidFill>
-              <a:srgbClr val="D8E1E7"/>
-            </a:solidFill>
-            <a:prstDash val="solid"/>
-          </a:ln>
-        </p:spPr>
-      </p:sp>
-      <p:sp>
-        <p:nvSpPr>
-          <p:cNvPr id="20" name="Shape 18"/>
-          <p:cNvSpPr/>
-          <p:nvPr/>
-        </p:nvSpPr>
-        <p:spPr>
-          <a:xfrm>
-            <a:off x="9280931" y="2103120"/>
-            <a:ext cx="566928" cy="566928"/>
-          </a:xfrm>
-          <a:prstGeom prst="ellipse">
-            <a:avLst/>
-          </a:prstGeom>
-          <a:solidFill>
-            <a:srgbClr val="1D4E6B"/>
-          </a:solidFill>
-          <a:ln/>
-        </p:spPr>
-      </p:sp>
-      <p:sp>
-        <p:nvSpPr>
-          <p:cNvPr id="21" name="Text 19"/>
-          <p:cNvSpPr txBox="1"/>
-          <p:nvPr/>
-        </p:nvSpPr>
-        <p:spPr>
-          <a:xfrm>
-            <a:off x="9280931" y="2103120"/>
-            <a:ext cx="566928" cy="566928"/>
-          </a:xfrm>
-          <a:prstGeom prst="rect">
-            <a:avLst/>
-          </a:prstGeom>
-          <a:noFill/>
-          <a:ln/>
-        </p:spPr>
-        <p:txBody>
-          <a:bodyPr wrap="square" lIns="0" tIns="0" rIns="0" bIns="0" rtlCol="0" anchor="ctr"/>
-          <a:lstStyle/>
-          <a:p>
-            <a:pPr algn="ctr" indent="0" marL="0">
-              <a:buNone/>
-            </a:pPr>
-            <a:r>
-              <a:rPr lang="en-US" sz="1600" b="1" dirty="0">
-                <a:solidFill>
-                  <a:srgbClr val="FFFFFF"/>
-                </a:solidFill>
-                <a:latin typeface="Cambria" pitchFamily="34" charset="0"/>
-                <a:ea typeface="Cambria" pitchFamily="34" charset="-122"/>
-                <a:cs typeface="Cambria" pitchFamily="34" charset="-120"/>
-              </a:rPr>
-              <a:t>4</a:t>
-            </a:r>
-            <a:endParaRPr lang="en-US" sz="1600" dirty="0"/>
-          </a:p>
-        </p:txBody>
-      </p:sp>
-      <p:sp>
-        <p:nvSpPr>
-          <p:cNvPr id="22" name="Text 20"/>
-          <p:cNvSpPr txBox="1"/>
-          <p:nvPr/>
-        </p:nvSpPr>
-        <p:spPr>
-          <a:xfrm>
-            <a:off x="9280931" y="2788920"/>
-            <a:ext cx="2087804" cy="457200"/>
-          </a:xfrm>
-          <a:prstGeom prst="rect">
-            <a:avLst/>
-          </a:prstGeom>
-          <a:noFill/>
-          <a:ln/>
-        </p:spPr>
-        <p:txBody>
-          <a:bodyPr wrap="square" lIns="0" tIns="0" rIns="0" bIns="0" rtlCol="0" anchor="ctr"/>
-          <a:lstStyle/>
-          <a:p>
-            <a:pPr algn="l" indent="0" marL="0">
-              <a:buNone/>
-            </a:pPr>
-            <a:r>
-              <a:rPr lang="en-US" sz="1400" b="1" dirty="0">
-                <a:solidFill>
-                  <a:srgbClr val="1D4E6B"/>
-                </a:solidFill>
-                <a:latin typeface="Cambria" pitchFamily="34" charset="0"/>
-                <a:ea typeface="Cambria" pitchFamily="34" charset="-122"/>
-                <a:cs typeface="Cambria" pitchFamily="34" charset="-120"/>
-              </a:rPr>
-              <a:t>Extension</a:t>
-            </a:r>
-            <a:endParaRPr lang="en-US" sz="1400" dirty="0"/>
-          </a:p>
-        </p:txBody>
-      </p:sp>
-      <p:sp>
-        <p:nvSpPr>
-          <p:cNvPr id="23" name="Text 21"/>
-          <p:cNvSpPr txBox="1"/>
-          <p:nvPr/>
-        </p:nvSpPr>
-        <p:spPr>
-          <a:xfrm>
-            <a:off x="9280931" y="3291840"/>
-            <a:ext cx="2087804" cy="1234440"/>
-          </a:xfrm>
-          <a:prstGeom prst="rect">
-            <a:avLst/>
-          </a:prstGeom>
-          <a:noFill/>
-          <a:ln/>
-        </p:spPr>
-        <p:txBody>
-          <a:bodyPr wrap="square" lIns="0" tIns="0" rIns="0" bIns="0" rtlCol="0" anchor="t"/>
-          <a:lstStyle/>
-          <a:p>
-            <a:pPr algn="l" indent="0" marL="0">
+              <a:t>Arachide et mil sur sols sableux épuisés, dans le centre du pays.</a:t>
+            </a:r>
+            <a:endParaRPr lang="en-US" sz="1150" dirty="0"/>
+          </a:p>
+          <a:p>
+            <a:pPr algn="l" marL="342900" indent="-342900">
               <a:lnSpc>
-                <a:spcPct val="120000"/>
+                <a:spcPct val="116000"/>
               </a:lnSpc>
-              <a:buNone/>
-            </a:pPr>
-            <a:r>
-              <a:rPr lang="en-US" sz="1200" dirty="0">
+              <a:spcAft>
+                <a:spcPts val="700"/>
+              </a:spcAft>
+              <a:buSzPct val="100000"/>
+              <a:buChar char="•"/>
+            </a:pPr>
+            <a:r>
+              <a:rPr lang="en-US" sz="1150" dirty="0">
                 <a:solidFill>
                   <a:srgbClr val="2F3E47"/>
                 </a:solidFill>
@@ -5310,57 +5438,39 @@
                 <a:ea typeface="Calibri" pitchFamily="34" charset="-122"/>
                 <a:cs typeface="Calibri" pitchFamily="34" charset="-120"/>
               </a:rPr>
-              <a:t>Généralisation progressive aux autres parcelles sur la base des résultats constatés.</a:t>
-            </a:r>
-            <a:endParaRPr lang="en-US" sz="1200" dirty="0"/>
-          </a:p>
-        </p:txBody>
-      </p:sp>
-      <p:sp>
-        <p:nvSpPr>
-          <p:cNvPr id="24" name="Text 22"/>
-          <p:cNvSpPr txBox="1"/>
-          <p:nvPr/>
-        </p:nvSpPr>
-        <p:spPr>
-          <a:xfrm>
-            <a:off x="594360" y="4983480"/>
-            <a:ext cx="11002975" cy="822960"/>
-          </a:xfrm>
-          <a:prstGeom prst="rect">
-            <a:avLst/>
-          </a:prstGeom>
-          <a:noFill/>
-          <a:ln/>
-        </p:spPr>
-        <p:txBody>
-          <a:bodyPr wrap="square" lIns="0" tIns="0" rIns="0" bIns="0" rtlCol="0" anchor="t"/>
-          <a:lstStyle/>
-          <a:p>
-            <a:pPr algn="l" indent="0" marL="0">
+              <a:t>Semis exposés aux pauses de pluie de début d'hivernage.</a:t>
+            </a:r>
+            <a:endParaRPr lang="en-US" sz="1150" dirty="0"/>
+          </a:p>
+          <a:p>
+            <a:pPr algn="l" marL="342900" indent="-342900">
               <a:lnSpc>
-                <a:spcPct val="125000"/>
+                <a:spcPct val="116000"/>
               </a:lnSpc>
-              <a:buNone/>
-            </a:pPr>
-            <a:r>
-              <a:rPr lang="en-US" sz="1250" i="1" dirty="0">
-                <a:solidFill>
-                  <a:srgbClr val="6B7D87"/>
-                </a:solidFill>
-                <a:latin typeface="Calibri" pitchFamily="34" charset="0"/>
-                <a:ea typeface="Calibri" pitchFamily="34" charset="-122"/>
-                <a:cs typeface="Calibri" pitchFamily="34" charset="-120"/>
-              </a:rPr>
-              <a:t>La règle de dosage est la même partout : 3 grammes par litre de terre utile. Ce qui change d'un terrain à l'autre, c'est le volume de terre effectivement exploré par les racines.</a:t>
-            </a:r>
-            <a:endParaRPr lang="en-US" sz="1250" dirty="0"/>
-          </a:p>
-        </p:txBody>
-      </p:sp>
-      <p:sp>
-        <p:nvSpPr>
-          <p:cNvPr id="25" name="Text 23"/>
+              <a:spcAft>
+                <a:spcPts val="700"/>
+              </a:spcAft>
+              <a:buSzPct val="100000"/>
+              <a:buChar char="•"/>
+            </a:pPr>
+            <a:r>
+              <a:rPr lang="en-US" sz="1150" dirty="0">
+                <a:solidFill>
+                  <a:srgbClr val="2F3E47"/>
+                </a:solidFill>
+                <a:latin typeface="Calibri" pitchFamily="34" charset="0"/>
+                <a:ea typeface="Calibri" pitchFamily="34" charset="-122"/>
+                <a:cs typeface="Calibri" pitchFamily="34" charset="-120"/>
+              </a:rPr>
+              <a:t>Coopératives et huiliers capables de regrouper les commandes.</a:t>
+            </a:r>
+            <a:endParaRPr lang="en-US" sz="1150" dirty="0"/>
+          </a:p>
+        </p:txBody>
+      </p:sp>
+      <p:sp>
+        <p:nvSpPr>
+          <p:cNvPr id="19" name="Text 14"/>
           <p:cNvSpPr txBox="1"/>
           <p:nvPr/>
         </p:nvSpPr>
@@ -5401,7 +5511,7 @@
       </p:sp>
       <p:sp>
         <p:nvSpPr>
-          <p:cNvPr id="26" name="Text 24"/>
+          <p:cNvPr id="20" name="Text 15"/>
           <p:cNvSpPr txBox="1"/>
           <p:nvPr/>
         </p:nvSpPr>
@@ -5505,7 +5615,7 @@
                 <a:ea typeface="Calibri" pitchFamily="34" charset="-122"/>
                 <a:cs typeface="Calibri" pitchFamily="34" charset="-120"/>
               </a:rPr>
-              <a:t>CE QU'IL FAUT ANTICIPER</a:t>
+              <a:t>COMMENT NOUS PROCÉDONS</a:t>
             </a:r>
             <a:endParaRPr lang="en-US" sz="1150" dirty="0"/>
           </a:p>
@@ -5544,7 +5654,7 @@
                 <a:ea typeface="Cambria" pitchFamily="34" charset="-122"/>
                 <a:cs typeface="Cambria" pitchFamily="34" charset="-120"/>
               </a:rPr>
-              <a:t>Risques identifiés et réponses</a:t>
+              <a:t>Un déploiement par étapes, mesuré à chaque palier</a:t>
             </a:r>
             <a:endParaRPr lang="en-US" sz="3000" dirty="0"/>
           </a:p>
@@ -5552,332 +5662,18 @@
       </p:sp>
       <p:sp>
         <p:nvSpPr>
-          <p:cNvPr id="4" name="Text 2"/>
-          <p:cNvSpPr txBox="1"/>
-          <p:nvPr/>
-        </p:nvSpPr>
-        <p:spPr>
-          <a:xfrm>
-            <a:off x="594360" y="1783080"/>
-            <a:ext cx="5227168" cy="411480"/>
-          </a:xfrm>
-          <a:prstGeom prst="rect">
-            <a:avLst/>
-          </a:prstGeom>
-          <a:noFill/>
-          <a:ln/>
-        </p:spPr>
-        <p:txBody>
-          <a:bodyPr wrap="square" lIns="0" tIns="0" rIns="0" bIns="0" rtlCol="0" anchor="ctr"/>
-          <a:lstStyle/>
-          <a:p>
-            <a:pPr algn="l" indent="0" marL="0">
-              <a:buNone/>
-            </a:pPr>
-            <a:r>
-              <a:rPr lang="en-US" sz="1600" b="1" dirty="0">
-                <a:solidFill>
-                  <a:srgbClr val="1D4E6B"/>
-                </a:solidFill>
-                <a:latin typeface="Cambria" pitchFamily="34" charset="0"/>
-                <a:ea typeface="Cambria" pitchFamily="34" charset="-122"/>
-                <a:cs typeface="Cambria" pitchFamily="34" charset="-120"/>
-              </a:rPr>
-              <a:t>Risques</a:t>
-            </a:r>
-            <a:endParaRPr lang="en-US" sz="1600" dirty="0"/>
-          </a:p>
-        </p:txBody>
-      </p:sp>
-      <p:sp>
-        <p:nvSpPr>
-          <p:cNvPr id="5" name="Text 3"/>
-          <p:cNvSpPr txBox="1"/>
-          <p:nvPr/>
-        </p:nvSpPr>
-        <p:spPr>
-          <a:xfrm>
-            <a:off x="594360" y="2286000"/>
-            <a:ext cx="5227168" cy="2468880"/>
-          </a:xfrm>
-          <a:prstGeom prst="rect">
-            <a:avLst/>
-          </a:prstGeom>
-          <a:noFill/>
-          <a:ln/>
-        </p:spPr>
-        <p:txBody>
-          <a:bodyPr wrap="square" lIns="0" tIns="0" rIns="0" bIns="0" rtlCol="0" anchor="t"/>
-          <a:lstStyle/>
-          <a:p>
-            <a:pPr algn="l" marL="342900" indent="-342900">
-              <a:lnSpc>
-                <a:spcPct val="122000"/>
-              </a:lnSpc>
-              <a:spcAft>
-                <a:spcPts val="1000"/>
-              </a:spcAft>
-              <a:buSzPct val="100000"/>
-              <a:buChar char="•"/>
-            </a:pPr>
-            <a:r>
-              <a:rPr lang="en-US" sz="1350" dirty="0">
-                <a:solidFill>
-                  <a:srgbClr val="2F3E47"/>
-                </a:solidFill>
-                <a:latin typeface="Calibri" pitchFamily="34" charset="0"/>
-                <a:ea typeface="Calibri" pitchFamily="34" charset="-122"/>
-                <a:cs typeface="Calibri" pitchFamily="34" charset="-120"/>
-              </a:rPr>
-              <a:t>Trésorerie limitée des petits producteurs pluviaux.</a:t>
-            </a:r>
-            <a:endParaRPr lang="en-US" sz="1350" dirty="0"/>
-          </a:p>
-          <a:p>
-            <a:pPr algn="l" marL="342900" indent="-342900">
-              <a:lnSpc>
-                <a:spcPct val="122000"/>
-              </a:lnSpc>
-              <a:spcAft>
-                <a:spcPts val="1000"/>
-              </a:spcAft>
-              <a:buSzPct val="100000"/>
-              <a:buChar char="•"/>
-            </a:pPr>
-            <a:r>
-              <a:rPr lang="en-US" sz="1350" dirty="0">
-                <a:solidFill>
-                  <a:srgbClr val="2F3E47"/>
-                </a:solidFill>
-                <a:latin typeface="Calibri" pitchFamily="34" charset="0"/>
-                <a:ea typeface="Calibri" pitchFamily="34" charset="-122"/>
-                <a:cs typeface="Calibri" pitchFamily="34" charset="-120"/>
-              </a:rPr>
-              <a:t>Variabilité de l'hivernage : une bonne année masque l'intérêt du produit.</a:t>
-            </a:r>
-            <a:endParaRPr lang="en-US" sz="1350" dirty="0"/>
-          </a:p>
-          <a:p>
-            <a:pPr algn="l" marL="342900" indent="-342900">
-              <a:lnSpc>
-                <a:spcPct val="122000"/>
-              </a:lnSpc>
-              <a:spcAft>
-                <a:spcPts val="1000"/>
-              </a:spcAft>
-              <a:buSzPct val="100000"/>
-              <a:buChar char="•"/>
-            </a:pPr>
-            <a:r>
-              <a:rPr lang="en-US" sz="1350" dirty="0">
-                <a:solidFill>
-                  <a:srgbClr val="2F3E47"/>
-                </a:solidFill>
-                <a:latin typeface="Calibri" pitchFamily="34" charset="0"/>
-                <a:ea typeface="Calibri" pitchFamily="34" charset="-122"/>
-                <a:cs typeface="Calibri" pitchFamily="34" charset="-120"/>
-              </a:rPr>
-              <a:t>Produit peu connu, parfois confondu avec les polymères à base de sodium.</a:t>
-            </a:r>
-            <a:endParaRPr lang="en-US" sz="1350" dirty="0"/>
-          </a:p>
-          <a:p>
-            <a:pPr algn="l" marL="342900" indent="-342900">
-              <a:lnSpc>
-                <a:spcPct val="122000"/>
-              </a:lnSpc>
-              <a:spcAft>
-                <a:spcPts val="1000"/>
-              </a:spcAft>
-              <a:buSzPct val="100000"/>
-              <a:buChar char="•"/>
-            </a:pPr>
-            <a:r>
-              <a:rPr lang="en-US" sz="1350" dirty="0">
-                <a:solidFill>
-                  <a:srgbClr val="2F3E47"/>
-                </a:solidFill>
-                <a:latin typeface="Calibri" pitchFamily="34" charset="0"/>
-                <a:ea typeface="Calibri" pitchFamily="34" charset="-122"/>
-                <a:cs typeface="Calibri" pitchFamily="34" charset="-120"/>
-              </a:rPr>
-              <a:t>Homologation des intrants auprès des autorités avant la vente commerciale.</a:t>
-            </a:r>
-            <a:endParaRPr lang="en-US" sz="1350" dirty="0"/>
-          </a:p>
-        </p:txBody>
-      </p:sp>
-      <p:sp>
-        <p:nvSpPr>
-          <p:cNvPr id="6" name="Text 4"/>
-          <p:cNvSpPr txBox="1"/>
-          <p:nvPr/>
-        </p:nvSpPr>
-        <p:spPr>
-          <a:xfrm>
-            <a:off x="6370168" y="1783080"/>
-            <a:ext cx="5227168" cy="411480"/>
-          </a:xfrm>
-          <a:prstGeom prst="rect">
-            <a:avLst/>
-          </a:prstGeom>
-          <a:noFill/>
-          <a:ln/>
-        </p:spPr>
-        <p:txBody>
-          <a:bodyPr wrap="square" lIns="0" tIns="0" rIns="0" bIns="0" rtlCol="0" anchor="ctr"/>
-          <a:lstStyle/>
-          <a:p>
-            <a:pPr algn="l" indent="0" marL="0">
-              <a:buNone/>
-            </a:pPr>
-            <a:r>
-              <a:rPr lang="en-US" sz="1600" b="1" dirty="0">
-                <a:solidFill>
-                  <a:srgbClr val="1D4E6B"/>
-                </a:solidFill>
-                <a:latin typeface="Cambria" pitchFamily="34" charset="0"/>
-                <a:ea typeface="Cambria" pitchFamily="34" charset="-122"/>
-                <a:cs typeface="Cambria" pitchFamily="34" charset="-120"/>
-              </a:rPr>
-              <a:t>Réponses</a:t>
-            </a:r>
-            <a:endParaRPr lang="en-US" sz="1600" dirty="0"/>
-          </a:p>
-        </p:txBody>
-      </p:sp>
-      <p:sp>
-        <p:nvSpPr>
-          <p:cNvPr id="7" name="Text 5"/>
-          <p:cNvSpPr txBox="1"/>
-          <p:nvPr/>
-        </p:nvSpPr>
-        <p:spPr>
-          <a:xfrm>
-            <a:off x="6370168" y="2286000"/>
-            <a:ext cx="5227168" cy="2468880"/>
-          </a:xfrm>
-          <a:prstGeom prst="rect">
-            <a:avLst/>
-          </a:prstGeom>
-          <a:noFill/>
-          <a:ln/>
-        </p:spPr>
-        <p:txBody>
-          <a:bodyPr wrap="square" lIns="0" tIns="0" rIns="0" bIns="0" rtlCol="0" anchor="t"/>
-          <a:lstStyle/>
-          <a:p>
-            <a:pPr algn="l" marL="342900" indent="-342900">
-              <a:lnSpc>
-                <a:spcPct val="122000"/>
-              </a:lnSpc>
-              <a:spcAft>
-                <a:spcPts val="1000"/>
-              </a:spcAft>
-              <a:buSzPct val="100000"/>
-              <a:buChar char="•"/>
-            </a:pPr>
-            <a:r>
-              <a:rPr lang="en-US" sz="1350" dirty="0">
-                <a:solidFill>
-                  <a:srgbClr val="2F3E47"/>
-                </a:solidFill>
-                <a:latin typeface="Calibri" pitchFamily="34" charset="0"/>
-                <a:ea typeface="Calibri" pitchFamily="34" charset="-122"/>
-                <a:cs typeface="Calibri" pitchFamily="34" charset="-120"/>
-              </a:rPr>
-              <a:t>Commencer par le maraîchage des Niayes et les cultures irriguées, où le gain se chiffre vite.</a:t>
-            </a:r>
-            <a:endParaRPr lang="en-US" sz="1350" dirty="0"/>
-          </a:p>
-          <a:p>
-            <a:pPr algn="l" marL="342900" indent="-342900">
-              <a:lnSpc>
-                <a:spcPct val="122000"/>
-              </a:lnSpc>
-              <a:spcAft>
-                <a:spcPts val="1000"/>
-              </a:spcAft>
-              <a:buSzPct val="100000"/>
-              <a:buChar char="•"/>
-            </a:pPr>
-            <a:r>
-              <a:rPr lang="en-US" sz="1350" dirty="0">
-                <a:solidFill>
-                  <a:srgbClr val="2F3E47"/>
-                </a:solidFill>
-                <a:latin typeface="Calibri" pitchFamily="34" charset="0"/>
-                <a:ea typeface="Calibri" pitchFamily="34" charset="-122"/>
-                <a:cs typeface="Calibri" pitchFamily="34" charset="-120"/>
-              </a:rPr>
-              <a:t>Mesurer sur une campagne complète avec parcelle témoin, même en bonne année.</a:t>
-            </a:r>
-            <a:endParaRPr lang="en-US" sz="1350" dirty="0"/>
-          </a:p>
-          <a:p>
-            <a:pPr algn="l" marL="342900" indent="-342900">
-              <a:lnSpc>
-                <a:spcPct val="122000"/>
-              </a:lnSpc>
-              <a:spcAft>
-                <a:spcPts val="1000"/>
-              </a:spcAft>
-              <a:buSzPct val="100000"/>
-              <a:buChar char="•"/>
-            </a:pPr>
-            <a:r>
-              <a:rPr lang="en-US" sz="1350" dirty="0">
-                <a:solidFill>
-                  <a:srgbClr val="2F3E47"/>
-                </a:solidFill>
-                <a:latin typeface="Calibri" pitchFamily="34" charset="0"/>
-                <a:ea typeface="Calibri" pitchFamily="34" charset="-122"/>
-                <a:cs typeface="Calibri" pitchFamily="34" charset="-120"/>
-              </a:rPr>
-              <a:t>Documenter la formulation potassique, sans sodium, compatible avec les cultures alimentaires.</a:t>
-            </a:r>
-            <a:endParaRPr lang="en-US" sz="1350" dirty="0"/>
-          </a:p>
-          <a:p>
-            <a:pPr algn="l" marL="342900" indent="-342900">
-              <a:lnSpc>
-                <a:spcPct val="122000"/>
-              </a:lnSpc>
-              <a:spcAft>
-                <a:spcPts val="1000"/>
-              </a:spcAft>
-              <a:buSzPct val="100000"/>
-              <a:buChar char="•"/>
-            </a:pPr>
-            <a:r>
-              <a:rPr lang="en-US" sz="1350" dirty="0">
-                <a:solidFill>
-                  <a:srgbClr val="2F3E47"/>
-                </a:solidFill>
-                <a:latin typeface="Calibri" pitchFamily="34" charset="0"/>
-                <a:ea typeface="Calibri" pitchFamily="34" charset="-122"/>
-                <a:cs typeface="Calibri" pitchFamily="34" charset="-120"/>
-              </a:rPr>
-              <a:t>Ouvrir le dossier d'homologation en parallèle des premiers essais.</a:t>
-            </a:r>
-            <a:endParaRPr lang="en-US" sz="1350" dirty="0"/>
-          </a:p>
-        </p:txBody>
-      </p:sp>
-      <p:sp>
-        <p:nvSpPr>
-          <p:cNvPr id="8" name="Shape 6"/>
+          <p:cNvPr id="4" name="Shape 2"/>
           <p:cNvSpPr/>
           <p:nvPr/>
         </p:nvSpPr>
         <p:spPr>
           <a:xfrm>
-            <a:off x="594360" y="4846320"/>
-            <a:ext cx="11002975" cy="960120"/>
+            <a:off x="594360" y="1874520"/>
+            <a:ext cx="2545004" cy="2834640"/>
           </a:xfrm>
           <a:prstGeom prst="roundRect">
             <a:avLst>
-              <a:gd name="adj" fmla="val 7619"/>
+              <a:gd name="adj" fmla="val 3593"/>
             </a:avLst>
           </a:prstGeom>
           <a:solidFill>
@@ -5893,14 +5689,112 @@
       </p:sp>
       <p:sp>
         <p:nvSpPr>
-          <p:cNvPr id="9" name="Text 7"/>
-          <p:cNvSpPr txBox="1"/>
-          <p:nvPr/>
-        </p:nvSpPr>
-        <p:spPr>
-          <a:xfrm>
-            <a:off x="822960" y="4983480"/>
-            <a:ext cx="10545775" cy="713232"/>
+          <p:cNvPr id="5" name="Shape 3"/>
+          <p:cNvSpPr/>
+          <p:nvPr/>
+        </p:nvSpPr>
+        <p:spPr>
+          <a:xfrm>
+            <a:off x="822960" y="2103120"/>
+            <a:ext cx="566928" cy="566928"/>
+          </a:xfrm>
+          <a:prstGeom prst="ellipse">
+            <a:avLst/>
+          </a:prstGeom>
+          <a:solidFill>
+            <a:srgbClr val="1D4E6B"/>
+          </a:solidFill>
+          <a:ln/>
+        </p:spPr>
+      </p:sp>
+      <p:sp>
+        <p:nvSpPr>
+          <p:cNvPr id="6" name="Text 4"/>
+          <p:cNvSpPr txBox="1"/>
+          <p:nvPr/>
+        </p:nvSpPr>
+        <p:spPr>
+          <a:xfrm>
+            <a:off x="822960" y="2103120"/>
+            <a:ext cx="566928" cy="566928"/>
+          </a:xfrm>
+          <a:prstGeom prst="rect">
+            <a:avLst/>
+          </a:prstGeom>
+          <a:noFill/>
+          <a:ln/>
+        </p:spPr>
+        <p:txBody>
+          <a:bodyPr wrap="square" lIns="0" tIns="0" rIns="0" bIns="0" rtlCol="0" anchor="ctr"/>
+          <a:lstStyle/>
+          <a:p>
+            <a:pPr algn="ctr" indent="0" marL="0">
+              <a:buNone/>
+            </a:pPr>
+            <a:r>
+              <a:rPr lang="en-US" sz="1600" b="1" dirty="0">
+                <a:solidFill>
+                  <a:srgbClr val="FFFFFF"/>
+                </a:solidFill>
+                <a:latin typeface="Cambria" pitchFamily="34" charset="0"/>
+                <a:ea typeface="Cambria" pitchFamily="34" charset="-122"/>
+                <a:cs typeface="Cambria" pitchFamily="34" charset="-120"/>
+              </a:rPr>
+              <a:t>1</a:t>
+            </a:r>
+            <a:endParaRPr lang="en-US" sz="1600" dirty="0"/>
+          </a:p>
+        </p:txBody>
+      </p:sp>
+      <p:sp>
+        <p:nvSpPr>
+          <p:cNvPr id="7" name="Text 5"/>
+          <p:cNvSpPr txBox="1"/>
+          <p:nvPr/>
+        </p:nvSpPr>
+        <p:spPr>
+          <a:xfrm>
+            <a:off x="822960" y="2788920"/>
+            <a:ext cx="2087804" cy="457200"/>
+          </a:xfrm>
+          <a:prstGeom prst="rect">
+            <a:avLst/>
+          </a:prstGeom>
+          <a:noFill/>
+          <a:ln/>
+        </p:spPr>
+        <p:txBody>
+          <a:bodyPr wrap="square" lIns="0" tIns="0" rIns="0" bIns="0" rtlCol="0" anchor="ctr"/>
+          <a:lstStyle/>
+          <a:p>
+            <a:pPr algn="l" indent="0" marL="0">
+              <a:buNone/>
+            </a:pPr>
+            <a:r>
+              <a:rPr lang="en-US" sz="1400" b="1" dirty="0">
+                <a:solidFill>
+                  <a:srgbClr val="1D4E6B"/>
+                </a:solidFill>
+                <a:latin typeface="Cambria" pitchFamily="34" charset="0"/>
+                <a:ea typeface="Cambria" pitchFamily="34" charset="-122"/>
+                <a:cs typeface="Cambria" pitchFamily="34" charset="-120"/>
+              </a:rPr>
+              <a:t>Diagnostic</a:t>
+            </a:r>
+            <a:endParaRPr lang="en-US" sz="1400" dirty="0"/>
+          </a:p>
+        </p:txBody>
+      </p:sp>
+      <p:sp>
+        <p:nvSpPr>
+          <p:cNvPr id="8" name="Text 6"/>
+          <p:cNvSpPr txBox="1"/>
+          <p:nvPr/>
+        </p:nvSpPr>
+        <p:spPr>
+          <a:xfrm>
+            <a:off x="822960" y="3291840"/>
+            <a:ext cx="2087804" cy="1234440"/>
           </a:xfrm>
           <a:prstGeom prst="rect">
             <a:avLst/>
@@ -5914,12 +5808,555 @@
           <a:p>
             <a:pPr algn="l" indent="0" marL="0">
               <a:lnSpc>
-                <a:spcPct val="118000"/>
+                <a:spcPct val="120000"/>
               </a:lnSpc>
               <a:buNone/>
             </a:pPr>
             <a:r>
-              <a:rPr lang="en-US" sz="1100" dirty="0">
+              <a:rPr lang="en-US" sz="1200" dirty="0">
+                <a:solidFill>
+                  <a:srgbClr val="2F3E47"/>
+                </a:solidFill>
+                <a:latin typeface="Calibri" pitchFamily="34" charset="0"/>
+                <a:ea typeface="Calibri" pitchFamily="34" charset="-122"/>
+                <a:cs typeface="Calibri" pitchFamily="34" charset="-120"/>
+              </a:rPr>
+              <a:t>Analyse du sol, du mode d'arrosage et de la culture. Aucun engagement à ce stade.</a:t>
+            </a:r>
+            <a:endParaRPr lang="en-US" sz="1200" dirty="0"/>
+          </a:p>
+        </p:txBody>
+      </p:sp>
+      <p:sp>
+        <p:nvSpPr>
+          <p:cNvPr id="9" name="Shape 7"/>
+          <p:cNvSpPr/>
+          <p:nvPr/>
+        </p:nvSpPr>
+        <p:spPr>
+          <a:xfrm>
+            <a:off x="3413684" y="1874520"/>
+            <a:ext cx="2545004" cy="2834640"/>
+          </a:xfrm>
+          <a:prstGeom prst="roundRect">
+            <a:avLst>
+              <a:gd name="adj" fmla="val 3593"/>
+            </a:avLst>
+          </a:prstGeom>
+          <a:solidFill>
+            <a:srgbClr val="EEF2F5"/>
+          </a:solidFill>
+          <a:ln w="9525">
+            <a:solidFill>
+              <a:srgbClr val="D8E1E7"/>
+            </a:solidFill>
+            <a:prstDash val="solid"/>
+          </a:ln>
+        </p:spPr>
+      </p:sp>
+      <p:sp>
+        <p:nvSpPr>
+          <p:cNvPr id="10" name="Shape 8"/>
+          <p:cNvSpPr/>
+          <p:nvPr/>
+        </p:nvSpPr>
+        <p:spPr>
+          <a:xfrm>
+            <a:off x="3642284" y="2103120"/>
+            <a:ext cx="566928" cy="566928"/>
+          </a:xfrm>
+          <a:prstGeom prst="ellipse">
+            <a:avLst/>
+          </a:prstGeom>
+          <a:solidFill>
+            <a:srgbClr val="1D4E6B"/>
+          </a:solidFill>
+          <a:ln/>
+        </p:spPr>
+      </p:sp>
+      <p:sp>
+        <p:nvSpPr>
+          <p:cNvPr id="11" name="Text 9"/>
+          <p:cNvSpPr txBox="1"/>
+          <p:nvPr/>
+        </p:nvSpPr>
+        <p:spPr>
+          <a:xfrm>
+            <a:off x="3642284" y="2103120"/>
+            <a:ext cx="566928" cy="566928"/>
+          </a:xfrm>
+          <a:prstGeom prst="rect">
+            <a:avLst/>
+          </a:prstGeom>
+          <a:noFill/>
+          <a:ln/>
+        </p:spPr>
+        <p:txBody>
+          <a:bodyPr wrap="square" lIns="0" tIns="0" rIns="0" bIns="0" rtlCol="0" anchor="ctr"/>
+          <a:lstStyle/>
+          <a:p>
+            <a:pPr algn="ctr" indent="0" marL="0">
+              <a:buNone/>
+            </a:pPr>
+            <a:r>
+              <a:rPr lang="en-US" sz="1600" b="1" dirty="0">
+                <a:solidFill>
+                  <a:srgbClr val="FFFFFF"/>
+                </a:solidFill>
+                <a:latin typeface="Cambria" pitchFamily="34" charset="0"/>
+                <a:ea typeface="Cambria" pitchFamily="34" charset="-122"/>
+                <a:cs typeface="Cambria" pitchFamily="34" charset="-120"/>
+              </a:rPr>
+              <a:t>2</a:t>
+            </a:r>
+            <a:endParaRPr lang="en-US" sz="1600" dirty="0"/>
+          </a:p>
+        </p:txBody>
+      </p:sp>
+      <p:sp>
+        <p:nvSpPr>
+          <p:cNvPr id="12" name="Text 10"/>
+          <p:cNvSpPr txBox="1"/>
+          <p:nvPr/>
+        </p:nvSpPr>
+        <p:spPr>
+          <a:xfrm>
+            <a:off x="3642284" y="2788920"/>
+            <a:ext cx="2087804" cy="457200"/>
+          </a:xfrm>
+          <a:prstGeom prst="rect">
+            <a:avLst/>
+          </a:prstGeom>
+          <a:noFill/>
+          <a:ln/>
+        </p:spPr>
+        <p:txBody>
+          <a:bodyPr wrap="square" lIns="0" tIns="0" rIns="0" bIns="0" rtlCol="0" anchor="ctr"/>
+          <a:lstStyle/>
+          <a:p>
+            <a:pPr algn="l" indent="0" marL="0">
+              <a:buNone/>
+            </a:pPr>
+            <a:r>
+              <a:rPr lang="en-US" sz="1400" b="1" dirty="0">
+                <a:solidFill>
+                  <a:srgbClr val="1D4E6B"/>
+                </a:solidFill>
+                <a:latin typeface="Cambria" pitchFamily="34" charset="0"/>
+                <a:ea typeface="Cambria" pitchFamily="34" charset="-122"/>
+                <a:cs typeface="Cambria" pitchFamily="34" charset="-120"/>
+              </a:rPr>
+              <a:t>Parcelle témoin</a:t>
+            </a:r>
+            <a:endParaRPr lang="en-US" sz="1400" dirty="0"/>
+          </a:p>
+        </p:txBody>
+      </p:sp>
+      <p:sp>
+        <p:nvSpPr>
+          <p:cNvPr id="13" name="Text 11"/>
+          <p:cNvSpPr txBox="1"/>
+          <p:nvPr/>
+        </p:nvSpPr>
+        <p:spPr>
+          <a:xfrm>
+            <a:off x="3642284" y="3291840"/>
+            <a:ext cx="2087804" cy="1234440"/>
+          </a:xfrm>
+          <a:prstGeom prst="rect">
+            <a:avLst/>
+          </a:prstGeom>
+          <a:noFill/>
+          <a:ln/>
+        </p:spPr>
+        <p:txBody>
+          <a:bodyPr wrap="square" lIns="0" tIns="0" rIns="0" bIns="0" rtlCol="0" anchor="t"/>
+          <a:lstStyle/>
+          <a:p>
+            <a:pPr algn="l" indent="0" marL="0">
+              <a:lnSpc>
+                <a:spcPct val="120000"/>
+              </a:lnSpc>
+              <a:buNone/>
+            </a:pPr>
+            <a:r>
+              <a:rPr lang="en-US" sz="1200" dirty="0">
+                <a:solidFill>
+                  <a:srgbClr val="2F3E47"/>
+                </a:solidFill>
+                <a:latin typeface="Calibri" pitchFamily="34" charset="0"/>
+                <a:ea typeface="Calibri" pitchFamily="34" charset="-122"/>
+                <a:cs typeface="Calibri" pitchFamily="34" charset="-120"/>
+              </a:rPr>
+              <a:t>Un essai comparatif sur un bloc, avec parcelle témoin conduite à l'identique.</a:t>
+            </a:r>
+            <a:endParaRPr lang="en-US" sz="1200" dirty="0"/>
+          </a:p>
+        </p:txBody>
+      </p:sp>
+      <p:sp>
+        <p:nvSpPr>
+          <p:cNvPr id="14" name="Shape 12"/>
+          <p:cNvSpPr/>
+          <p:nvPr/>
+        </p:nvSpPr>
+        <p:spPr>
+          <a:xfrm>
+            <a:off x="6233008" y="1874520"/>
+            <a:ext cx="2545004" cy="2834640"/>
+          </a:xfrm>
+          <a:prstGeom prst="roundRect">
+            <a:avLst>
+              <a:gd name="adj" fmla="val 3593"/>
+            </a:avLst>
+          </a:prstGeom>
+          <a:solidFill>
+            <a:srgbClr val="EEF2F5"/>
+          </a:solidFill>
+          <a:ln w="9525">
+            <a:solidFill>
+              <a:srgbClr val="D8E1E7"/>
+            </a:solidFill>
+            <a:prstDash val="solid"/>
+          </a:ln>
+        </p:spPr>
+      </p:sp>
+      <p:sp>
+        <p:nvSpPr>
+          <p:cNvPr id="15" name="Shape 13"/>
+          <p:cNvSpPr/>
+          <p:nvPr/>
+        </p:nvSpPr>
+        <p:spPr>
+          <a:xfrm>
+            <a:off x="6461608" y="2103120"/>
+            <a:ext cx="566928" cy="566928"/>
+          </a:xfrm>
+          <a:prstGeom prst="ellipse">
+            <a:avLst/>
+          </a:prstGeom>
+          <a:solidFill>
+            <a:srgbClr val="1D4E6B"/>
+          </a:solidFill>
+          <a:ln/>
+        </p:spPr>
+      </p:sp>
+      <p:sp>
+        <p:nvSpPr>
+          <p:cNvPr id="16" name="Text 14"/>
+          <p:cNvSpPr txBox="1"/>
+          <p:nvPr/>
+        </p:nvSpPr>
+        <p:spPr>
+          <a:xfrm>
+            <a:off x="6461608" y="2103120"/>
+            <a:ext cx="566928" cy="566928"/>
+          </a:xfrm>
+          <a:prstGeom prst="rect">
+            <a:avLst/>
+          </a:prstGeom>
+          <a:noFill/>
+          <a:ln/>
+        </p:spPr>
+        <p:txBody>
+          <a:bodyPr wrap="square" lIns="0" tIns="0" rIns="0" bIns="0" rtlCol="0" anchor="ctr"/>
+          <a:lstStyle/>
+          <a:p>
+            <a:pPr algn="ctr" indent="0" marL="0">
+              <a:buNone/>
+            </a:pPr>
+            <a:r>
+              <a:rPr lang="en-US" sz="1600" b="1" dirty="0">
+                <a:solidFill>
+                  <a:srgbClr val="FFFFFF"/>
+                </a:solidFill>
+                <a:latin typeface="Cambria" pitchFamily="34" charset="0"/>
+                <a:ea typeface="Cambria" pitchFamily="34" charset="-122"/>
+                <a:cs typeface="Cambria" pitchFamily="34" charset="-120"/>
+              </a:rPr>
+              <a:t>3</a:t>
+            </a:r>
+            <a:endParaRPr lang="en-US" sz="1600" dirty="0"/>
+          </a:p>
+        </p:txBody>
+      </p:sp>
+      <p:sp>
+        <p:nvSpPr>
+          <p:cNvPr id="17" name="Text 15"/>
+          <p:cNvSpPr txBox="1"/>
+          <p:nvPr/>
+        </p:nvSpPr>
+        <p:spPr>
+          <a:xfrm>
+            <a:off x="6461608" y="2788920"/>
+            <a:ext cx="2087804" cy="457200"/>
+          </a:xfrm>
+          <a:prstGeom prst="rect">
+            <a:avLst/>
+          </a:prstGeom>
+          <a:noFill/>
+          <a:ln/>
+        </p:spPr>
+        <p:txBody>
+          <a:bodyPr wrap="square" lIns="0" tIns="0" rIns="0" bIns="0" rtlCol="0" anchor="ctr"/>
+          <a:lstStyle/>
+          <a:p>
+            <a:pPr algn="l" indent="0" marL="0">
+              <a:buNone/>
+            </a:pPr>
+            <a:r>
+              <a:rPr lang="en-US" sz="1400" b="1" dirty="0">
+                <a:solidFill>
+                  <a:srgbClr val="1D4E6B"/>
+                </a:solidFill>
+                <a:latin typeface="Cambria" pitchFamily="34" charset="0"/>
+                <a:ea typeface="Cambria" pitchFamily="34" charset="-122"/>
+                <a:cs typeface="Cambria" pitchFamily="34" charset="-120"/>
+              </a:rPr>
+              <a:t>Mesure</a:t>
+            </a:r>
+            <a:endParaRPr lang="en-US" sz="1400" dirty="0"/>
+          </a:p>
+        </p:txBody>
+      </p:sp>
+      <p:sp>
+        <p:nvSpPr>
+          <p:cNvPr id="18" name="Text 16"/>
+          <p:cNvSpPr txBox="1"/>
+          <p:nvPr/>
+        </p:nvSpPr>
+        <p:spPr>
+          <a:xfrm>
+            <a:off x="6461608" y="3291840"/>
+            <a:ext cx="2087804" cy="1234440"/>
+          </a:xfrm>
+          <a:prstGeom prst="rect">
+            <a:avLst/>
+          </a:prstGeom>
+          <a:noFill/>
+          <a:ln/>
+        </p:spPr>
+        <p:txBody>
+          <a:bodyPr wrap="square" lIns="0" tIns="0" rIns="0" bIns="0" rtlCol="0" anchor="t"/>
+          <a:lstStyle/>
+          <a:p>
+            <a:pPr algn="l" indent="0" marL="0">
+              <a:lnSpc>
+                <a:spcPct val="120000"/>
+              </a:lnSpc>
+              <a:buNone/>
+            </a:pPr>
+            <a:r>
+              <a:rPr lang="en-US" sz="1200" dirty="0">
+                <a:solidFill>
+                  <a:srgbClr val="2F3E47"/>
+                </a:solidFill>
+                <a:latin typeface="Calibri" pitchFamily="34" charset="0"/>
+                <a:ea typeface="Calibri" pitchFamily="34" charset="-122"/>
+                <a:cs typeface="Calibri" pitchFamily="34" charset="-120"/>
+              </a:rPr>
+              <a:t>Relevés de levée, de consommation d'eau et de rendement sur une campagne complète.</a:t>
+            </a:r>
+            <a:endParaRPr lang="en-US" sz="1200" dirty="0"/>
+          </a:p>
+        </p:txBody>
+      </p:sp>
+      <p:sp>
+        <p:nvSpPr>
+          <p:cNvPr id="19" name="Shape 17"/>
+          <p:cNvSpPr/>
+          <p:nvPr/>
+        </p:nvSpPr>
+        <p:spPr>
+          <a:xfrm>
+            <a:off x="9052331" y="1874520"/>
+            <a:ext cx="2545004" cy="2834640"/>
+          </a:xfrm>
+          <a:prstGeom prst="roundRect">
+            <a:avLst>
+              <a:gd name="adj" fmla="val 3593"/>
+            </a:avLst>
+          </a:prstGeom>
+          <a:solidFill>
+            <a:srgbClr val="EEF2F5"/>
+          </a:solidFill>
+          <a:ln w="9525">
+            <a:solidFill>
+              <a:srgbClr val="D8E1E7"/>
+            </a:solidFill>
+            <a:prstDash val="solid"/>
+          </a:ln>
+        </p:spPr>
+      </p:sp>
+      <p:sp>
+        <p:nvSpPr>
+          <p:cNvPr id="20" name="Shape 18"/>
+          <p:cNvSpPr/>
+          <p:nvPr/>
+        </p:nvSpPr>
+        <p:spPr>
+          <a:xfrm>
+            <a:off x="9280931" y="2103120"/>
+            <a:ext cx="566928" cy="566928"/>
+          </a:xfrm>
+          <a:prstGeom prst="ellipse">
+            <a:avLst/>
+          </a:prstGeom>
+          <a:solidFill>
+            <a:srgbClr val="1D4E6B"/>
+          </a:solidFill>
+          <a:ln/>
+        </p:spPr>
+      </p:sp>
+      <p:sp>
+        <p:nvSpPr>
+          <p:cNvPr id="21" name="Text 19"/>
+          <p:cNvSpPr txBox="1"/>
+          <p:nvPr/>
+        </p:nvSpPr>
+        <p:spPr>
+          <a:xfrm>
+            <a:off x="9280931" y="2103120"/>
+            <a:ext cx="566928" cy="566928"/>
+          </a:xfrm>
+          <a:prstGeom prst="rect">
+            <a:avLst/>
+          </a:prstGeom>
+          <a:noFill/>
+          <a:ln/>
+        </p:spPr>
+        <p:txBody>
+          <a:bodyPr wrap="square" lIns="0" tIns="0" rIns="0" bIns="0" rtlCol="0" anchor="ctr"/>
+          <a:lstStyle/>
+          <a:p>
+            <a:pPr algn="ctr" indent="0" marL="0">
+              <a:buNone/>
+            </a:pPr>
+            <a:r>
+              <a:rPr lang="en-US" sz="1600" b="1" dirty="0">
+                <a:solidFill>
+                  <a:srgbClr val="FFFFFF"/>
+                </a:solidFill>
+                <a:latin typeface="Cambria" pitchFamily="34" charset="0"/>
+                <a:ea typeface="Cambria" pitchFamily="34" charset="-122"/>
+                <a:cs typeface="Cambria" pitchFamily="34" charset="-120"/>
+              </a:rPr>
+              <a:t>4</a:t>
+            </a:r>
+            <a:endParaRPr lang="en-US" sz="1600" dirty="0"/>
+          </a:p>
+        </p:txBody>
+      </p:sp>
+      <p:sp>
+        <p:nvSpPr>
+          <p:cNvPr id="22" name="Text 20"/>
+          <p:cNvSpPr txBox="1"/>
+          <p:nvPr/>
+        </p:nvSpPr>
+        <p:spPr>
+          <a:xfrm>
+            <a:off x="9280931" y="2788920"/>
+            <a:ext cx="2087804" cy="457200"/>
+          </a:xfrm>
+          <a:prstGeom prst="rect">
+            <a:avLst/>
+          </a:prstGeom>
+          <a:noFill/>
+          <a:ln/>
+        </p:spPr>
+        <p:txBody>
+          <a:bodyPr wrap="square" lIns="0" tIns="0" rIns="0" bIns="0" rtlCol="0" anchor="ctr"/>
+          <a:lstStyle/>
+          <a:p>
+            <a:pPr algn="l" indent="0" marL="0">
+              <a:buNone/>
+            </a:pPr>
+            <a:r>
+              <a:rPr lang="en-US" sz="1400" b="1" dirty="0">
+                <a:solidFill>
+                  <a:srgbClr val="1D4E6B"/>
+                </a:solidFill>
+                <a:latin typeface="Cambria" pitchFamily="34" charset="0"/>
+                <a:ea typeface="Cambria" pitchFamily="34" charset="-122"/>
+                <a:cs typeface="Cambria" pitchFamily="34" charset="-120"/>
+              </a:rPr>
+              <a:t>Extension</a:t>
+            </a:r>
+            <a:endParaRPr lang="en-US" sz="1400" dirty="0"/>
+          </a:p>
+        </p:txBody>
+      </p:sp>
+      <p:sp>
+        <p:nvSpPr>
+          <p:cNvPr id="23" name="Text 21"/>
+          <p:cNvSpPr txBox="1"/>
+          <p:nvPr/>
+        </p:nvSpPr>
+        <p:spPr>
+          <a:xfrm>
+            <a:off x="9280931" y="3291840"/>
+            <a:ext cx="2087804" cy="1234440"/>
+          </a:xfrm>
+          <a:prstGeom prst="rect">
+            <a:avLst/>
+          </a:prstGeom>
+          <a:noFill/>
+          <a:ln/>
+        </p:spPr>
+        <p:txBody>
+          <a:bodyPr wrap="square" lIns="0" tIns="0" rIns="0" bIns="0" rtlCol="0" anchor="t"/>
+          <a:lstStyle/>
+          <a:p>
+            <a:pPr algn="l" indent="0" marL="0">
+              <a:lnSpc>
+                <a:spcPct val="120000"/>
+              </a:lnSpc>
+              <a:buNone/>
+            </a:pPr>
+            <a:r>
+              <a:rPr lang="en-US" sz="1200" dirty="0">
+                <a:solidFill>
+                  <a:srgbClr val="2F3E47"/>
+                </a:solidFill>
+                <a:latin typeface="Calibri" pitchFamily="34" charset="0"/>
+                <a:ea typeface="Calibri" pitchFamily="34" charset="-122"/>
+                <a:cs typeface="Calibri" pitchFamily="34" charset="-120"/>
+              </a:rPr>
+              <a:t>Généralisation progressive aux autres parcelles sur la base des résultats constatés.</a:t>
+            </a:r>
+            <a:endParaRPr lang="en-US" sz="1200" dirty="0"/>
+          </a:p>
+        </p:txBody>
+      </p:sp>
+      <p:sp>
+        <p:nvSpPr>
+          <p:cNvPr id="24" name="Text 22"/>
+          <p:cNvSpPr txBox="1"/>
+          <p:nvPr/>
+        </p:nvSpPr>
+        <p:spPr>
+          <a:xfrm>
+            <a:off x="594360" y="4983480"/>
+            <a:ext cx="11002975" cy="822960"/>
+          </a:xfrm>
+          <a:prstGeom prst="rect">
+            <a:avLst/>
+          </a:prstGeom>
+          <a:noFill/>
+          <a:ln/>
+        </p:spPr>
+        <p:txBody>
+          <a:bodyPr wrap="square" lIns="0" tIns="0" rIns="0" bIns="0" rtlCol="0" anchor="t"/>
+          <a:lstStyle/>
+          <a:p>
+            <a:pPr algn="l" indent="0" marL="0">
+              <a:lnSpc>
+                <a:spcPct val="125000"/>
+              </a:lnSpc>
+              <a:buNone/>
+            </a:pPr>
+            <a:r>
+              <a:rPr lang="en-US" sz="1250" i="1" dirty="0">
                 <a:solidFill>
                   <a:srgbClr val="6B7D87"/>
                 </a:solidFill>
@@ -5927,15 +6364,15 @@
                 <a:ea typeface="Calibri" pitchFamily="34" charset="-122"/>
                 <a:cs typeface="Calibri" pitchFamily="34" charset="-120"/>
               </a:rPr>
-              <a:t>Analyse acrylamide (laboratoire Polymex, ISO 9001, teneur inférieure à 3,0 µg/g) et screening REACH / SVHC (SGS) disponibles sur demande, ainsi que le certificat SOHISCERT valable jusqu'au 4 septembre 2027.</a:t>
-            </a:r>
-            <a:endParaRPr lang="en-US" sz="1100" dirty="0"/>
-          </a:p>
-        </p:txBody>
-      </p:sp>
-      <p:sp>
-        <p:nvSpPr>
-          <p:cNvPr id="10" name="Text 8"/>
+              <a:t>La règle de dosage est la même partout : 3 grammes par litre de terre utile. Ce qui change d'un terrain à l'autre, c'est le volume de terre effectivement exploré par les racines.</a:t>
+            </a:r>
+            <a:endParaRPr lang="en-US" sz="1250" dirty="0"/>
+          </a:p>
+        </p:txBody>
+      </p:sp>
+      <p:sp>
+        <p:nvSpPr>
+          <p:cNvPr id="25" name="Text 23"/>
           <p:cNvSpPr txBox="1"/>
           <p:nvPr/>
         </p:nvSpPr>
@@ -5976,7 +6413,7 @@
       </p:sp>
       <p:sp>
         <p:nvSpPr>
-          <p:cNvPr id="11" name="Text 9"/>
+          <p:cNvPr id="26" name="Text 24"/>
           <p:cNvSpPr txBox="1"/>
           <p:nvPr/>
         </p:nvSpPr>
@@ -6026,6 +6463,1108 @@
 <file path=ppt/slides/slide14.xml><?xml version="1.0" encoding="utf-8"?>
 <p:sld xmlns:a="http://schemas.openxmlformats.org/drawingml/2006/main" xmlns:r="http://schemas.openxmlformats.org/officeDocument/2006/relationships" xmlns:p="http://schemas.openxmlformats.org/presentationml/2006/main">
   <p:cSld name="Slide 14">
+    <p:bg>
+      <p:bgPr>
+        <a:solidFill>
+          <a:srgbClr val="FAFBFC"/>
+        </a:solidFill>
+      </p:bgPr>
+    </p:bg>
+    <p:spTree>
+      <p:nvGrpSpPr>
+        <p:cNvPr id="1" name=""/>
+        <p:cNvGrpSpPr/>
+        <p:nvPr/>
+      </p:nvGrpSpPr>
+      <p:grpSpPr>
+        <a:xfrm>
+          <a:off x="0" y="0"/>
+          <a:ext cx="0" cy="0"/>
+          <a:chOff x="0" y="0"/>
+          <a:chExt cx="0" cy="0"/>
+        </a:xfrm>
+      </p:grpSpPr>
+      <p:sp>
+        <p:nvSpPr>
+          <p:cNvPr id="2" name="Text 0"/>
+          <p:cNvSpPr txBox="1"/>
+          <p:nvPr/>
+        </p:nvSpPr>
+        <p:spPr>
+          <a:xfrm>
+            <a:off x="594360" y="411480"/>
+            <a:ext cx="10515600" cy="274320"/>
+          </a:xfrm>
+          <a:prstGeom prst="rect">
+            <a:avLst/>
+          </a:prstGeom>
+          <a:noFill/>
+          <a:ln/>
+        </p:spPr>
+        <p:txBody>
+          <a:bodyPr wrap="square" lIns="0" tIns="0" rIns="0" bIns="0" rtlCol="0" anchor="ctr"/>
+          <a:lstStyle/>
+          <a:p>
+            <a:pPr algn="l" indent="0" marL="0">
+              <a:buNone/>
+            </a:pPr>
+            <a:r>
+              <a:rPr lang="en-US" sz="1150" b="1" spc="200" kern="0" dirty="0">
+                <a:solidFill>
+                  <a:srgbClr val="D98C2B"/>
+                </a:solidFill>
+                <a:latin typeface="Calibri" pitchFamily="34" charset="0"/>
+                <a:ea typeface="Calibri" pitchFamily="34" charset="-122"/>
+                <a:cs typeface="Calibri" pitchFamily="34" charset="-120"/>
+              </a:rPr>
+              <a:t>CE QU'IL FAUT ANTICIPER</a:t>
+            </a:r>
+            <a:endParaRPr lang="en-US" sz="1150" dirty="0"/>
+          </a:p>
+        </p:txBody>
+      </p:sp>
+      <p:sp>
+        <p:nvSpPr>
+          <p:cNvPr id="3" name="Text 1"/>
+          <p:cNvSpPr txBox="1"/>
+          <p:nvPr/>
+        </p:nvSpPr>
+        <p:spPr>
+          <a:xfrm>
+            <a:off x="594360" y="731520"/>
+            <a:ext cx="10881360" cy="731520"/>
+          </a:xfrm>
+          <a:prstGeom prst="rect">
+            <a:avLst/>
+          </a:prstGeom>
+          <a:noFill/>
+          <a:ln/>
+        </p:spPr>
+        <p:txBody>
+          <a:bodyPr wrap="square" lIns="0" tIns="0" rIns="0" bIns="0" rtlCol="0" anchor="ctr"/>
+          <a:lstStyle/>
+          <a:p>
+            <a:pPr algn="l" indent="0" marL="0">
+              <a:buNone/>
+            </a:pPr>
+            <a:r>
+              <a:rPr lang="en-US" sz="3000" b="1" dirty="0">
+                <a:solidFill>
+                  <a:srgbClr val="0F2E40"/>
+                </a:solidFill>
+                <a:latin typeface="Cambria" pitchFamily="34" charset="0"/>
+                <a:ea typeface="Cambria" pitchFamily="34" charset="-122"/>
+                <a:cs typeface="Cambria" pitchFamily="34" charset="-120"/>
+              </a:rPr>
+              <a:t>Risques identifiés et réponses</a:t>
+            </a:r>
+            <a:endParaRPr lang="en-US" sz="3000" dirty="0"/>
+          </a:p>
+        </p:txBody>
+      </p:sp>
+      <p:sp>
+        <p:nvSpPr>
+          <p:cNvPr id="4" name="Text 2"/>
+          <p:cNvSpPr txBox="1"/>
+          <p:nvPr/>
+        </p:nvSpPr>
+        <p:spPr>
+          <a:xfrm>
+            <a:off x="594360" y="1783080"/>
+            <a:ext cx="5227168" cy="411480"/>
+          </a:xfrm>
+          <a:prstGeom prst="rect">
+            <a:avLst/>
+          </a:prstGeom>
+          <a:noFill/>
+          <a:ln/>
+        </p:spPr>
+        <p:txBody>
+          <a:bodyPr wrap="square" lIns="0" tIns="0" rIns="0" bIns="0" rtlCol="0" anchor="ctr"/>
+          <a:lstStyle/>
+          <a:p>
+            <a:pPr algn="l" indent="0" marL="0">
+              <a:buNone/>
+            </a:pPr>
+            <a:r>
+              <a:rPr lang="en-US" sz="1600" b="1" dirty="0">
+                <a:solidFill>
+                  <a:srgbClr val="1D4E6B"/>
+                </a:solidFill>
+                <a:latin typeface="Cambria" pitchFamily="34" charset="0"/>
+                <a:ea typeface="Cambria" pitchFamily="34" charset="-122"/>
+                <a:cs typeface="Cambria" pitchFamily="34" charset="-120"/>
+              </a:rPr>
+              <a:t>Risques</a:t>
+            </a:r>
+            <a:endParaRPr lang="en-US" sz="1600" dirty="0"/>
+          </a:p>
+        </p:txBody>
+      </p:sp>
+      <p:sp>
+        <p:nvSpPr>
+          <p:cNvPr id="5" name="Text 3"/>
+          <p:cNvSpPr txBox="1"/>
+          <p:nvPr/>
+        </p:nvSpPr>
+        <p:spPr>
+          <a:xfrm>
+            <a:off x="594360" y="2286000"/>
+            <a:ext cx="5227168" cy="2468880"/>
+          </a:xfrm>
+          <a:prstGeom prst="rect">
+            <a:avLst/>
+          </a:prstGeom>
+          <a:noFill/>
+          <a:ln/>
+        </p:spPr>
+        <p:txBody>
+          <a:bodyPr wrap="square" lIns="0" tIns="0" rIns="0" bIns="0" rtlCol="0" anchor="t"/>
+          <a:lstStyle/>
+          <a:p>
+            <a:pPr algn="l" marL="342900" indent="-342900">
+              <a:lnSpc>
+                <a:spcPct val="122000"/>
+              </a:lnSpc>
+              <a:spcAft>
+                <a:spcPts val="1000"/>
+              </a:spcAft>
+              <a:buSzPct val="100000"/>
+              <a:buChar char="•"/>
+            </a:pPr>
+            <a:r>
+              <a:rPr lang="en-US" sz="1350" dirty="0">
+                <a:solidFill>
+                  <a:srgbClr val="2F3E47"/>
+                </a:solidFill>
+                <a:latin typeface="Calibri" pitchFamily="34" charset="0"/>
+                <a:ea typeface="Calibri" pitchFamily="34" charset="-122"/>
+                <a:cs typeface="Calibri" pitchFamily="34" charset="-120"/>
+              </a:rPr>
+              <a:t>Trésorerie limitée des petits producteurs pluviaux.</a:t>
+            </a:r>
+            <a:endParaRPr lang="en-US" sz="1350" dirty="0"/>
+          </a:p>
+          <a:p>
+            <a:pPr algn="l" marL="342900" indent="-342900">
+              <a:lnSpc>
+                <a:spcPct val="122000"/>
+              </a:lnSpc>
+              <a:spcAft>
+                <a:spcPts val="1000"/>
+              </a:spcAft>
+              <a:buSzPct val="100000"/>
+              <a:buChar char="•"/>
+            </a:pPr>
+            <a:r>
+              <a:rPr lang="en-US" sz="1350" dirty="0">
+                <a:solidFill>
+                  <a:srgbClr val="2F3E47"/>
+                </a:solidFill>
+                <a:latin typeface="Calibri" pitchFamily="34" charset="0"/>
+                <a:ea typeface="Calibri" pitchFamily="34" charset="-122"/>
+                <a:cs typeface="Calibri" pitchFamily="34" charset="-120"/>
+              </a:rPr>
+              <a:t>Variabilité de l'hivernage : une bonne année masque l'intérêt du produit.</a:t>
+            </a:r>
+            <a:endParaRPr lang="en-US" sz="1350" dirty="0"/>
+          </a:p>
+          <a:p>
+            <a:pPr algn="l" marL="342900" indent="-342900">
+              <a:lnSpc>
+                <a:spcPct val="122000"/>
+              </a:lnSpc>
+              <a:spcAft>
+                <a:spcPts val="1000"/>
+              </a:spcAft>
+              <a:buSzPct val="100000"/>
+              <a:buChar char="•"/>
+            </a:pPr>
+            <a:r>
+              <a:rPr lang="en-US" sz="1350" dirty="0">
+                <a:solidFill>
+                  <a:srgbClr val="2F3E47"/>
+                </a:solidFill>
+                <a:latin typeface="Calibri" pitchFamily="34" charset="0"/>
+                <a:ea typeface="Calibri" pitchFamily="34" charset="-122"/>
+                <a:cs typeface="Calibri" pitchFamily="34" charset="-120"/>
+              </a:rPr>
+              <a:t>Produit peu connu, parfois confondu avec les polymères à base de sodium.</a:t>
+            </a:r>
+            <a:endParaRPr lang="en-US" sz="1350" dirty="0"/>
+          </a:p>
+          <a:p>
+            <a:pPr algn="l" marL="342900" indent="-342900">
+              <a:lnSpc>
+                <a:spcPct val="122000"/>
+              </a:lnSpc>
+              <a:spcAft>
+                <a:spcPts val="1000"/>
+              </a:spcAft>
+              <a:buSzPct val="100000"/>
+              <a:buChar char="•"/>
+            </a:pPr>
+            <a:r>
+              <a:rPr lang="en-US" sz="1350" dirty="0">
+                <a:solidFill>
+                  <a:srgbClr val="2F3E47"/>
+                </a:solidFill>
+                <a:latin typeface="Calibri" pitchFamily="34" charset="0"/>
+                <a:ea typeface="Calibri" pitchFamily="34" charset="-122"/>
+                <a:cs typeface="Calibri" pitchFamily="34" charset="-120"/>
+              </a:rPr>
+              <a:t>Homologation des intrants auprès des autorités avant la vente commerciale.</a:t>
+            </a:r>
+            <a:endParaRPr lang="en-US" sz="1350" dirty="0"/>
+          </a:p>
+        </p:txBody>
+      </p:sp>
+      <p:sp>
+        <p:nvSpPr>
+          <p:cNvPr id="6" name="Text 4"/>
+          <p:cNvSpPr txBox="1"/>
+          <p:nvPr/>
+        </p:nvSpPr>
+        <p:spPr>
+          <a:xfrm>
+            <a:off x="6370168" y="1783080"/>
+            <a:ext cx="5227168" cy="411480"/>
+          </a:xfrm>
+          <a:prstGeom prst="rect">
+            <a:avLst/>
+          </a:prstGeom>
+          <a:noFill/>
+          <a:ln/>
+        </p:spPr>
+        <p:txBody>
+          <a:bodyPr wrap="square" lIns="0" tIns="0" rIns="0" bIns="0" rtlCol="0" anchor="ctr"/>
+          <a:lstStyle/>
+          <a:p>
+            <a:pPr algn="l" indent="0" marL="0">
+              <a:buNone/>
+            </a:pPr>
+            <a:r>
+              <a:rPr lang="en-US" sz="1600" b="1" dirty="0">
+                <a:solidFill>
+                  <a:srgbClr val="1D4E6B"/>
+                </a:solidFill>
+                <a:latin typeface="Cambria" pitchFamily="34" charset="0"/>
+                <a:ea typeface="Cambria" pitchFamily="34" charset="-122"/>
+                <a:cs typeface="Cambria" pitchFamily="34" charset="-120"/>
+              </a:rPr>
+              <a:t>Réponses</a:t>
+            </a:r>
+            <a:endParaRPr lang="en-US" sz="1600" dirty="0"/>
+          </a:p>
+        </p:txBody>
+      </p:sp>
+      <p:sp>
+        <p:nvSpPr>
+          <p:cNvPr id="7" name="Text 5"/>
+          <p:cNvSpPr txBox="1"/>
+          <p:nvPr/>
+        </p:nvSpPr>
+        <p:spPr>
+          <a:xfrm>
+            <a:off x="6370168" y="2286000"/>
+            <a:ext cx="5227168" cy="2468880"/>
+          </a:xfrm>
+          <a:prstGeom prst="rect">
+            <a:avLst/>
+          </a:prstGeom>
+          <a:noFill/>
+          <a:ln/>
+        </p:spPr>
+        <p:txBody>
+          <a:bodyPr wrap="square" lIns="0" tIns="0" rIns="0" bIns="0" rtlCol="0" anchor="t"/>
+          <a:lstStyle/>
+          <a:p>
+            <a:pPr algn="l" marL="342900" indent="-342900">
+              <a:lnSpc>
+                <a:spcPct val="122000"/>
+              </a:lnSpc>
+              <a:spcAft>
+                <a:spcPts val="1000"/>
+              </a:spcAft>
+              <a:buSzPct val="100000"/>
+              <a:buChar char="•"/>
+            </a:pPr>
+            <a:r>
+              <a:rPr lang="en-US" sz="1350" dirty="0">
+                <a:solidFill>
+                  <a:srgbClr val="2F3E47"/>
+                </a:solidFill>
+                <a:latin typeface="Calibri" pitchFamily="34" charset="0"/>
+                <a:ea typeface="Calibri" pitchFamily="34" charset="-122"/>
+                <a:cs typeface="Calibri" pitchFamily="34" charset="-120"/>
+              </a:rPr>
+              <a:t>Commencer par le maraîchage des Niayes et les cultures irriguées, où le gain se chiffre vite.</a:t>
+            </a:r>
+            <a:endParaRPr lang="en-US" sz="1350" dirty="0"/>
+          </a:p>
+          <a:p>
+            <a:pPr algn="l" marL="342900" indent="-342900">
+              <a:lnSpc>
+                <a:spcPct val="122000"/>
+              </a:lnSpc>
+              <a:spcAft>
+                <a:spcPts val="1000"/>
+              </a:spcAft>
+              <a:buSzPct val="100000"/>
+              <a:buChar char="•"/>
+            </a:pPr>
+            <a:r>
+              <a:rPr lang="en-US" sz="1350" dirty="0">
+                <a:solidFill>
+                  <a:srgbClr val="2F3E47"/>
+                </a:solidFill>
+                <a:latin typeface="Calibri" pitchFamily="34" charset="0"/>
+                <a:ea typeface="Calibri" pitchFamily="34" charset="-122"/>
+                <a:cs typeface="Calibri" pitchFamily="34" charset="-120"/>
+              </a:rPr>
+              <a:t>Mesurer sur une campagne complète avec parcelle témoin, même en bonne année.</a:t>
+            </a:r>
+            <a:endParaRPr lang="en-US" sz="1350" dirty="0"/>
+          </a:p>
+          <a:p>
+            <a:pPr algn="l" marL="342900" indent="-342900">
+              <a:lnSpc>
+                <a:spcPct val="122000"/>
+              </a:lnSpc>
+              <a:spcAft>
+                <a:spcPts val="1000"/>
+              </a:spcAft>
+              <a:buSzPct val="100000"/>
+              <a:buChar char="•"/>
+            </a:pPr>
+            <a:r>
+              <a:rPr lang="en-US" sz="1350" dirty="0">
+                <a:solidFill>
+                  <a:srgbClr val="2F3E47"/>
+                </a:solidFill>
+                <a:latin typeface="Calibri" pitchFamily="34" charset="0"/>
+                <a:ea typeface="Calibri" pitchFamily="34" charset="-122"/>
+                <a:cs typeface="Calibri" pitchFamily="34" charset="-120"/>
+              </a:rPr>
+              <a:t>Documenter la formulation potassique, sans sodium, compatible avec les cultures alimentaires.</a:t>
+            </a:r>
+            <a:endParaRPr lang="en-US" sz="1350" dirty="0"/>
+          </a:p>
+          <a:p>
+            <a:pPr algn="l" marL="342900" indent="-342900">
+              <a:lnSpc>
+                <a:spcPct val="122000"/>
+              </a:lnSpc>
+              <a:spcAft>
+                <a:spcPts val="1000"/>
+              </a:spcAft>
+              <a:buSzPct val="100000"/>
+              <a:buChar char="•"/>
+            </a:pPr>
+            <a:r>
+              <a:rPr lang="en-US" sz="1350" dirty="0">
+                <a:solidFill>
+                  <a:srgbClr val="2F3E47"/>
+                </a:solidFill>
+                <a:latin typeface="Calibri" pitchFamily="34" charset="0"/>
+                <a:ea typeface="Calibri" pitchFamily="34" charset="-122"/>
+                <a:cs typeface="Calibri" pitchFamily="34" charset="-120"/>
+              </a:rPr>
+              <a:t>Ouvrir le dossier d'homologation en parallèle des premiers essais.</a:t>
+            </a:r>
+            <a:endParaRPr lang="en-US" sz="1350" dirty="0"/>
+          </a:p>
+        </p:txBody>
+      </p:sp>
+      <p:sp>
+        <p:nvSpPr>
+          <p:cNvPr id="8" name="Shape 6"/>
+          <p:cNvSpPr/>
+          <p:nvPr/>
+        </p:nvSpPr>
+        <p:spPr>
+          <a:xfrm>
+            <a:off x="594360" y="4846320"/>
+            <a:ext cx="11002975" cy="960120"/>
+          </a:xfrm>
+          <a:prstGeom prst="roundRect">
+            <a:avLst>
+              <a:gd name="adj" fmla="val 7619"/>
+            </a:avLst>
+          </a:prstGeom>
+          <a:solidFill>
+            <a:srgbClr val="EEF2F5"/>
+          </a:solidFill>
+          <a:ln w="9525">
+            <a:solidFill>
+              <a:srgbClr val="D8E1E7"/>
+            </a:solidFill>
+            <a:prstDash val="solid"/>
+          </a:ln>
+        </p:spPr>
+      </p:sp>
+      <p:sp>
+        <p:nvSpPr>
+          <p:cNvPr id="9" name="Text 7"/>
+          <p:cNvSpPr txBox="1"/>
+          <p:nvPr/>
+        </p:nvSpPr>
+        <p:spPr>
+          <a:xfrm>
+            <a:off x="822960" y="4983480"/>
+            <a:ext cx="10545775" cy="713232"/>
+          </a:xfrm>
+          <a:prstGeom prst="rect">
+            <a:avLst/>
+          </a:prstGeom>
+          <a:noFill/>
+          <a:ln/>
+        </p:spPr>
+        <p:txBody>
+          <a:bodyPr wrap="square" lIns="0" tIns="0" rIns="0" bIns="0" rtlCol="0" anchor="t"/>
+          <a:lstStyle/>
+          <a:p>
+            <a:pPr algn="l" indent="0" marL="0">
+              <a:lnSpc>
+                <a:spcPct val="118000"/>
+              </a:lnSpc>
+              <a:buNone/>
+            </a:pPr>
+            <a:r>
+              <a:rPr lang="en-US" sz="1100" dirty="0">
+                <a:solidFill>
+                  <a:srgbClr val="6B7D87"/>
+                </a:solidFill>
+                <a:latin typeface="Calibri" pitchFamily="34" charset="0"/>
+                <a:ea typeface="Calibri" pitchFamily="34" charset="-122"/>
+                <a:cs typeface="Calibri" pitchFamily="34" charset="-120"/>
+              </a:rPr>
+              <a:t>Analyse acrylamide (laboratoire Polymex, ISO 9001, teneur inférieure à 3,0 µg/g) et screening REACH / SVHC (SGS) disponibles sur demande, ainsi que le certificat SOHISCERT valable jusqu'au 4 septembre 2027.</a:t>
+            </a:r>
+            <a:endParaRPr lang="en-US" sz="1100" dirty="0"/>
+          </a:p>
+        </p:txBody>
+      </p:sp>
+      <p:sp>
+        <p:nvSpPr>
+          <p:cNvPr id="10" name="Text 8"/>
+          <p:cNvSpPr txBox="1"/>
+          <p:nvPr/>
+        </p:nvSpPr>
+        <p:spPr>
+          <a:xfrm>
+            <a:off x="502920" y="6382512"/>
+            <a:ext cx="8229600" cy="274320"/>
+          </a:xfrm>
+          <a:prstGeom prst="rect">
+            <a:avLst/>
+          </a:prstGeom>
+          <a:noFill/>
+          <a:ln/>
+        </p:spPr>
+        <p:txBody>
+          <a:bodyPr wrap="square" lIns="0" tIns="0" rIns="0" bIns="0" rtlCol="0" anchor="ctr"/>
+          <a:lstStyle/>
+          <a:p>
+            <a:pPr algn="l" indent="0" marL="0">
+              <a:buNone/>
+            </a:pPr>
+            <a:r>
+              <a:rPr lang="en-US" sz="950" dirty="0">
+                <a:solidFill>
+                  <a:srgbClr val="6B7D87">
+                    <a:alpha val="80000"/>
+                  </a:srgbClr>
+                </a:solidFill>
+                <a:latin typeface="Calibri" pitchFamily="34" charset="0"/>
+                <a:ea typeface="Calibri" pitchFamily="34" charset="-122"/>
+                <a:cs typeface="Calibri" pitchFamily="34" charset="-120"/>
+              </a:rPr>
+              <a:t>Green Solutions · Dossier marché Sénégal</a:t>
+            </a:r>
+            <a:endParaRPr lang="en-US" sz="950" dirty="0"/>
+          </a:p>
+        </p:txBody>
+      </p:sp>
+      <p:sp>
+        <p:nvSpPr>
+          <p:cNvPr id="11" name="Text 9"/>
+          <p:cNvSpPr txBox="1"/>
+          <p:nvPr/>
+        </p:nvSpPr>
+        <p:spPr>
+          <a:xfrm>
+            <a:off x="11140135" y="6382512"/>
+            <a:ext cx="548640" cy="274320"/>
+          </a:xfrm>
+          <a:prstGeom prst="rect">
+            <a:avLst/>
+          </a:prstGeom>
+          <a:noFill/>
+          <a:ln/>
+        </p:spPr>
+        <p:txBody>
+          <a:bodyPr wrap="square" lIns="0" tIns="0" rIns="0" bIns="0" rtlCol="0" anchor="ctr"/>
+          <a:lstStyle/>
+          <a:p>
+            <a:pPr algn="r" indent="0" marL="0">
+              <a:buNone/>
+            </a:pPr>
+            <a:r>
+              <a:rPr lang="en-US" sz="950" dirty="0">
+                <a:solidFill>
+                  <a:srgbClr val="6B7D87">
+                    <a:alpha val="80000"/>
+                  </a:srgbClr>
+                </a:solidFill>
+                <a:latin typeface="Calibri" pitchFamily="34" charset="0"/>
+                <a:ea typeface="Calibri" pitchFamily="34" charset="-122"/>
+                <a:cs typeface="Calibri" pitchFamily="34" charset="-120"/>
+              </a:rPr>
+              <a:t>13</a:t>
+            </a:r>
+            <a:endParaRPr lang="en-US" sz="950" dirty="0"/>
+          </a:p>
+        </p:txBody>
+      </p:sp>
+    </p:spTree>
+  </p:cSld>
+  <p:clrMapOvr>
+    <a:masterClrMapping/>
+  </p:clrMapOvr>
+</p:sld>
+</file>
+
+<file path=ppt/slides/slide15.xml><?xml version="1.0" encoding="utf-8"?>
+<p:sld xmlns:a="http://schemas.openxmlformats.org/drawingml/2006/main" xmlns:r="http://schemas.openxmlformats.org/officeDocument/2006/relationships" xmlns:p="http://schemas.openxmlformats.org/presentationml/2006/main">
+  <p:cSld name="Slide 15">
+    <p:bg>
+      <p:bgPr>
+        <a:solidFill>
+          <a:srgbClr val="FAFBFC"/>
+        </a:solidFill>
+      </p:bgPr>
+    </p:bg>
+    <p:spTree>
+      <p:nvGrpSpPr>
+        <p:cNvPr id="1" name=""/>
+        <p:cNvGrpSpPr/>
+        <p:nvPr/>
+      </p:nvGrpSpPr>
+      <p:grpSpPr>
+        <a:xfrm>
+          <a:off x="0" y="0"/>
+          <a:ext cx="0" cy="0"/>
+          <a:chOff x="0" y="0"/>
+          <a:chExt cx="0" cy="0"/>
+        </a:xfrm>
+      </p:grpSpPr>
+      <p:sp>
+        <p:nvSpPr>
+          <p:cNvPr id="2" name="Text 0"/>
+          <p:cNvSpPr txBox="1"/>
+          <p:nvPr/>
+        </p:nvSpPr>
+        <p:spPr>
+          <a:xfrm>
+            <a:off x="594360" y="411480"/>
+            <a:ext cx="10515600" cy="274320"/>
+          </a:xfrm>
+          <a:prstGeom prst="rect">
+            <a:avLst/>
+          </a:prstGeom>
+          <a:noFill/>
+          <a:ln/>
+        </p:spPr>
+        <p:txBody>
+          <a:bodyPr wrap="square" lIns="0" tIns="0" rIns="0" bIns="0" rtlCol="0" anchor="ctr"/>
+          <a:lstStyle/>
+          <a:p>
+            <a:pPr algn="l" indent="0" marL="0">
+              <a:buNone/>
+            </a:pPr>
+            <a:r>
+              <a:rPr lang="en-US" sz="1150" b="1" spc="200" kern="0" dirty="0">
+                <a:solidFill>
+                  <a:srgbClr val="D98C2B"/>
+                </a:solidFill>
+                <a:latin typeface="Calibri" pitchFamily="34" charset="0"/>
+                <a:ea typeface="Calibri" pitchFamily="34" charset="-122"/>
+                <a:cs typeface="Calibri" pitchFamily="34" charset="-120"/>
+              </a:rPr>
+              <a:t>Sources</a:t>
+            </a:r>
+            <a:endParaRPr lang="en-US" sz="1150" dirty="0"/>
+          </a:p>
+        </p:txBody>
+      </p:sp>
+      <p:sp>
+        <p:nvSpPr>
+          <p:cNvPr id="3" name="Text 1"/>
+          <p:cNvSpPr txBox="1"/>
+          <p:nvPr/>
+        </p:nvSpPr>
+        <p:spPr>
+          <a:xfrm>
+            <a:off x="594360" y="731520"/>
+            <a:ext cx="10881360" cy="731520"/>
+          </a:xfrm>
+          <a:prstGeom prst="rect">
+            <a:avLst/>
+          </a:prstGeom>
+          <a:noFill/>
+          <a:ln/>
+        </p:spPr>
+        <p:txBody>
+          <a:bodyPr wrap="square" lIns="0" tIns="0" rIns="0" bIns="0" rtlCol="0" anchor="ctr"/>
+          <a:lstStyle/>
+          <a:p>
+            <a:pPr algn="l" indent="0" marL="0">
+              <a:buNone/>
+            </a:pPr>
+            <a:r>
+              <a:rPr lang="en-US" sz="3000" b="1" dirty="0">
+                <a:solidFill>
+                  <a:srgbClr val="0F2E40"/>
+                </a:solidFill>
+                <a:latin typeface="Cambria" pitchFamily="34" charset="0"/>
+                <a:ea typeface="Cambria" pitchFamily="34" charset="-122"/>
+                <a:cs typeface="Cambria" pitchFamily="34" charset="-120"/>
+              </a:rPr>
+              <a:t>Sources et hypothèses de travail</a:t>
+            </a:r>
+            <a:endParaRPr lang="en-US" sz="3000" dirty="0"/>
+          </a:p>
+        </p:txBody>
+      </p:sp>
+      <p:sp>
+        <p:nvSpPr>
+          <p:cNvPr id="4" name="Text 2"/>
+          <p:cNvSpPr txBox="1"/>
+          <p:nvPr/>
+        </p:nvSpPr>
+        <p:spPr>
+          <a:xfrm>
+            <a:off x="594360" y="1783080"/>
+            <a:ext cx="5227168" cy="411480"/>
+          </a:xfrm>
+          <a:prstGeom prst="rect">
+            <a:avLst/>
+          </a:prstGeom>
+          <a:noFill/>
+          <a:ln/>
+        </p:spPr>
+        <p:txBody>
+          <a:bodyPr wrap="square" lIns="0" tIns="0" rIns="0" bIns="0" rtlCol="0" anchor="ctr"/>
+          <a:lstStyle/>
+          <a:p>
+            <a:pPr algn="l" indent="0" marL="0">
+              <a:buNone/>
+            </a:pPr>
+            <a:r>
+              <a:rPr lang="en-US" sz="1600" b="1" dirty="0">
+                <a:solidFill>
+                  <a:srgbClr val="1D4E6B"/>
+                </a:solidFill>
+                <a:latin typeface="Cambria" pitchFamily="34" charset="0"/>
+                <a:ea typeface="Cambria" pitchFamily="34" charset="-122"/>
+                <a:cs typeface="Cambria" pitchFamily="34" charset="-120"/>
+              </a:rPr>
+              <a:t>Sources principales</a:t>
+            </a:r>
+            <a:endParaRPr lang="en-US" sz="1600" dirty="0"/>
+          </a:p>
+        </p:txBody>
+      </p:sp>
+      <p:sp>
+        <p:nvSpPr>
+          <p:cNvPr id="5" name="Text 3"/>
+          <p:cNvSpPr txBox="1"/>
+          <p:nvPr/>
+        </p:nvSpPr>
+        <p:spPr>
+          <a:xfrm>
+            <a:off x="594360" y="2286000"/>
+            <a:ext cx="5227168" cy="2468880"/>
+          </a:xfrm>
+          <a:prstGeom prst="rect">
+            <a:avLst/>
+          </a:prstGeom>
+          <a:noFill/>
+          <a:ln/>
+        </p:spPr>
+        <p:txBody>
+          <a:bodyPr wrap="square" lIns="0" tIns="0" rIns="0" bIns="0" rtlCol="0" anchor="t"/>
+          <a:lstStyle/>
+          <a:p>
+            <a:pPr algn="l" marL="342900" indent="-342900">
+              <a:lnSpc>
+                <a:spcPct val="122000"/>
+              </a:lnSpc>
+              <a:spcAft>
+                <a:spcPts val="1000"/>
+              </a:spcAft>
+              <a:buSzPct val="100000"/>
+              <a:buChar char="•"/>
+            </a:pPr>
+            <a:r>
+              <a:rPr lang="en-US" sz="1350" dirty="0">
+                <a:solidFill>
+                  <a:srgbClr val="2F3E47"/>
+                </a:solidFill>
+                <a:latin typeface="Calibri" pitchFamily="34" charset="0"/>
+                <a:ea typeface="Calibri" pitchFamily="34" charset="-122"/>
+                <a:cs typeface="Calibri" pitchFamily="34" charset="-120"/>
+              </a:rPr>
+              <a:t>UNCCD, Drought in Numbers 2022 : nombre et durée des sécheresses, +29 % depuis 2000 par rapport à 1980–1999.</a:t>
+            </a:r>
+            <a:endParaRPr lang="en-US" sz="1350" dirty="0"/>
+          </a:p>
+          <a:p>
+            <a:pPr algn="l" marL="342900" indent="-342900">
+              <a:lnSpc>
+                <a:spcPct val="122000"/>
+              </a:lnSpc>
+              <a:spcAft>
+                <a:spcPts val="1000"/>
+              </a:spcAft>
+              <a:buSzPct val="100000"/>
+              <a:buChar char="•"/>
+            </a:pPr>
+            <a:r>
+              <a:rPr lang="en-US" sz="1350" dirty="0">
+                <a:solidFill>
+                  <a:srgbClr val="2F3E47"/>
+                </a:solidFill>
+                <a:latin typeface="Calibri" pitchFamily="34" charset="0"/>
+                <a:ea typeface="Calibri" pitchFamily="34" charset="-122"/>
+                <a:cs typeface="Calibri" pitchFamily="34" charset="-120"/>
+              </a:rPr>
+              <a:t>ONU-Eau / FAO AQUASTAT, indicateur ODD 6.4.2 : définition et seuils du stress hydrique.</a:t>
+            </a:r>
+            <a:endParaRPr lang="en-US" sz="1350" dirty="0"/>
+          </a:p>
+          <a:p>
+            <a:pPr algn="l" marL="342900" indent="-342900">
+              <a:lnSpc>
+                <a:spcPct val="122000"/>
+              </a:lnSpc>
+              <a:spcAft>
+                <a:spcPts val="1000"/>
+              </a:spcAft>
+              <a:buSzPct val="100000"/>
+              <a:buChar char="•"/>
+            </a:pPr>
+            <a:r>
+              <a:rPr lang="en-US" sz="1350" dirty="0">
+                <a:solidFill>
+                  <a:srgbClr val="2F3E47"/>
+                </a:solidFill>
+                <a:latin typeface="Calibri" pitchFamily="34" charset="0"/>
+                <a:ea typeface="Calibri" pitchFamily="34" charset="-122"/>
+                <a:cs typeface="Calibri" pitchFamily="34" charset="-120"/>
+              </a:rPr>
+              <a:t>Photographies : Abdoulaye9 (CC BY-SA 4.0), Africa Rice Center (CC BY-SA 3.0), T.K. Naliaka (CC BY-SA 4.0) — via Wikimedia Commons.</a:t>
+            </a:r>
+            <a:endParaRPr lang="en-US" sz="1350" dirty="0"/>
+          </a:p>
+        </p:txBody>
+      </p:sp>
+      <p:sp>
+        <p:nvSpPr>
+          <p:cNvPr id="6" name="Text 4"/>
+          <p:cNvSpPr txBox="1"/>
+          <p:nvPr/>
+        </p:nvSpPr>
+        <p:spPr>
+          <a:xfrm>
+            <a:off x="6370168" y="1783080"/>
+            <a:ext cx="5227168" cy="411480"/>
+          </a:xfrm>
+          <a:prstGeom prst="rect">
+            <a:avLst/>
+          </a:prstGeom>
+          <a:noFill/>
+          <a:ln/>
+        </p:spPr>
+        <p:txBody>
+          <a:bodyPr wrap="square" lIns="0" tIns="0" rIns="0" bIns="0" rtlCol="0" anchor="ctr"/>
+          <a:lstStyle/>
+          <a:p>
+            <a:pPr algn="l" indent="0" marL="0">
+              <a:buNone/>
+            </a:pPr>
+            <a:r>
+              <a:rPr lang="en-US" sz="1600" b="1" dirty="0">
+                <a:solidFill>
+                  <a:srgbClr val="1D4E6B"/>
+                </a:solidFill>
+                <a:latin typeface="Cambria" pitchFamily="34" charset="0"/>
+                <a:ea typeface="Cambria" pitchFamily="34" charset="-122"/>
+                <a:cs typeface="Cambria" pitchFamily="34" charset="-120"/>
+              </a:rPr>
+              <a:t>Hypothèses de travail</a:t>
+            </a:r>
+            <a:endParaRPr lang="en-US" sz="1600" dirty="0"/>
+          </a:p>
+        </p:txBody>
+      </p:sp>
+      <p:sp>
+        <p:nvSpPr>
+          <p:cNvPr id="7" name="Text 5"/>
+          <p:cNvSpPr txBox="1"/>
+          <p:nvPr/>
+        </p:nvSpPr>
+        <p:spPr>
+          <a:xfrm>
+            <a:off x="6370168" y="2286000"/>
+            <a:ext cx="5227168" cy="2468880"/>
+          </a:xfrm>
+          <a:prstGeom prst="rect">
+            <a:avLst/>
+          </a:prstGeom>
+          <a:noFill/>
+          <a:ln/>
+        </p:spPr>
+        <p:txBody>
+          <a:bodyPr wrap="square" lIns="0" tIns="0" rIns="0" bIns="0" rtlCol="0" anchor="t"/>
+          <a:lstStyle/>
+          <a:p>
+            <a:pPr algn="l" marL="342900" indent="-342900">
+              <a:lnSpc>
+                <a:spcPct val="122000"/>
+              </a:lnSpc>
+              <a:spcAft>
+                <a:spcPts val="1000"/>
+              </a:spcAft>
+              <a:buSzPct val="100000"/>
+              <a:buChar char="•"/>
+            </a:pPr>
+            <a:r>
+              <a:rPr lang="en-US" sz="1350" dirty="0">
+                <a:solidFill>
+                  <a:srgbClr val="2F3E47"/>
+                </a:solidFill>
+                <a:latin typeface="Calibri" pitchFamily="34" charset="0"/>
+                <a:ea typeface="Calibri" pitchFamily="34" charset="-122"/>
+                <a:cs typeface="Calibri" pitchFamily="34" charset="-120"/>
+              </a:rPr>
+              <a:t>Les chiffres sont des ordres de grandeur arrondis, tirés des dernières données publiques disponibles.</a:t>
+            </a:r>
+            <a:endParaRPr lang="en-US" sz="1350" dirty="0"/>
+          </a:p>
+          <a:p>
+            <a:pPr algn="l" marL="342900" indent="-342900">
+              <a:lnSpc>
+                <a:spcPct val="122000"/>
+              </a:lnSpc>
+              <a:spcAft>
+                <a:spcPts val="1000"/>
+              </a:spcAft>
+              <a:buSzPct val="100000"/>
+              <a:buChar char="•"/>
+            </a:pPr>
+            <a:r>
+              <a:rPr lang="en-US" sz="1350" dirty="0">
+                <a:solidFill>
+                  <a:srgbClr val="2F3E47"/>
+                </a:solidFill>
+                <a:latin typeface="Calibri" pitchFamily="34" charset="0"/>
+                <a:ea typeface="Calibri" pitchFamily="34" charset="-122"/>
+                <a:cs typeface="Calibri" pitchFamily="34" charset="-120"/>
+              </a:rPr>
+              <a:t>Les gains d'eau et de rendement sont indicatifs et varient selon le sol, le climat et la culture.</a:t>
+            </a:r>
+            <a:endParaRPr lang="en-US" sz="1350" dirty="0"/>
+          </a:p>
+          <a:p>
+            <a:pPr algn="l" marL="342900" indent="-342900">
+              <a:lnSpc>
+                <a:spcPct val="122000"/>
+              </a:lnSpc>
+              <a:spcAft>
+                <a:spcPts val="1000"/>
+              </a:spcAft>
+              <a:buSzPct val="100000"/>
+              <a:buChar char="•"/>
+            </a:pPr>
+            <a:r>
+              <a:rPr lang="en-US" sz="1350" dirty="0">
+                <a:solidFill>
+                  <a:srgbClr val="2F3E47"/>
+                </a:solidFill>
+                <a:latin typeface="Calibri" pitchFamily="34" charset="0"/>
+                <a:ea typeface="Calibri" pitchFamily="34" charset="-122"/>
+                <a:cs typeface="Calibri" pitchFamily="34" charset="-120"/>
+              </a:rPr>
+              <a:t>Document de travail commercial : chiffres à actualiser avant toute soumission officielle.</a:t>
+            </a:r>
+            <a:endParaRPr lang="en-US" sz="1350" dirty="0"/>
+          </a:p>
+        </p:txBody>
+      </p:sp>
+      <p:sp>
+        <p:nvSpPr>
+          <p:cNvPr id="8" name="Shape 6"/>
+          <p:cNvSpPr/>
+          <p:nvPr/>
+        </p:nvSpPr>
+        <p:spPr>
+          <a:xfrm>
+            <a:off x="594360" y="4846320"/>
+            <a:ext cx="11002975" cy="960120"/>
+          </a:xfrm>
+          <a:prstGeom prst="roundRect">
+            <a:avLst>
+              <a:gd name="adj" fmla="val 7619"/>
+            </a:avLst>
+          </a:prstGeom>
+          <a:solidFill>
+            <a:srgbClr val="EEF2F5"/>
+          </a:solidFill>
+          <a:ln w="9525">
+            <a:solidFill>
+              <a:srgbClr val="D8E1E7"/>
+            </a:solidFill>
+            <a:prstDash val="solid"/>
+          </a:ln>
+        </p:spPr>
+      </p:sp>
+      <p:sp>
+        <p:nvSpPr>
+          <p:cNvPr id="9" name="Text 7"/>
+          <p:cNvSpPr txBox="1"/>
+          <p:nvPr/>
+        </p:nvSpPr>
+        <p:spPr>
+          <a:xfrm>
+            <a:off x="822960" y="4983480"/>
+            <a:ext cx="10545775" cy="713232"/>
+          </a:xfrm>
+          <a:prstGeom prst="rect">
+            <a:avLst/>
+          </a:prstGeom>
+          <a:noFill/>
+          <a:ln/>
+        </p:spPr>
+        <p:txBody>
+          <a:bodyPr wrap="square" lIns="0" tIns="0" rIns="0" bIns="0" rtlCol="0" anchor="t"/>
+          <a:lstStyle/>
+          <a:p>
+            <a:pPr algn="l" indent="0" marL="0">
+              <a:lnSpc>
+                <a:spcPct val="118000"/>
+              </a:lnSpc>
+              <a:buNone/>
+            </a:pPr>
+            <a:r>
+              <a:rPr lang="en-US" sz="1100" dirty="0">
+                <a:solidFill>
+                  <a:srgbClr val="6B7D87"/>
+                </a:solidFill>
+                <a:latin typeface="Calibri" pitchFamily="34" charset="0"/>
+                <a:ea typeface="Calibri" pitchFamily="34" charset="-122"/>
+                <a:cs typeface="Calibri" pitchFamily="34" charset="-120"/>
+              </a:rPr>
+              <a:t>Rapports d'essais, certificats (SOHISCERT, analyses Polymex et SGS) et fiches techniques : disponibles sur demande.</a:t>
+            </a:r>
+            <a:endParaRPr lang="en-US" sz="1100" dirty="0"/>
+          </a:p>
+        </p:txBody>
+      </p:sp>
+      <p:sp>
+        <p:nvSpPr>
+          <p:cNvPr id="10" name="Text 8"/>
+          <p:cNvSpPr txBox="1"/>
+          <p:nvPr/>
+        </p:nvSpPr>
+        <p:spPr>
+          <a:xfrm>
+            <a:off x="502920" y="6382512"/>
+            <a:ext cx="8229600" cy="274320"/>
+          </a:xfrm>
+          <a:prstGeom prst="rect">
+            <a:avLst/>
+          </a:prstGeom>
+          <a:noFill/>
+          <a:ln/>
+        </p:spPr>
+        <p:txBody>
+          <a:bodyPr wrap="square" lIns="0" tIns="0" rIns="0" bIns="0" rtlCol="0" anchor="ctr"/>
+          <a:lstStyle/>
+          <a:p>
+            <a:pPr algn="l" indent="0" marL="0">
+              <a:buNone/>
+            </a:pPr>
+            <a:r>
+              <a:rPr lang="en-US" sz="950" dirty="0">
+                <a:solidFill>
+                  <a:srgbClr val="6B7D87">
+                    <a:alpha val="80000"/>
+                  </a:srgbClr>
+                </a:solidFill>
+                <a:latin typeface="Calibri" pitchFamily="34" charset="0"/>
+                <a:ea typeface="Calibri" pitchFamily="34" charset="-122"/>
+                <a:cs typeface="Calibri" pitchFamily="34" charset="-120"/>
+              </a:rPr>
+              <a:t>Green Solutions · Dossier marché Sénégal</a:t>
+            </a:r>
+            <a:endParaRPr lang="en-US" sz="950" dirty="0"/>
+          </a:p>
+        </p:txBody>
+      </p:sp>
+      <p:sp>
+        <p:nvSpPr>
+          <p:cNvPr id="11" name="Text 9"/>
+          <p:cNvSpPr txBox="1"/>
+          <p:nvPr/>
+        </p:nvSpPr>
+        <p:spPr>
+          <a:xfrm>
+            <a:off x="11140135" y="6382512"/>
+            <a:ext cx="548640" cy="274320"/>
+          </a:xfrm>
+          <a:prstGeom prst="rect">
+            <a:avLst/>
+          </a:prstGeom>
+          <a:noFill/>
+          <a:ln/>
+        </p:spPr>
+        <p:txBody>
+          <a:bodyPr wrap="square" lIns="0" tIns="0" rIns="0" bIns="0" rtlCol="0" anchor="ctr"/>
+          <a:lstStyle/>
+          <a:p>
+            <a:pPr algn="r" indent="0" marL="0">
+              <a:buNone/>
+            </a:pPr>
+            <a:r>
+              <a:rPr lang="en-US" sz="950" dirty="0">
+                <a:solidFill>
+                  <a:srgbClr val="6B7D87">
+                    <a:alpha val="80000"/>
+                  </a:srgbClr>
+                </a:solidFill>
+                <a:latin typeface="Calibri" pitchFamily="34" charset="0"/>
+                <a:ea typeface="Calibri" pitchFamily="34" charset="-122"/>
+                <a:cs typeface="Calibri" pitchFamily="34" charset="-120"/>
+              </a:rPr>
+              <a:t>14</a:t>
+            </a:r>
+            <a:endParaRPr lang="en-US" sz="950" dirty="0"/>
+          </a:p>
+        </p:txBody>
+      </p:sp>
+    </p:spTree>
+  </p:cSld>
+  <p:clrMapOvr>
+    <a:masterClrMapping/>
+  </p:clrMapOvr>
+</p:sld>
+</file>
+
+<file path=ppt/slides/slide16.xml><?xml version="1.0" encoding="utf-8"?>
+<p:sld xmlns:a="http://schemas.openxmlformats.org/drawingml/2006/main" xmlns:r="http://schemas.openxmlformats.org/officeDocument/2006/relationships" xmlns:p="http://schemas.openxmlformats.org/presentationml/2006/main">
+  <p:cSld name="Slide 16">
     <p:spTree>
       <p:nvGrpSpPr>
         <p:cNvPr id="1" name=""/>
@@ -6219,7 +7758,7 @@
       </p:sp>
       <p:pic>
         <p:nvPicPr>
-          <p:cNvPr id="6" name="Image 1" descr="C:\Users\Utilisateur\dev\green-solutions-web\scripts\dossiers\sceau-aim-clair.png">    </p:cNvPr>
+          <p:cNvPr id="6" name="Image 1" descr="/workspace/scratch/50eb4f7d8e13/green-solutions-web/scripts/dossiers/sceau-aim-clair.png">    </p:cNvPr>
           <p:cNvPicPr>
             <a:picLocks noChangeAspect="1"/>
           </p:cNvPicPr>
@@ -6319,7 +7858,7 @@
                 <a:ea typeface="Calibri" pitchFamily="34" charset="-122"/>
                 <a:cs typeface="Calibri" pitchFamily="34" charset="-120"/>
               </a:rPr>
-              <a:t>13</a:t>
+              <a:t>15</a:t>
             </a:r>
             <a:endParaRPr lang="en-US" sz="950" dirty="0"/>
           </a:p>
@@ -7414,7 +8953,7 @@
                 <a:ea typeface="Calibri" pitchFamily="34" charset="-122"/>
                 <a:cs typeface="Calibri" pitchFamily="34" charset="-120"/>
               </a:rPr>
-              <a:t>OÙ PART L'EAU</a:t>
+              <a:t>SÉCHERESSE ET STRESS HYDRIQUE</a:t>
             </a:r>
             <a:endParaRPr lang="en-US" sz="1150" dirty="0"/>
           </a:p>
@@ -7453,7 +8992,7 @@
                 <a:ea typeface="Cambria" pitchFamily="34" charset="-122"/>
                 <a:cs typeface="Cambria" pitchFamily="34" charset="-120"/>
               </a:rPr>
-              <a:t>L'irrigation concentre presque tous les prélèvements</a:t>
+              <a:t>La pression augmente, mais le risque se lit localement</a:t>
             </a:r>
             <a:endParaRPr lang="en-US" sz="3000" dirty="0"/>
           </a:p>
@@ -7535,7 +9074,7 @@
                 <a:ea typeface="Cambria" pitchFamily="34" charset="-122"/>
                 <a:cs typeface="Cambria" pitchFamily="34" charset="-120"/>
               </a:rPr>
-              <a:t>Ce que cela implique</a:t>
+              <a:t>Deux indicateurs, pas un raccourci</a:t>
             </a:r>
             <a:endParaRPr lang="en-US" sz="1300" dirty="0"/>
           </a:p>
@@ -7577,7 +9116,7 @@
                 <a:ea typeface="Calibri" pitchFamily="34" charset="-122"/>
                 <a:cs typeface="Calibri" pitchFamily="34" charset="-120"/>
               </a:rPr>
-              <a:t>Les prélèvements agricoles se concentrent dans la vallée du fleuve et les Niayes, là où l'eau est pompée.</a:t>
+              <a:t>À l’échelle mondiale, le nombre et la durée des sécheresses ont augmenté de 29 % depuis 2000 par rapport aux deux décennies précédentes.</a:t>
             </a:r>
             <a:endParaRPr lang="en-US" sz="1200" dirty="0"/>
           </a:p>
@@ -7606,7 +9145,7 @@
                 <a:ea typeface="Calibri" pitchFamily="34" charset="-122"/>
                 <a:cs typeface="Calibri" pitchFamily="34" charset="-120"/>
               </a:rPr>
-              <a:t>C'est donc au champ que se joue l'économie d'eau, et sur les cultures irriguées que l'essai se chiffre le plus vite.</a:t>
+              <a:t>Le stress hydrique mesure autre chose : les prélèvements rapportés aux ressources renouvelables disponibles après les besoins environnementaux. Ce signal mondial n’est donc pas une prévision nationale ; il doit être confronté aux pluies, aux nappes, aux saisons et aux usages locaux.</a:t>
             </a:r>
             <a:endParaRPr lang="en-US" sz="1200" dirty="0"/>
           </a:p>
@@ -7759,7 +9298,7 @@
                 <a:ea typeface="Calibri" pitchFamily="34" charset="-122"/>
                 <a:cs typeface="Calibri" pitchFamily="34" charset="-120"/>
               </a:rPr>
-              <a:t>ÉCONOMIE ET SÉCURITÉ ALIMENTAIRE</a:t>
+              <a:t>OÙ PART L'EAU</a:t>
             </a:r>
             <a:endParaRPr lang="en-US" sz="1150" dirty="0"/>
           </a:p>
@@ -7798,26 +9337,42 @@
                 <a:ea typeface="Cambria" pitchFamily="34" charset="-122"/>
                 <a:cs typeface="Cambria" pitchFamily="34" charset="-120"/>
               </a:rPr>
-              <a:t>La souveraineté alimentaire passe par le riz</a:t>
+              <a:t>L'irrigation concentre presque tous les prélèvements</a:t>
             </a:r>
             <a:endParaRPr lang="en-US" sz="3000" dirty="0"/>
           </a:p>
         </p:txBody>
       </p:sp>
-      <p:sp>
-        <p:nvSpPr>
-          <p:cNvPr id="4" name="Shape 2"/>
+      <p:graphicFrame>
+        <p:nvGraphicFramePr>
+          <p:cNvPr id="4" name="Chart 0" descr=""/>
+          <p:cNvGraphicFramePr/>
+          <p:nvPr/>
+        </p:nvGraphicFramePr>
+        <p:xfrm>
+          <a:off x="594360" y="1783080"/>
+          <a:ext cx="7360920" cy="3977640"/>
+        </p:xfrm>
+        <a:graphic xmlns:a="http://schemas.openxmlformats.org/drawingml/2006/main">
+          <a:graphicData uri="http://schemas.openxmlformats.org/drawingml/2006/chart">
+            <c:chart xmlns:c="http://schemas.openxmlformats.org/drawingml/2006/chart" r:id="rId1"/>
+          </a:graphicData>
+        </a:graphic>
+      </p:graphicFrame>
+      <p:sp>
+        <p:nvSpPr>
+          <p:cNvPr id="5" name="Shape 2"/>
           <p:cNvSpPr/>
           <p:nvPr/>
         </p:nvSpPr>
         <p:spPr>
           <a:xfrm>
-            <a:off x="594360" y="1874520"/>
-            <a:ext cx="2545004" cy="2514600"/>
+            <a:off x="8275320" y="1783080"/>
+            <a:ext cx="3291840" cy="3977640"/>
           </a:xfrm>
           <a:prstGeom prst="roundRect">
             <a:avLst>
-              <a:gd name="adj" fmla="val 3636"/>
+              <a:gd name="adj" fmla="val 2778"/>
             </a:avLst>
           </a:prstGeom>
           <a:solidFill>
@@ -7833,14 +9388,14 @@
       </p:sp>
       <p:sp>
         <p:nvSpPr>
-          <p:cNvPr id="5" name="Text 3"/>
-          <p:cNvSpPr txBox="1"/>
-          <p:nvPr/>
-        </p:nvSpPr>
-        <p:spPr>
-          <a:xfrm>
-            <a:off x="777240" y="2148840"/>
-            <a:ext cx="2179244" cy="960120"/>
+          <p:cNvPr id="6" name="Text 3"/>
+          <p:cNvSpPr txBox="1"/>
+          <p:nvPr/>
+        </p:nvSpPr>
+        <p:spPr>
+          <a:xfrm>
+            <a:off x="8503920" y="2011680"/>
+            <a:ext cx="2834640" cy="457200"/>
           </a:xfrm>
           <a:prstGeom prst="rect">
             <a:avLst/>
@@ -7852,11 +9407,11 @@
           <a:bodyPr wrap="square" lIns="0" tIns="0" rIns="0" bIns="0" rtlCol="0" anchor="ctr"/>
           <a:lstStyle/>
           <a:p>
-            <a:pPr algn="ctr" indent="0" marL="0">
-              <a:buNone/>
-            </a:pPr>
-            <a:r>
-              <a:rPr lang="en-US" sz="3800" b="1" dirty="0">
+            <a:pPr algn="l" indent="0" marL="0">
+              <a:buNone/>
+            </a:pPr>
+            <a:r>
+              <a:rPr lang="en-US" sz="1300" b="1" dirty="0">
                 <a:solidFill>
                   <a:srgbClr val="1D4E6B"/>
                 </a:solidFill>
@@ -7864,388 +9419,22 @@
                 <a:ea typeface="Cambria" pitchFamily="34" charset="-122"/>
                 <a:cs typeface="Cambria" pitchFamily="34" charset="-120"/>
               </a:rPr>
-              <a:t>≈ 18 M</a:t>
-            </a:r>
-            <a:endParaRPr lang="en-US" sz="3800" dirty="0"/>
-          </a:p>
-        </p:txBody>
-      </p:sp>
-      <p:sp>
-        <p:nvSpPr>
-          <p:cNvPr id="6" name="Text 4"/>
-          <p:cNvSpPr txBox="1"/>
-          <p:nvPr/>
-        </p:nvSpPr>
-        <p:spPr>
-          <a:xfrm>
-            <a:off x="795528" y="3154680"/>
-            <a:ext cx="2142668" cy="1051560"/>
-          </a:xfrm>
-          <a:prstGeom prst="rect">
-            <a:avLst/>
-          </a:prstGeom>
-          <a:noFill/>
-          <a:ln/>
-        </p:spPr>
-        <p:txBody>
-          <a:bodyPr wrap="square" lIns="0" tIns="0" rIns="0" bIns="0" rtlCol="0" anchor="t"/>
-          <a:lstStyle/>
-          <a:p>
-            <a:pPr algn="ctr" indent="0" marL="0">
-              <a:lnSpc>
-                <a:spcPct val="118000"/>
-              </a:lnSpc>
-              <a:buNone/>
-            </a:pPr>
-            <a:r>
-              <a:rPr lang="en-US" sz="1250" dirty="0">
-                <a:solidFill>
-                  <a:srgbClr val="2F3E47"/>
-                </a:solidFill>
-                <a:latin typeface="Calibri" pitchFamily="34" charset="0"/>
-                <a:ea typeface="Calibri" pitchFamily="34" charset="-122"/>
-                <a:cs typeface="Calibri" pitchFamily="34" charset="-120"/>
-              </a:rPr>
-              <a:t>d'habitants, dont près de la moitié en ville</a:t>
-            </a:r>
-            <a:endParaRPr lang="en-US" sz="1250" dirty="0"/>
-          </a:p>
-        </p:txBody>
-      </p:sp>
-      <p:sp>
-        <p:nvSpPr>
-          <p:cNvPr id="7" name="Shape 5"/>
-          <p:cNvSpPr/>
-          <p:nvPr/>
-        </p:nvSpPr>
-        <p:spPr>
-          <a:xfrm>
-            <a:off x="3413684" y="1874520"/>
-            <a:ext cx="2545004" cy="2514600"/>
-          </a:xfrm>
-          <a:prstGeom prst="roundRect">
-            <a:avLst>
-              <a:gd name="adj" fmla="val 3636"/>
-            </a:avLst>
-          </a:prstGeom>
-          <a:solidFill>
-            <a:srgbClr val="EEF2F5"/>
-          </a:solidFill>
-          <a:ln w="9525">
-            <a:solidFill>
-              <a:srgbClr val="D8E1E7"/>
-            </a:solidFill>
-            <a:prstDash val="solid"/>
-          </a:ln>
-        </p:spPr>
-      </p:sp>
-      <p:sp>
-        <p:nvSpPr>
-          <p:cNvPr id="8" name="Text 6"/>
-          <p:cNvSpPr txBox="1"/>
-          <p:nvPr/>
-        </p:nvSpPr>
-        <p:spPr>
-          <a:xfrm>
-            <a:off x="3596564" y="2148840"/>
-            <a:ext cx="2179244" cy="960120"/>
-          </a:xfrm>
-          <a:prstGeom prst="rect">
-            <a:avLst/>
-          </a:prstGeom>
-          <a:noFill/>
-          <a:ln/>
-        </p:spPr>
-        <p:txBody>
-          <a:bodyPr wrap="square" lIns="0" tIns="0" rIns="0" bIns="0" rtlCol="0" anchor="ctr"/>
-          <a:lstStyle/>
-          <a:p>
-            <a:pPr algn="ctr" indent="0" marL="0">
-              <a:buNone/>
-            </a:pPr>
-            <a:r>
-              <a:rPr lang="en-US" sz="3800" b="1" dirty="0">
-                <a:solidFill>
-                  <a:srgbClr val="1D4E6B"/>
-                </a:solidFill>
-                <a:latin typeface="Cambria" pitchFamily="34" charset="0"/>
-                <a:ea typeface="Cambria" pitchFamily="34" charset="-122"/>
-                <a:cs typeface="Cambria" pitchFamily="34" charset="-120"/>
-              </a:rPr>
-              <a:t>&gt; 1 M t</a:t>
-            </a:r>
-            <a:endParaRPr lang="en-US" sz="3800" dirty="0"/>
-          </a:p>
-        </p:txBody>
-      </p:sp>
-      <p:sp>
-        <p:nvSpPr>
-          <p:cNvPr id="9" name="Text 7"/>
-          <p:cNvSpPr txBox="1"/>
-          <p:nvPr/>
-        </p:nvSpPr>
-        <p:spPr>
-          <a:xfrm>
-            <a:off x="3614852" y="3154680"/>
-            <a:ext cx="2142668" cy="1051560"/>
-          </a:xfrm>
-          <a:prstGeom prst="rect">
-            <a:avLst/>
-          </a:prstGeom>
-          <a:noFill/>
-          <a:ln/>
-        </p:spPr>
-        <p:txBody>
-          <a:bodyPr wrap="square" lIns="0" tIns="0" rIns="0" bIns="0" rtlCol="0" anchor="t"/>
-          <a:lstStyle/>
-          <a:p>
-            <a:pPr algn="ctr" indent="0" marL="0">
-              <a:lnSpc>
-                <a:spcPct val="118000"/>
-              </a:lnSpc>
-              <a:buNone/>
-            </a:pPr>
-            <a:r>
-              <a:rPr lang="en-US" sz="1250" dirty="0">
-                <a:solidFill>
-                  <a:srgbClr val="2F3E47"/>
-                </a:solidFill>
-                <a:latin typeface="Calibri" pitchFamily="34" charset="0"/>
-                <a:ea typeface="Calibri" pitchFamily="34" charset="-122"/>
-                <a:cs typeface="Calibri" pitchFamily="34" charset="-120"/>
-              </a:rPr>
-              <a:t>de riz importées chaque année</a:t>
-            </a:r>
-            <a:endParaRPr lang="en-US" sz="1250" dirty="0"/>
-          </a:p>
-        </p:txBody>
-      </p:sp>
-      <p:sp>
-        <p:nvSpPr>
-          <p:cNvPr id="10" name="Shape 8"/>
-          <p:cNvSpPr/>
-          <p:nvPr/>
-        </p:nvSpPr>
-        <p:spPr>
-          <a:xfrm>
-            <a:off x="6233008" y="1874520"/>
-            <a:ext cx="2545004" cy="2514600"/>
-          </a:xfrm>
-          <a:prstGeom prst="roundRect">
-            <a:avLst>
-              <a:gd name="adj" fmla="val 3636"/>
-            </a:avLst>
-          </a:prstGeom>
-          <a:solidFill>
-            <a:srgbClr val="EEF2F5"/>
-          </a:solidFill>
-          <a:ln w="9525">
-            <a:solidFill>
-              <a:srgbClr val="D8E1E7"/>
-            </a:solidFill>
-            <a:prstDash val="solid"/>
-          </a:ln>
-        </p:spPr>
-      </p:sp>
-      <p:sp>
-        <p:nvSpPr>
-          <p:cNvPr id="11" name="Text 9"/>
-          <p:cNvSpPr txBox="1"/>
-          <p:nvPr/>
-        </p:nvSpPr>
-        <p:spPr>
-          <a:xfrm>
-            <a:off x="6415888" y="2148840"/>
-            <a:ext cx="2179244" cy="960120"/>
-          </a:xfrm>
-          <a:prstGeom prst="rect">
-            <a:avLst/>
-          </a:prstGeom>
-          <a:noFill/>
-          <a:ln/>
-        </p:spPr>
-        <p:txBody>
-          <a:bodyPr wrap="square" lIns="0" tIns="0" rIns="0" bIns="0" rtlCol="0" anchor="ctr"/>
-          <a:lstStyle/>
-          <a:p>
-            <a:pPr algn="ctr" indent="0" marL="0">
-              <a:buNone/>
-            </a:pPr>
-            <a:r>
-              <a:rPr lang="en-US" sz="3000" b="1" dirty="0">
-                <a:solidFill>
-                  <a:srgbClr val="1D4E6B"/>
-                </a:solidFill>
-                <a:latin typeface="Cambria" pitchFamily="34" charset="0"/>
-                <a:ea typeface="Cambria" pitchFamily="34" charset="-122"/>
-                <a:cs typeface="Cambria" pitchFamily="34" charset="-120"/>
-              </a:rPr>
-              <a:t>≈ 25 000 t</a:t>
-            </a:r>
-            <a:endParaRPr lang="en-US" sz="3000" dirty="0"/>
-          </a:p>
-        </p:txBody>
-      </p:sp>
-      <p:sp>
-        <p:nvSpPr>
-          <p:cNvPr id="12" name="Text 10"/>
-          <p:cNvSpPr txBox="1"/>
-          <p:nvPr/>
-        </p:nvSpPr>
-        <p:spPr>
-          <a:xfrm>
-            <a:off x="6434176" y="3154680"/>
-            <a:ext cx="2142668" cy="1051560"/>
-          </a:xfrm>
-          <a:prstGeom prst="rect">
-            <a:avLst/>
-          </a:prstGeom>
-          <a:noFill/>
-          <a:ln/>
-        </p:spPr>
-        <p:txBody>
-          <a:bodyPr wrap="square" lIns="0" tIns="0" rIns="0" bIns="0" rtlCol="0" anchor="t"/>
-          <a:lstStyle/>
-          <a:p>
-            <a:pPr algn="ctr" indent="0" marL="0">
-              <a:lnSpc>
-                <a:spcPct val="118000"/>
-              </a:lnSpc>
-              <a:buNone/>
-            </a:pPr>
-            <a:r>
-              <a:rPr lang="en-US" sz="1250" dirty="0">
-                <a:solidFill>
-                  <a:srgbClr val="2F3E47"/>
-                </a:solidFill>
-                <a:latin typeface="Calibri" pitchFamily="34" charset="0"/>
-                <a:ea typeface="Calibri" pitchFamily="34" charset="-122"/>
-                <a:cs typeface="Calibri" pitchFamily="34" charset="-120"/>
-              </a:rPr>
-              <a:t>de mangues exportées par an, surtout vers l'Europe</a:t>
-            </a:r>
-            <a:endParaRPr lang="en-US" sz="1250" dirty="0"/>
-          </a:p>
-        </p:txBody>
-      </p:sp>
-      <p:sp>
-        <p:nvSpPr>
-          <p:cNvPr id="13" name="Shape 11"/>
-          <p:cNvSpPr/>
-          <p:nvPr/>
-        </p:nvSpPr>
-        <p:spPr>
-          <a:xfrm>
-            <a:off x="9052331" y="1874520"/>
-            <a:ext cx="2545004" cy="2514600"/>
-          </a:xfrm>
-          <a:prstGeom prst="roundRect">
-            <a:avLst>
-              <a:gd name="adj" fmla="val 3636"/>
-            </a:avLst>
-          </a:prstGeom>
-          <a:solidFill>
-            <a:srgbClr val="EEF2F5"/>
-          </a:solidFill>
-          <a:ln w="9525">
-            <a:solidFill>
-              <a:srgbClr val="D8E1E7"/>
-            </a:solidFill>
-            <a:prstDash val="solid"/>
-          </a:ln>
-        </p:spPr>
-      </p:sp>
-      <p:sp>
-        <p:nvSpPr>
-          <p:cNvPr id="14" name="Text 12"/>
-          <p:cNvSpPr txBox="1"/>
-          <p:nvPr/>
-        </p:nvSpPr>
-        <p:spPr>
-          <a:xfrm>
-            <a:off x="9235211" y="2148840"/>
-            <a:ext cx="2179244" cy="960120"/>
-          </a:xfrm>
-          <a:prstGeom prst="rect">
-            <a:avLst/>
-          </a:prstGeom>
-          <a:noFill/>
-          <a:ln/>
-        </p:spPr>
-        <p:txBody>
-          <a:bodyPr wrap="square" lIns="0" tIns="0" rIns="0" bIns="0" rtlCol="0" anchor="ctr"/>
-          <a:lstStyle/>
-          <a:p>
-            <a:pPr algn="ctr" indent="0" marL="0">
-              <a:buNone/>
-            </a:pPr>
-            <a:r>
-              <a:rPr lang="en-US" sz="3800" b="1" dirty="0">
-                <a:solidFill>
-                  <a:srgbClr val="1D4E6B"/>
-                </a:solidFill>
-                <a:latin typeface="Cambria" pitchFamily="34" charset="0"/>
-                <a:ea typeface="Cambria" pitchFamily="34" charset="-122"/>
-                <a:cs typeface="Cambria" pitchFamily="34" charset="-120"/>
-              </a:rPr>
-              <a:t>2024</a:t>
-            </a:r>
-            <a:endParaRPr lang="en-US" sz="3800" dirty="0"/>
-          </a:p>
-        </p:txBody>
-      </p:sp>
-      <p:sp>
-        <p:nvSpPr>
-          <p:cNvPr id="15" name="Text 13"/>
-          <p:cNvSpPr txBox="1"/>
-          <p:nvPr/>
-        </p:nvSpPr>
-        <p:spPr>
-          <a:xfrm>
-            <a:off x="9253499" y="3154680"/>
-            <a:ext cx="2142668" cy="1051560"/>
-          </a:xfrm>
-          <a:prstGeom prst="rect">
-            <a:avLst/>
-          </a:prstGeom>
-          <a:noFill/>
-          <a:ln/>
-        </p:spPr>
-        <p:txBody>
-          <a:bodyPr wrap="square" lIns="0" tIns="0" rIns="0" bIns="0" rtlCol="0" anchor="t"/>
-          <a:lstStyle/>
-          <a:p>
-            <a:pPr algn="ctr" indent="0" marL="0">
-              <a:lnSpc>
-                <a:spcPct val="118000"/>
-              </a:lnSpc>
-              <a:buNone/>
-            </a:pPr>
-            <a:r>
-              <a:rPr lang="en-US" sz="1250" dirty="0">
-                <a:solidFill>
-                  <a:srgbClr val="2F3E47"/>
-                </a:solidFill>
-                <a:latin typeface="Calibri" pitchFamily="34" charset="0"/>
-                <a:ea typeface="Calibri" pitchFamily="34" charset="-122"/>
-                <a:cs typeface="Calibri" pitchFamily="34" charset="-120"/>
-              </a:rPr>
-              <a:t>début de la production pétrolière, qui rend la diversification urgente</a:t>
-            </a:r>
-            <a:endParaRPr lang="en-US" sz="1250" dirty="0"/>
-          </a:p>
-        </p:txBody>
-      </p:sp>
-      <p:sp>
-        <p:nvSpPr>
-          <p:cNvPr id="16" name="Text 14"/>
-          <p:cNvSpPr txBox="1"/>
-          <p:nvPr/>
-        </p:nvSpPr>
-        <p:spPr>
-          <a:xfrm>
-            <a:off x="594360" y="4709160"/>
-            <a:ext cx="11002975" cy="1097280"/>
+              <a:t>Ce que cela implique</a:t>
+            </a:r>
+            <a:endParaRPr lang="en-US" sz="1300" dirty="0"/>
+          </a:p>
+        </p:txBody>
+      </p:sp>
+      <p:sp>
+        <p:nvSpPr>
+          <p:cNvPr id="7" name="Text 4"/>
+          <p:cNvSpPr txBox="1"/>
+          <p:nvPr/>
+        </p:nvSpPr>
+        <p:spPr>
+          <a:xfrm>
+            <a:off x="8503920" y="2560320"/>
+            <a:ext cx="2834640" cy="3017520"/>
           </a:xfrm>
           <a:prstGeom prst="rect">
             <a:avLst/>
@@ -8259,12 +9448,12 @@
           <a:p>
             <a:pPr algn="l" indent="0" marL="0">
               <a:lnSpc>
-                <a:spcPct val="130000"/>
+                <a:spcPct val="125000"/>
               </a:lnSpc>
               <a:buNone/>
             </a:pPr>
             <a:r>
-              <a:rPr lang="en-US" sz="1350" dirty="0">
+              <a:rPr lang="en-US" sz="1200" dirty="0">
                 <a:solidFill>
                   <a:srgbClr val="2F3E47"/>
                 </a:solidFill>
@@ -8272,15 +9461,44 @@
                 <a:ea typeface="Calibri" pitchFamily="34" charset="-122"/>
                 <a:cs typeface="Calibri" pitchFamily="34" charset="-120"/>
               </a:rPr>
-              <a:t>Le riz est l'aliment de base, et une grande partie en est importée, comme les légumes de contre-saison. Les programmes publics misent sur l'extension du riz irrigué dans la vallée du fleuve et sur la modernisation du maraîchage.</a:t>
-            </a:r>
-            <a:endParaRPr lang="en-US" sz="1350" dirty="0"/>
-          </a:p>
-        </p:txBody>
-      </p:sp>
-      <p:sp>
-        <p:nvSpPr>
-          <p:cNvPr id="17" name="Text 15"/>
+              <a:t>Les prélèvements agricoles se concentrent dans la vallée du fleuve et les Niayes, là où l'eau est pompée.</a:t>
+            </a:r>
+            <a:endParaRPr lang="en-US" sz="1200" dirty="0"/>
+          </a:p>
+          <a:p>
+            <a:pPr algn="l" indent="0" marL="0">
+              <a:lnSpc>
+                <a:spcPct val="125000"/>
+              </a:lnSpc>
+              <a:buNone/>
+            </a:pPr>
+            <a:endParaRPr lang="en-US" sz="1200" dirty="0"/>
+          </a:p>
+          <a:p>
+            <a:pPr algn="l" indent="0" marL="0">
+              <a:lnSpc>
+                <a:spcPct val="125000"/>
+              </a:lnSpc>
+              <a:buNone/>
+            </a:pPr>
+            <a:r>
+              <a:rPr lang="en-US" sz="1200" dirty="0">
+                <a:solidFill>
+                  <a:srgbClr val="2F3E47"/>
+                </a:solidFill>
+                <a:latin typeface="Calibri" pitchFamily="34" charset="0"/>
+                <a:ea typeface="Calibri" pitchFamily="34" charset="-122"/>
+                <a:cs typeface="Calibri" pitchFamily="34" charset="-120"/>
+              </a:rPr>
+              <a:t>C'est donc au champ que se joue l'économie d'eau, et sur les cultures irriguées que l'essai se chiffre le plus vite.</a:t>
+            </a:r>
+            <a:endParaRPr lang="en-US" sz="1200" dirty="0"/>
+          </a:p>
+        </p:txBody>
+      </p:sp>
+      <p:sp>
+        <p:nvSpPr>
+          <p:cNvPr id="8" name="Text 5"/>
           <p:cNvSpPr txBox="1"/>
           <p:nvPr/>
         </p:nvSpPr>
@@ -8321,7 +9539,7 @@
       </p:sp>
       <p:sp>
         <p:nvSpPr>
-          <p:cNvPr id="18" name="Text 16"/>
+          <p:cNvPr id="9" name="Text 6"/>
           <p:cNvSpPr txBox="1"/>
           <p:nvPr/>
         </p:nvSpPr>
@@ -8425,7 +9643,7 @@
                 <a:ea typeface="Calibri" pitchFamily="34" charset="-122"/>
                 <a:cs typeface="Calibri" pitchFamily="34" charset="-120"/>
               </a:rPr>
-              <a:t>LES FILIÈRES</a:t>
+              <a:t>ÉCONOMIE ET SÉCURITÉ ALIMENTAIRE</a:t>
             </a:r>
             <a:endParaRPr lang="en-US" sz="1150" dirty="0"/>
           </a:p>
@@ -8464,42 +9682,26 @@
                 <a:ea typeface="Cambria" pitchFamily="34" charset="-122"/>
                 <a:cs typeface="Cambria" pitchFamily="34" charset="-120"/>
               </a:rPr>
-              <a:t>Cinq productions structurent l'offre nationale</a:t>
+              <a:t>La souveraineté alimentaire passe par le riz</a:t>
             </a:r>
             <a:endParaRPr lang="en-US" sz="3000" dirty="0"/>
           </a:p>
         </p:txBody>
       </p:sp>
-      <p:graphicFrame>
-        <p:nvGraphicFramePr>
-          <p:cNvPr id="4" name="Chart 0" descr=""/>
-          <p:cNvGraphicFramePr/>
-          <p:nvPr/>
-        </p:nvGraphicFramePr>
-        <p:xfrm>
-          <a:off x="594360" y="1783080"/>
-          <a:ext cx="7360920" cy="3977640"/>
-        </p:xfrm>
-        <a:graphic xmlns:a="http://schemas.openxmlformats.org/drawingml/2006/main">
-          <a:graphicData uri="http://schemas.openxmlformats.org/drawingml/2006/chart">
-            <c:chart xmlns:c="http://schemas.openxmlformats.org/drawingml/2006/chart" r:id="rId1"/>
-          </a:graphicData>
-        </a:graphic>
-      </p:graphicFrame>
-      <p:sp>
-        <p:nvSpPr>
-          <p:cNvPr id="5" name="Shape 2"/>
+      <p:sp>
+        <p:nvSpPr>
+          <p:cNvPr id="4" name="Shape 2"/>
           <p:cNvSpPr/>
           <p:nvPr/>
         </p:nvSpPr>
         <p:spPr>
           <a:xfrm>
-            <a:off x="8275320" y="1783080"/>
-            <a:ext cx="3291840" cy="3977640"/>
+            <a:off x="594360" y="1874520"/>
+            <a:ext cx="2545004" cy="2514600"/>
           </a:xfrm>
           <a:prstGeom prst="roundRect">
             <a:avLst>
-              <a:gd name="adj" fmla="val 2778"/>
+              <a:gd name="adj" fmla="val 3636"/>
             </a:avLst>
           </a:prstGeom>
           <a:solidFill>
@@ -8515,14 +9717,14 @@
       </p:sp>
       <p:sp>
         <p:nvSpPr>
-          <p:cNvPr id="6" name="Text 3"/>
-          <p:cNvSpPr txBox="1"/>
-          <p:nvPr/>
-        </p:nvSpPr>
-        <p:spPr>
-          <a:xfrm>
-            <a:off x="8503920" y="2011680"/>
-            <a:ext cx="2834640" cy="457200"/>
+          <p:cNvPr id="5" name="Text 3"/>
+          <p:cNvSpPr txBox="1"/>
+          <p:nvPr/>
+        </p:nvSpPr>
+        <p:spPr>
+          <a:xfrm>
+            <a:off x="777240" y="2148840"/>
+            <a:ext cx="2179244" cy="960120"/>
           </a:xfrm>
           <a:prstGeom prst="rect">
             <a:avLst/>
@@ -8534,11 +9736,11 @@
           <a:bodyPr wrap="square" lIns="0" tIns="0" rIns="0" bIns="0" rtlCol="0" anchor="ctr"/>
           <a:lstStyle/>
           <a:p>
-            <a:pPr algn="l" indent="0" marL="0">
-              <a:buNone/>
-            </a:pPr>
-            <a:r>
-              <a:rPr lang="en-US" sz="1300" b="1" dirty="0">
+            <a:pPr algn="ctr" indent="0" marL="0">
+              <a:buNone/>
+            </a:pPr>
+            <a:r>
+              <a:rPr lang="en-US" sz="3800" b="1" dirty="0">
                 <a:solidFill>
                   <a:srgbClr val="1D4E6B"/>
                 </a:solidFill>
@@ -8546,22 +9748,388 @@
                 <a:ea typeface="Cambria" pitchFamily="34" charset="-122"/>
                 <a:cs typeface="Cambria" pitchFamily="34" charset="-120"/>
               </a:rPr>
-              <a:t>Lecture</a:t>
-            </a:r>
-            <a:endParaRPr lang="en-US" sz="1300" dirty="0"/>
-          </a:p>
-        </p:txBody>
-      </p:sp>
-      <p:sp>
-        <p:nvSpPr>
-          <p:cNvPr id="7" name="Text 4"/>
-          <p:cNvSpPr txBox="1"/>
-          <p:nvPr/>
-        </p:nvSpPr>
-        <p:spPr>
-          <a:xfrm>
-            <a:off x="8503920" y="2560320"/>
-            <a:ext cx="2834640" cy="3017520"/>
+              <a:t>≈ 18 M</a:t>
+            </a:r>
+            <a:endParaRPr lang="en-US" sz="3800" dirty="0"/>
+          </a:p>
+        </p:txBody>
+      </p:sp>
+      <p:sp>
+        <p:nvSpPr>
+          <p:cNvPr id="6" name="Text 4"/>
+          <p:cNvSpPr txBox="1"/>
+          <p:nvPr/>
+        </p:nvSpPr>
+        <p:spPr>
+          <a:xfrm>
+            <a:off x="795528" y="3154680"/>
+            <a:ext cx="2142668" cy="1051560"/>
+          </a:xfrm>
+          <a:prstGeom prst="rect">
+            <a:avLst/>
+          </a:prstGeom>
+          <a:noFill/>
+          <a:ln/>
+        </p:spPr>
+        <p:txBody>
+          <a:bodyPr wrap="square" lIns="0" tIns="0" rIns="0" bIns="0" rtlCol="0" anchor="t"/>
+          <a:lstStyle/>
+          <a:p>
+            <a:pPr algn="ctr" indent="0" marL="0">
+              <a:lnSpc>
+                <a:spcPct val="118000"/>
+              </a:lnSpc>
+              <a:buNone/>
+            </a:pPr>
+            <a:r>
+              <a:rPr lang="en-US" sz="1250" dirty="0">
+                <a:solidFill>
+                  <a:srgbClr val="2F3E47"/>
+                </a:solidFill>
+                <a:latin typeface="Calibri" pitchFamily="34" charset="0"/>
+                <a:ea typeface="Calibri" pitchFamily="34" charset="-122"/>
+                <a:cs typeface="Calibri" pitchFamily="34" charset="-120"/>
+              </a:rPr>
+              <a:t>d'habitants, dont près de la moitié en ville</a:t>
+            </a:r>
+            <a:endParaRPr lang="en-US" sz="1250" dirty="0"/>
+          </a:p>
+        </p:txBody>
+      </p:sp>
+      <p:sp>
+        <p:nvSpPr>
+          <p:cNvPr id="7" name="Shape 5"/>
+          <p:cNvSpPr/>
+          <p:nvPr/>
+        </p:nvSpPr>
+        <p:spPr>
+          <a:xfrm>
+            <a:off x="3413684" y="1874520"/>
+            <a:ext cx="2545004" cy="2514600"/>
+          </a:xfrm>
+          <a:prstGeom prst="roundRect">
+            <a:avLst>
+              <a:gd name="adj" fmla="val 3636"/>
+            </a:avLst>
+          </a:prstGeom>
+          <a:solidFill>
+            <a:srgbClr val="EEF2F5"/>
+          </a:solidFill>
+          <a:ln w="9525">
+            <a:solidFill>
+              <a:srgbClr val="D8E1E7"/>
+            </a:solidFill>
+            <a:prstDash val="solid"/>
+          </a:ln>
+        </p:spPr>
+      </p:sp>
+      <p:sp>
+        <p:nvSpPr>
+          <p:cNvPr id="8" name="Text 6"/>
+          <p:cNvSpPr txBox="1"/>
+          <p:nvPr/>
+        </p:nvSpPr>
+        <p:spPr>
+          <a:xfrm>
+            <a:off x="3596564" y="2148840"/>
+            <a:ext cx="2179244" cy="960120"/>
+          </a:xfrm>
+          <a:prstGeom prst="rect">
+            <a:avLst/>
+          </a:prstGeom>
+          <a:noFill/>
+          <a:ln/>
+        </p:spPr>
+        <p:txBody>
+          <a:bodyPr wrap="square" lIns="0" tIns="0" rIns="0" bIns="0" rtlCol="0" anchor="ctr"/>
+          <a:lstStyle/>
+          <a:p>
+            <a:pPr algn="ctr" indent="0" marL="0">
+              <a:buNone/>
+            </a:pPr>
+            <a:r>
+              <a:rPr lang="en-US" sz="3800" b="1" dirty="0">
+                <a:solidFill>
+                  <a:srgbClr val="1D4E6B"/>
+                </a:solidFill>
+                <a:latin typeface="Cambria" pitchFamily="34" charset="0"/>
+                <a:ea typeface="Cambria" pitchFamily="34" charset="-122"/>
+                <a:cs typeface="Cambria" pitchFamily="34" charset="-120"/>
+              </a:rPr>
+              <a:t>&gt; 1 M t</a:t>
+            </a:r>
+            <a:endParaRPr lang="en-US" sz="3800" dirty="0"/>
+          </a:p>
+        </p:txBody>
+      </p:sp>
+      <p:sp>
+        <p:nvSpPr>
+          <p:cNvPr id="9" name="Text 7"/>
+          <p:cNvSpPr txBox="1"/>
+          <p:nvPr/>
+        </p:nvSpPr>
+        <p:spPr>
+          <a:xfrm>
+            <a:off x="3614852" y="3154680"/>
+            <a:ext cx="2142668" cy="1051560"/>
+          </a:xfrm>
+          <a:prstGeom prst="rect">
+            <a:avLst/>
+          </a:prstGeom>
+          <a:noFill/>
+          <a:ln/>
+        </p:spPr>
+        <p:txBody>
+          <a:bodyPr wrap="square" lIns="0" tIns="0" rIns="0" bIns="0" rtlCol="0" anchor="t"/>
+          <a:lstStyle/>
+          <a:p>
+            <a:pPr algn="ctr" indent="0" marL="0">
+              <a:lnSpc>
+                <a:spcPct val="118000"/>
+              </a:lnSpc>
+              <a:buNone/>
+            </a:pPr>
+            <a:r>
+              <a:rPr lang="en-US" sz="1250" dirty="0">
+                <a:solidFill>
+                  <a:srgbClr val="2F3E47"/>
+                </a:solidFill>
+                <a:latin typeface="Calibri" pitchFamily="34" charset="0"/>
+                <a:ea typeface="Calibri" pitchFamily="34" charset="-122"/>
+                <a:cs typeface="Calibri" pitchFamily="34" charset="-120"/>
+              </a:rPr>
+              <a:t>de riz importées chaque année</a:t>
+            </a:r>
+            <a:endParaRPr lang="en-US" sz="1250" dirty="0"/>
+          </a:p>
+        </p:txBody>
+      </p:sp>
+      <p:sp>
+        <p:nvSpPr>
+          <p:cNvPr id="10" name="Shape 8"/>
+          <p:cNvSpPr/>
+          <p:nvPr/>
+        </p:nvSpPr>
+        <p:spPr>
+          <a:xfrm>
+            <a:off x="6233008" y="1874520"/>
+            <a:ext cx="2545004" cy="2514600"/>
+          </a:xfrm>
+          <a:prstGeom prst="roundRect">
+            <a:avLst>
+              <a:gd name="adj" fmla="val 3636"/>
+            </a:avLst>
+          </a:prstGeom>
+          <a:solidFill>
+            <a:srgbClr val="EEF2F5"/>
+          </a:solidFill>
+          <a:ln w="9525">
+            <a:solidFill>
+              <a:srgbClr val="D8E1E7"/>
+            </a:solidFill>
+            <a:prstDash val="solid"/>
+          </a:ln>
+        </p:spPr>
+      </p:sp>
+      <p:sp>
+        <p:nvSpPr>
+          <p:cNvPr id="11" name="Text 9"/>
+          <p:cNvSpPr txBox="1"/>
+          <p:nvPr/>
+        </p:nvSpPr>
+        <p:spPr>
+          <a:xfrm>
+            <a:off x="6415888" y="2148840"/>
+            <a:ext cx="2179244" cy="960120"/>
+          </a:xfrm>
+          <a:prstGeom prst="rect">
+            <a:avLst/>
+          </a:prstGeom>
+          <a:noFill/>
+          <a:ln/>
+        </p:spPr>
+        <p:txBody>
+          <a:bodyPr wrap="square" lIns="0" tIns="0" rIns="0" bIns="0" rtlCol="0" anchor="ctr"/>
+          <a:lstStyle/>
+          <a:p>
+            <a:pPr algn="ctr" indent="0" marL="0">
+              <a:buNone/>
+            </a:pPr>
+            <a:r>
+              <a:rPr lang="en-US" sz="3000" b="1" dirty="0">
+                <a:solidFill>
+                  <a:srgbClr val="1D4E6B"/>
+                </a:solidFill>
+                <a:latin typeface="Cambria" pitchFamily="34" charset="0"/>
+                <a:ea typeface="Cambria" pitchFamily="34" charset="-122"/>
+                <a:cs typeface="Cambria" pitchFamily="34" charset="-120"/>
+              </a:rPr>
+              <a:t>≈ 25 000 t</a:t>
+            </a:r>
+            <a:endParaRPr lang="en-US" sz="3000" dirty="0"/>
+          </a:p>
+        </p:txBody>
+      </p:sp>
+      <p:sp>
+        <p:nvSpPr>
+          <p:cNvPr id="12" name="Text 10"/>
+          <p:cNvSpPr txBox="1"/>
+          <p:nvPr/>
+        </p:nvSpPr>
+        <p:spPr>
+          <a:xfrm>
+            <a:off x="6434176" y="3154680"/>
+            <a:ext cx="2142668" cy="1051560"/>
+          </a:xfrm>
+          <a:prstGeom prst="rect">
+            <a:avLst/>
+          </a:prstGeom>
+          <a:noFill/>
+          <a:ln/>
+        </p:spPr>
+        <p:txBody>
+          <a:bodyPr wrap="square" lIns="0" tIns="0" rIns="0" bIns="0" rtlCol="0" anchor="t"/>
+          <a:lstStyle/>
+          <a:p>
+            <a:pPr algn="ctr" indent="0" marL="0">
+              <a:lnSpc>
+                <a:spcPct val="118000"/>
+              </a:lnSpc>
+              <a:buNone/>
+            </a:pPr>
+            <a:r>
+              <a:rPr lang="en-US" sz="1250" dirty="0">
+                <a:solidFill>
+                  <a:srgbClr val="2F3E47"/>
+                </a:solidFill>
+                <a:latin typeface="Calibri" pitchFamily="34" charset="0"/>
+                <a:ea typeface="Calibri" pitchFamily="34" charset="-122"/>
+                <a:cs typeface="Calibri" pitchFamily="34" charset="-120"/>
+              </a:rPr>
+              <a:t>de mangues exportées par an, surtout vers l'Europe</a:t>
+            </a:r>
+            <a:endParaRPr lang="en-US" sz="1250" dirty="0"/>
+          </a:p>
+        </p:txBody>
+      </p:sp>
+      <p:sp>
+        <p:nvSpPr>
+          <p:cNvPr id="13" name="Shape 11"/>
+          <p:cNvSpPr/>
+          <p:nvPr/>
+        </p:nvSpPr>
+        <p:spPr>
+          <a:xfrm>
+            <a:off x="9052331" y="1874520"/>
+            <a:ext cx="2545004" cy="2514600"/>
+          </a:xfrm>
+          <a:prstGeom prst="roundRect">
+            <a:avLst>
+              <a:gd name="adj" fmla="val 3636"/>
+            </a:avLst>
+          </a:prstGeom>
+          <a:solidFill>
+            <a:srgbClr val="EEF2F5"/>
+          </a:solidFill>
+          <a:ln w="9525">
+            <a:solidFill>
+              <a:srgbClr val="D8E1E7"/>
+            </a:solidFill>
+            <a:prstDash val="solid"/>
+          </a:ln>
+        </p:spPr>
+      </p:sp>
+      <p:sp>
+        <p:nvSpPr>
+          <p:cNvPr id="14" name="Text 12"/>
+          <p:cNvSpPr txBox="1"/>
+          <p:nvPr/>
+        </p:nvSpPr>
+        <p:spPr>
+          <a:xfrm>
+            <a:off x="9235211" y="2148840"/>
+            <a:ext cx="2179244" cy="960120"/>
+          </a:xfrm>
+          <a:prstGeom prst="rect">
+            <a:avLst/>
+          </a:prstGeom>
+          <a:noFill/>
+          <a:ln/>
+        </p:spPr>
+        <p:txBody>
+          <a:bodyPr wrap="square" lIns="0" tIns="0" rIns="0" bIns="0" rtlCol="0" anchor="ctr"/>
+          <a:lstStyle/>
+          <a:p>
+            <a:pPr algn="ctr" indent="0" marL="0">
+              <a:buNone/>
+            </a:pPr>
+            <a:r>
+              <a:rPr lang="en-US" sz="3800" b="1" dirty="0">
+                <a:solidFill>
+                  <a:srgbClr val="1D4E6B"/>
+                </a:solidFill>
+                <a:latin typeface="Cambria" pitchFamily="34" charset="0"/>
+                <a:ea typeface="Cambria" pitchFamily="34" charset="-122"/>
+                <a:cs typeface="Cambria" pitchFamily="34" charset="-120"/>
+              </a:rPr>
+              <a:t>2024</a:t>
+            </a:r>
+            <a:endParaRPr lang="en-US" sz="3800" dirty="0"/>
+          </a:p>
+        </p:txBody>
+      </p:sp>
+      <p:sp>
+        <p:nvSpPr>
+          <p:cNvPr id="15" name="Text 13"/>
+          <p:cNvSpPr txBox="1"/>
+          <p:nvPr/>
+        </p:nvSpPr>
+        <p:spPr>
+          <a:xfrm>
+            <a:off x="9253499" y="3154680"/>
+            <a:ext cx="2142668" cy="1051560"/>
+          </a:xfrm>
+          <a:prstGeom prst="rect">
+            <a:avLst/>
+          </a:prstGeom>
+          <a:noFill/>
+          <a:ln/>
+        </p:spPr>
+        <p:txBody>
+          <a:bodyPr wrap="square" lIns="0" tIns="0" rIns="0" bIns="0" rtlCol="0" anchor="t"/>
+          <a:lstStyle/>
+          <a:p>
+            <a:pPr algn="ctr" indent="0" marL="0">
+              <a:lnSpc>
+                <a:spcPct val="118000"/>
+              </a:lnSpc>
+              <a:buNone/>
+            </a:pPr>
+            <a:r>
+              <a:rPr lang="en-US" sz="1250" dirty="0">
+                <a:solidFill>
+                  <a:srgbClr val="2F3E47"/>
+                </a:solidFill>
+                <a:latin typeface="Calibri" pitchFamily="34" charset="0"/>
+                <a:ea typeface="Calibri" pitchFamily="34" charset="-122"/>
+                <a:cs typeface="Calibri" pitchFamily="34" charset="-120"/>
+              </a:rPr>
+              <a:t>début de la production pétrolière, qui rend la diversification urgente</a:t>
+            </a:r>
+            <a:endParaRPr lang="en-US" sz="1250" dirty="0"/>
+          </a:p>
+        </p:txBody>
+      </p:sp>
+      <p:sp>
+        <p:nvSpPr>
+          <p:cNvPr id="16" name="Text 14"/>
+          <p:cNvSpPr txBox="1"/>
+          <p:nvPr/>
+        </p:nvSpPr>
+        <p:spPr>
+          <a:xfrm>
+            <a:off x="594360" y="4709160"/>
+            <a:ext cx="11002975" cy="1097280"/>
           </a:xfrm>
           <a:prstGeom prst="rect">
             <a:avLst/>
@@ -8575,12 +10143,12 @@
           <a:p>
             <a:pPr algn="l" indent="0" marL="0">
               <a:lnSpc>
-                <a:spcPct val="125000"/>
+                <a:spcPct val="130000"/>
               </a:lnSpc>
               <a:buNone/>
             </a:pPr>
             <a:r>
-              <a:rPr lang="en-US" sz="1200" dirty="0">
+              <a:rPr lang="en-US" sz="1350" dirty="0">
                 <a:solidFill>
                   <a:srgbClr val="2F3E47"/>
                 </a:solidFill>
@@ -8588,44 +10156,15 @@
                 <a:ea typeface="Calibri" pitchFamily="34" charset="-122"/>
                 <a:cs typeface="Calibri" pitchFamily="34" charset="-120"/>
               </a:rPr>
-              <a:t>Arachide et mil occupent l'essentiel des surfaces pluviales du bassin arachidier.</a:t>
-            </a:r>
-            <a:endParaRPr lang="en-US" sz="1200" dirty="0"/>
-          </a:p>
-          <a:p>
-            <a:pPr algn="l" indent="0" marL="0">
-              <a:lnSpc>
-                <a:spcPct val="125000"/>
-              </a:lnSpc>
-              <a:buNone/>
-            </a:pPr>
-            <a:endParaRPr lang="en-US" sz="1200" dirty="0"/>
-          </a:p>
-          <a:p>
-            <a:pPr algn="l" indent="0" marL="0">
-              <a:lnSpc>
-                <a:spcPct val="125000"/>
-              </a:lnSpc>
-              <a:buNone/>
-            </a:pPr>
-            <a:r>
-              <a:rPr lang="en-US" sz="1200" dirty="0">
-                <a:solidFill>
-                  <a:srgbClr val="2F3E47"/>
-                </a:solidFill>
-                <a:latin typeface="Calibri" pitchFamily="34" charset="0"/>
-                <a:ea typeface="Calibri" pitchFamily="34" charset="-122"/>
-                <a:cs typeface="Calibri" pitchFamily="34" charset="-120"/>
-              </a:rPr>
-              <a:t>Riz irrigué et oignon, cultivés sous pompage, sont les filières où l'eau économisée se voit directement dans la marge. Volumes arrondis, variables selon l'hivernage.</a:t>
-            </a:r>
-            <a:endParaRPr lang="en-US" sz="1200" dirty="0"/>
-          </a:p>
-        </p:txBody>
-      </p:sp>
-      <p:sp>
-        <p:nvSpPr>
-          <p:cNvPr id="8" name="Text 5"/>
+              <a:t>Le riz est l'aliment de base, et une grande partie en est importée, comme les légumes de contre-saison. Les programmes publics misent sur l'extension du riz irrigué dans la vallée du fleuve et sur la modernisation du maraîchage.</a:t>
+            </a:r>
+            <a:endParaRPr lang="en-US" sz="1350" dirty="0"/>
+          </a:p>
+        </p:txBody>
+      </p:sp>
+      <p:sp>
+        <p:nvSpPr>
+          <p:cNvPr id="17" name="Text 15"/>
           <p:cNvSpPr txBox="1"/>
           <p:nvPr/>
         </p:nvSpPr>
@@ -8666,7 +10205,7 @@
       </p:sp>
       <p:sp>
         <p:nvSpPr>
-          <p:cNvPr id="9" name="Text 6"/>
+          <p:cNvPr id="18" name="Text 16"/>
           <p:cNvSpPr txBox="1"/>
           <p:nvPr/>
         </p:nvSpPr>
@@ -8770,7 +10309,7 @@
                 <a:ea typeface="Calibri" pitchFamily="34" charset="-122"/>
                 <a:cs typeface="Calibri" pitchFamily="34" charset="-120"/>
               </a:rPr>
-              <a:t>FILIÈRE PHARE</a:t>
+              <a:t>LES FILIÈRES</a:t>
             </a:r>
             <a:endParaRPr lang="en-US" sz="1150" dirty="0"/>
           </a:p>
@@ -8809,46 +10348,104 @@
                 <a:ea typeface="Cambria" pitchFamily="34" charset="-122"/>
                 <a:cs typeface="Cambria" pitchFamily="34" charset="-120"/>
               </a:rPr>
-              <a:t>Vallée du fleuve : produire plus avec la même eau</a:t>
+              <a:t>Cinq productions structurent l'offre nationale</a:t>
             </a:r>
             <a:endParaRPr lang="en-US" sz="3000" dirty="0"/>
           </a:p>
         </p:txBody>
       </p:sp>
-      <p:pic>
-        <p:nvPicPr>
-          <p:cNvPr id="4" name="Image 0" descr="preencoded.png">    </p:cNvPr>
-          <p:cNvPicPr>
-            <a:picLocks noChangeAspect="1"/>
-          </p:cNvPicPr>
-          <p:nvPr/>
-        </p:nvPicPr>
-        <p:blipFill>
-          <a:blip r:embed="rId1"/>
-          <a:stretch>
-            <a:fillRect/>
-          </a:stretch>
-        </p:blipFill>
-        <p:spPr>
-          <a:xfrm>
-            <a:off x="6522415" y="1783080"/>
-            <a:ext cx="5074920" cy="3794760"/>
-          </a:xfrm>
-          <a:prstGeom prst="rect">
-            <a:avLst/>
-          </a:prstGeom>
-        </p:spPr>
-      </p:pic>
-      <p:sp>
-        <p:nvSpPr>
-          <p:cNvPr id="5" name="Text 2"/>
-          <p:cNvSpPr txBox="1"/>
-          <p:nvPr/>
-        </p:nvSpPr>
-        <p:spPr>
-          <a:xfrm>
-            <a:off x="594360" y="1783080"/>
-            <a:ext cx="5379415" cy="4251960"/>
+      <p:graphicFrame>
+        <p:nvGraphicFramePr>
+          <p:cNvPr id="4" name="Chart 0" descr=""/>
+          <p:cNvGraphicFramePr/>
+          <p:nvPr/>
+        </p:nvGraphicFramePr>
+        <p:xfrm>
+          <a:off x="594360" y="1783080"/>
+          <a:ext cx="7360920" cy="3977640"/>
+        </p:xfrm>
+        <a:graphic xmlns:a="http://schemas.openxmlformats.org/drawingml/2006/main">
+          <a:graphicData uri="http://schemas.openxmlformats.org/drawingml/2006/chart">
+            <c:chart xmlns:c="http://schemas.openxmlformats.org/drawingml/2006/chart" r:id="rId1"/>
+          </a:graphicData>
+        </a:graphic>
+      </p:graphicFrame>
+      <p:sp>
+        <p:nvSpPr>
+          <p:cNvPr id="5" name="Shape 2"/>
+          <p:cNvSpPr/>
+          <p:nvPr/>
+        </p:nvSpPr>
+        <p:spPr>
+          <a:xfrm>
+            <a:off x="8275320" y="1783080"/>
+            <a:ext cx="3291840" cy="3977640"/>
+          </a:xfrm>
+          <a:prstGeom prst="roundRect">
+            <a:avLst>
+              <a:gd name="adj" fmla="val 2778"/>
+            </a:avLst>
+          </a:prstGeom>
+          <a:solidFill>
+            <a:srgbClr val="EEF2F5"/>
+          </a:solidFill>
+          <a:ln w="9525">
+            <a:solidFill>
+              <a:srgbClr val="D8E1E7"/>
+            </a:solidFill>
+            <a:prstDash val="solid"/>
+          </a:ln>
+        </p:spPr>
+      </p:sp>
+      <p:sp>
+        <p:nvSpPr>
+          <p:cNvPr id="6" name="Text 3"/>
+          <p:cNvSpPr txBox="1"/>
+          <p:nvPr/>
+        </p:nvSpPr>
+        <p:spPr>
+          <a:xfrm>
+            <a:off x="8503920" y="2011680"/>
+            <a:ext cx="2834640" cy="457200"/>
+          </a:xfrm>
+          <a:prstGeom prst="rect">
+            <a:avLst/>
+          </a:prstGeom>
+          <a:noFill/>
+          <a:ln/>
+        </p:spPr>
+        <p:txBody>
+          <a:bodyPr wrap="square" lIns="0" tIns="0" rIns="0" bIns="0" rtlCol="0" anchor="ctr"/>
+          <a:lstStyle/>
+          <a:p>
+            <a:pPr algn="l" indent="0" marL="0">
+              <a:buNone/>
+            </a:pPr>
+            <a:r>
+              <a:rPr lang="en-US" sz="1300" b="1" dirty="0">
+                <a:solidFill>
+                  <a:srgbClr val="1D4E6B"/>
+                </a:solidFill>
+                <a:latin typeface="Cambria" pitchFamily="34" charset="0"/>
+                <a:ea typeface="Cambria" pitchFamily="34" charset="-122"/>
+                <a:cs typeface="Cambria" pitchFamily="34" charset="-120"/>
+              </a:rPr>
+              <a:t>Lecture</a:t>
+            </a:r>
+            <a:endParaRPr lang="en-US" sz="1300" dirty="0"/>
+          </a:p>
+        </p:txBody>
+      </p:sp>
+      <p:sp>
+        <p:nvSpPr>
+          <p:cNvPr id="7" name="Text 4"/>
+          <p:cNvSpPr txBox="1"/>
+          <p:nvPr/>
+        </p:nvSpPr>
+        <p:spPr>
+          <a:xfrm>
+            <a:off x="8503920" y="2560320"/>
+            <a:ext cx="2834640" cy="3017520"/>
           </a:xfrm>
           <a:prstGeom prst="rect">
             <a:avLst/>
@@ -8860,18 +10457,14 @@
           <a:bodyPr wrap="square" lIns="0" tIns="0" rIns="0" bIns="0" rtlCol="0" anchor="t"/>
           <a:lstStyle/>
           <a:p>
-            <a:pPr algn="l" marL="342900" indent="-342900">
+            <a:pPr algn="l" indent="0" marL="0">
               <a:lnSpc>
-                <a:spcPct val="122000"/>
+                <a:spcPct val="125000"/>
               </a:lnSpc>
-              <a:spcAft>
-                <a:spcPts val="1100"/>
-              </a:spcAft>
-              <a:buSzPct val="100000"/>
-              <a:buChar char="•"/>
-            </a:pPr>
-            <a:r>
-              <a:rPr lang="en-US" sz="1400" dirty="0">
+              <a:buNone/>
+            </a:pPr>
+            <a:r>
+              <a:rPr lang="en-US" sz="1200" dirty="0">
                 <a:solidFill>
                   <a:srgbClr val="2F3E47"/>
                 </a:solidFill>
@@ -8879,23 +10472,28 @@
                 <a:ea typeface="Calibri" pitchFamily="34" charset="-122"/>
                 <a:cs typeface="Calibri" pitchFamily="34" charset="-120"/>
               </a:rPr>
-              <a:t>Les périmètres irrigués de la vallée du fleuve Sénégal portent l'essentiel de la politique d'autosuffisance en riz.</a:t>
-            </a:r>
-            <a:endParaRPr lang="en-US" sz="1400" dirty="0"/>
-          </a:p>
-          <a:p>
-            <a:pPr algn="l" marL="342900" indent="-342900">
+              <a:t>Arachide et mil occupent l'essentiel des surfaces pluviales du bassin arachidier.</a:t>
+            </a:r>
+            <a:endParaRPr lang="en-US" sz="1200" dirty="0"/>
+          </a:p>
+          <a:p>
+            <a:pPr algn="l" indent="0" marL="0">
               <a:lnSpc>
-                <a:spcPct val="122000"/>
+                <a:spcPct val="125000"/>
               </a:lnSpc>
-              <a:spcAft>
-                <a:spcPts val="1100"/>
-              </a:spcAft>
-              <a:buSzPct val="100000"/>
-              <a:buChar char="•"/>
-            </a:pPr>
-            <a:r>
-              <a:rPr lang="en-US" sz="1400" dirty="0">
+              <a:buNone/>
+            </a:pPr>
+            <a:endParaRPr lang="en-US" sz="1200" dirty="0"/>
+          </a:p>
+          <a:p>
+            <a:pPr algn="l" indent="0" marL="0">
+              <a:lnSpc>
+                <a:spcPct val="125000"/>
+              </a:lnSpc>
+              <a:buNone/>
+            </a:pPr>
+            <a:r>
+              <a:rPr lang="en-US" sz="1200" dirty="0">
                 <a:solidFill>
                   <a:srgbClr val="2F3E47"/>
                 </a:solidFill>
@@ -8903,87 +10501,15 @@
                 <a:ea typeface="Calibri" pitchFamily="34" charset="-122"/>
                 <a:cs typeface="Calibri" pitchFamily="34" charset="-120"/>
               </a:rPr>
-              <a:t>Les rendements varient fortement d'un aménagement à l'autre, selon la maîtrise de l'eau et le calendrier cultural.</a:t>
-            </a:r>
-            <a:endParaRPr lang="en-US" sz="1400" dirty="0"/>
-          </a:p>
-          <a:p>
-            <a:pPr algn="l" marL="342900" indent="-342900">
-              <a:lnSpc>
-                <a:spcPct val="122000"/>
-              </a:lnSpc>
-              <a:spcAft>
-                <a:spcPts val="1100"/>
-              </a:spcAft>
-              <a:buSzPct val="100000"/>
-              <a:buChar char="•"/>
-            </a:pPr>
-            <a:r>
-              <a:rPr lang="en-US" sz="1400" dirty="0">
-                <a:solidFill>
-                  <a:srgbClr val="2F3E47"/>
-                </a:solidFill>
-                <a:latin typeface="Calibri" pitchFamily="34" charset="0"/>
-                <a:ea typeface="Calibri" pitchFamily="34" charset="-122"/>
-                <a:cs typeface="Calibri" pitchFamily="34" charset="-120"/>
-              </a:rPr>
-              <a:t>Le pompage pèse lourd dans le coût de production, et les parcelles sableuses en bordure perdent beaucoup d'eau.</a:t>
-            </a:r>
-            <a:endParaRPr lang="en-US" sz="1400" dirty="0"/>
-          </a:p>
-          <a:p>
-            <a:pPr algn="l" marL="342900" indent="-342900">
-              <a:lnSpc>
-                <a:spcPct val="122000"/>
-              </a:lnSpc>
-              <a:spcAft>
-                <a:spcPts val="1100"/>
-              </a:spcAft>
-              <a:buSzPct val="100000"/>
-              <a:buChar char="•"/>
-            </a:pPr>
-            <a:r>
-              <a:rPr lang="en-US" sz="1400" dirty="0">
-                <a:solidFill>
-                  <a:srgbClr val="2F3E47"/>
-                </a:solidFill>
-                <a:latin typeface="Calibri" pitchFamily="34" charset="0"/>
-                <a:ea typeface="Calibri" pitchFamily="34" charset="-122"/>
-                <a:cs typeface="Calibri" pitchFamily="34" charset="-120"/>
-              </a:rPr>
-              <a:t>Oignon, tomate et patate douce en contre-saison diversifient les revenus sur les mêmes périmètres.</a:t>
-            </a:r>
-            <a:endParaRPr lang="en-US" sz="1400" dirty="0"/>
-          </a:p>
-          <a:p>
-            <a:pPr algn="l" marL="342900" indent="-342900">
-              <a:lnSpc>
-                <a:spcPct val="122000"/>
-              </a:lnSpc>
-              <a:spcAft>
-                <a:spcPts val="1100"/>
-              </a:spcAft>
-              <a:buSzPct val="100000"/>
-              <a:buChar char="•"/>
-            </a:pPr>
-            <a:r>
-              <a:rPr lang="en-US" sz="1400" dirty="0">
-                <a:solidFill>
-                  <a:srgbClr val="2F3E47"/>
-                </a:solidFill>
-                <a:latin typeface="Calibri" pitchFamily="34" charset="0"/>
-                <a:ea typeface="Calibri" pitchFamily="34" charset="-122"/>
-                <a:cs typeface="Calibri" pitchFamily="34" charset="-120"/>
-              </a:rPr>
-              <a:t>Sur ces cultures de diversification, EVERGREEN® se teste en une saison ; le riz en submersion n'est pas sa cible.</a:t>
-            </a:r>
-            <a:endParaRPr lang="en-US" sz="1400" dirty="0"/>
-          </a:p>
-        </p:txBody>
-      </p:sp>
-      <p:sp>
-        <p:nvSpPr>
-          <p:cNvPr id="6" name="Text 3"/>
+              <a:t>Riz irrigué et oignon, cultivés sous pompage, sont les filières où l'eau économisée se voit directement dans la marge. Volumes arrondis, variables selon l'hivernage.</a:t>
+            </a:r>
+            <a:endParaRPr lang="en-US" sz="1200" dirty="0"/>
+          </a:p>
+        </p:txBody>
+      </p:sp>
+      <p:sp>
+        <p:nvSpPr>
+          <p:cNvPr id="8" name="Text 5"/>
           <p:cNvSpPr txBox="1"/>
           <p:nvPr/>
         </p:nvSpPr>
@@ -9024,7 +10550,7 @@
       </p:sp>
       <p:sp>
         <p:nvSpPr>
-          <p:cNvPr id="7" name="Text 4"/>
+          <p:cNvPr id="9" name="Text 6"/>
           <p:cNvSpPr txBox="1"/>
           <p:nvPr/>
         </p:nvSpPr>
@@ -9128,7 +10654,7 @@
                 <a:ea typeface="Calibri" pitchFamily="34" charset="-122"/>
                 <a:cs typeface="Calibri" pitchFamily="34" charset="-120"/>
               </a:rPr>
-              <a:t>NOTRE RÉPONSE</a:t>
+              <a:t>FILIÈRE PHARE</a:t>
             </a:r>
             <a:endParaRPr lang="en-US" sz="1150" dirty="0"/>
           </a:p>
@@ -9167,61 +10693,46 @@
                 <a:ea typeface="Cambria" pitchFamily="34" charset="-122"/>
                 <a:cs typeface="Cambria" pitchFamily="34" charset="-120"/>
               </a:rPr>
-              <a:t>Retenir l'eau, nourrir sans épuiser</a:t>
+              <a:t>Vallée du fleuve : produire plus avec la même eau</a:t>
             </a:r>
             <a:endParaRPr lang="en-US" sz="3000" dirty="0"/>
           </a:p>
         </p:txBody>
       </p:sp>
-      <p:sp>
-        <p:nvSpPr>
-          <p:cNvPr id="4" name="Text 2"/>
+      <p:pic>
+        <p:nvPicPr>
+          <p:cNvPr id="4" name="Image 0" descr="preencoded.png">    </p:cNvPr>
+          <p:cNvPicPr>
+            <a:picLocks noChangeAspect="1"/>
+          </p:cNvPicPr>
+          <p:nvPr/>
+        </p:nvPicPr>
+        <p:blipFill>
+          <a:blip r:embed="rId1"/>
+          <a:stretch>
+            <a:fillRect/>
+          </a:stretch>
+        </p:blipFill>
+        <p:spPr>
+          <a:xfrm>
+            <a:off x="6522415" y="1783080"/>
+            <a:ext cx="5074920" cy="3794760"/>
+          </a:xfrm>
+          <a:prstGeom prst="rect">
+            <a:avLst/>
+          </a:prstGeom>
+        </p:spPr>
+      </p:pic>
+      <p:sp>
+        <p:nvSpPr>
+          <p:cNvPr id="5" name="Text 2"/>
           <p:cNvSpPr txBox="1"/>
           <p:nvPr/>
         </p:nvSpPr>
         <p:spPr>
           <a:xfrm>
             <a:off x="594360" y="1783080"/>
-            <a:ext cx="5227168" cy="411480"/>
-          </a:xfrm>
-          <a:prstGeom prst="rect">
-            <a:avLst/>
-          </a:prstGeom>
-          <a:noFill/>
-          <a:ln/>
-        </p:spPr>
-        <p:txBody>
-          <a:bodyPr wrap="square" lIns="0" tIns="0" rIns="0" bIns="0" rtlCol="0" anchor="ctr"/>
-          <a:lstStyle/>
-          <a:p>
-            <a:pPr algn="l" indent="0" marL="0">
-              <a:buNone/>
-            </a:pPr>
-            <a:r>
-              <a:rPr lang="en-US" sz="1600" b="1" dirty="0">
-                <a:solidFill>
-                  <a:srgbClr val="1D4E6B"/>
-                </a:solidFill>
-                <a:latin typeface="Cambria" pitchFamily="34" charset="0"/>
-                <a:ea typeface="Cambria" pitchFamily="34" charset="-122"/>
-                <a:cs typeface="Cambria" pitchFamily="34" charset="-120"/>
-              </a:rPr>
-              <a:t>EVERGREEN® — retenir l'eau</a:t>
-            </a:r>
-            <a:endParaRPr lang="en-US" sz="1600" dirty="0"/>
-          </a:p>
-        </p:txBody>
-      </p:sp>
-      <p:sp>
-        <p:nvSpPr>
-          <p:cNvPr id="5" name="Text 3"/>
-          <p:cNvSpPr txBox="1"/>
-          <p:nvPr/>
-        </p:nvSpPr>
-        <p:spPr>
-          <a:xfrm>
-            <a:off x="594360" y="2286000"/>
-            <a:ext cx="5227168" cy="2468880"/>
+            <a:ext cx="5379415" cy="4251960"/>
           </a:xfrm>
           <a:prstGeom prst="rect">
             <a:avLst/>
@@ -9238,13 +10749,13 @@
                 <a:spcPct val="122000"/>
               </a:lnSpc>
               <a:spcAft>
-                <a:spcPts val="1000"/>
+                <a:spcPts val="1100"/>
               </a:spcAft>
               <a:buSzPct val="100000"/>
               <a:buChar char="•"/>
             </a:pPr>
             <a:r>
-              <a:rPr lang="en-US" sz="1350" dirty="0">
+              <a:rPr lang="en-US" sz="1400" dirty="0">
                 <a:solidFill>
                   <a:srgbClr val="2F3E47"/>
                 </a:solidFill>
@@ -9252,9 +10763,9 @@
                 <a:ea typeface="Calibri" pitchFamily="34" charset="-122"/>
                 <a:cs typeface="Calibri" pitchFamily="34" charset="-120"/>
               </a:rPr>
-              <a:t>Hydro-rétenteur à base de potassium, placé dans la zone racinaire au semis, à la plantation ou à la reprise.</a:t>
-            </a:r>
-            <a:endParaRPr lang="en-US" sz="1350" dirty="0"/>
+              <a:t>Les périmètres irrigués de la vallée du fleuve Sénégal portent l'essentiel de la politique d'autosuffisance en riz.</a:t>
+            </a:r>
+            <a:endParaRPr lang="en-US" sz="1400" dirty="0"/>
           </a:p>
           <a:p>
             <a:pPr algn="l" marL="342900" indent="-342900">
@@ -9262,13 +10773,13 @@
                 <a:spcPct val="122000"/>
               </a:lnSpc>
               <a:spcAft>
-                <a:spcPts val="1000"/>
+                <a:spcPts val="1100"/>
               </a:spcAft>
               <a:buSzPct val="100000"/>
               <a:buChar char="•"/>
             </a:pPr>
             <a:r>
-              <a:rPr lang="en-US" sz="1350" dirty="0">
+              <a:rPr lang="en-US" sz="1400" dirty="0">
                 <a:solidFill>
                   <a:srgbClr val="2F3E47"/>
                 </a:solidFill>
@@ -9276,9 +10787,9 @@
                 <a:ea typeface="Calibri" pitchFamily="34" charset="-122"/>
                 <a:cs typeface="Calibri" pitchFamily="34" charset="-120"/>
               </a:rPr>
-              <a:t>Capte l'eau de pluie ou d'irrigation et la restitue progressivement, ce qui amortit une pause de pluie en début d'hivernage.</a:t>
-            </a:r>
-            <a:endParaRPr lang="en-US" sz="1350" dirty="0"/>
+              <a:t>Les rendements varient fortement d'un aménagement à l'autre, selon la maîtrise de l'eau et le calendrier cultural.</a:t>
+            </a:r>
+            <a:endParaRPr lang="en-US" sz="1400" dirty="0"/>
           </a:p>
           <a:p>
             <a:pPr algn="l" marL="342900" indent="-342900">
@@ -9286,13 +10797,13 @@
                 <a:spcPct val="122000"/>
               </a:lnSpc>
               <a:spcAft>
-                <a:spcPts val="1000"/>
+                <a:spcPts val="1100"/>
               </a:spcAft>
               <a:buSzPct val="100000"/>
               <a:buChar char="•"/>
             </a:pPr>
             <a:r>
-              <a:rPr lang="en-US" sz="1350" dirty="0">
+              <a:rPr lang="en-US" sz="1400" dirty="0">
                 <a:solidFill>
                   <a:srgbClr val="2F3E47"/>
                 </a:solidFill>
@@ -9300,9 +10811,9 @@
                 <a:ea typeface="Calibri" pitchFamily="34" charset="-122"/>
                 <a:cs typeface="Calibri" pitchFamily="34" charset="-120"/>
               </a:rPr>
-              <a:t>Capacité d'absorption de l'ordre de 300 fois son poids ; durée d'effet utile de 3 à 4 ans dans le sol.</a:t>
-            </a:r>
-            <a:endParaRPr lang="en-US" sz="1350" dirty="0"/>
+              <a:t>Le pompage pèse lourd dans le coût de production, et les parcelles sableuses en bordure perdent beaucoup d'eau.</a:t>
+            </a:r>
+            <a:endParaRPr lang="en-US" sz="1400" dirty="0"/>
           </a:p>
           <a:p>
             <a:pPr algn="l" marL="342900" indent="-342900">
@@ -9310,13 +10821,13 @@
                 <a:spcPct val="122000"/>
               </a:lnSpc>
               <a:spcAft>
-                <a:spcPts val="1000"/>
+                <a:spcPts val="1100"/>
               </a:spcAft>
               <a:buSzPct val="100000"/>
               <a:buChar char="•"/>
             </a:pPr>
             <a:r>
-              <a:rPr lang="en-US" sz="1350" dirty="0">
+              <a:rPr lang="en-US" sz="1400" dirty="0">
                 <a:solidFill>
                   <a:srgbClr val="2F3E47"/>
                 </a:solidFill>
@@ -9324,84 +10835,23 @@
                 <a:ea typeface="Calibri" pitchFamily="34" charset="-122"/>
                 <a:cs typeface="Calibri" pitchFamily="34" charset="-120"/>
               </a:rPr>
-              <a:t>Se dégrade de 20 à 25 % par an, sans accumulation ni risque de surdosage.</a:t>
-            </a:r>
-            <a:endParaRPr lang="en-US" sz="1350" dirty="0"/>
-          </a:p>
-        </p:txBody>
-      </p:sp>
-      <p:sp>
-        <p:nvSpPr>
-          <p:cNvPr id="6" name="Text 4"/>
-          <p:cNvSpPr txBox="1"/>
-          <p:nvPr/>
-        </p:nvSpPr>
-        <p:spPr>
-          <a:xfrm>
-            <a:off x="6370168" y="1783080"/>
-            <a:ext cx="5227168" cy="411480"/>
-          </a:xfrm>
-          <a:prstGeom prst="rect">
-            <a:avLst/>
-          </a:prstGeom>
-          <a:noFill/>
-          <a:ln/>
-        </p:spPr>
-        <p:txBody>
-          <a:bodyPr wrap="square" lIns="0" tIns="0" rIns="0" bIns="0" rtlCol="0" anchor="ctr"/>
-          <a:lstStyle/>
-          <a:p>
-            <a:pPr algn="l" indent="0" marL="0">
-              <a:buNone/>
-            </a:pPr>
-            <a:r>
-              <a:rPr lang="en-US" sz="1600" b="1" dirty="0">
-                <a:solidFill>
-                  <a:srgbClr val="1D4E6B"/>
-                </a:solidFill>
-                <a:latin typeface="Cambria" pitchFamily="34" charset="0"/>
-                <a:ea typeface="Cambria" pitchFamily="34" charset="-122"/>
-                <a:cs typeface="Cambria" pitchFamily="34" charset="-120"/>
-              </a:rPr>
-              <a:t>ECOFERT® — nourrir sans épuiser</a:t>
-            </a:r>
-            <a:endParaRPr lang="en-US" sz="1600" dirty="0"/>
-          </a:p>
-        </p:txBody>
-      </p:sp>
-      <p:sp>
-        <p:nvSpPr>
-          <p:cNvPr id="7" name="Text 5"/>
-          <p:cNvSpPr txBox="1"/>
-          <p:nvPr/>
-        </p:nvSpPr>
-        <p:spPr>
-          <a:xfrm>
-            <a:off x="6370168" y="2286000"/>
-            <a:ext cx="5227168" cy="2468880"/>
-          </a:xfrm>
-          <a:prstGeom prst="rect">
-            <a:avLst/>
-          </a:prstGeom>
-          <a:noFill/>
-          <a:ln/>
-        </p:spPr>
-        <p:txBody>
-          <a:bodyPr wrap="square" lIns="0" tIns="0" rIns="0" bIns="0" rtlCol="0" anchor="t"/>
-          <a:lstStyle/>
+              <a:t>Oignon, tomate et patate douce en contre-saison diversifient les revenus sur les mêmes périmètres.</a:t>
+            </a:r>
+            <a:endParaRPr lang="en-US" sz="1400" dirty="0"/>
+          </a:p>
           <a:p>
             <a:pPr algn="l" marL="342900" indent="-342900">
               <a:lnSpc>
                 <a:spcPct val="122000"/>
               </a:lnSpc>
               <a:spcAft>
-                <a:spcPts val="1000"/>
+                <a:spcPts val="1100"/>
               </a:spcAft>
               <a:buSzPct val="100000"/>
               <a:buChar char="•"/>
             </a:pPr>
             <a:r>
-              <a:rPr lang="en-US" sz="1350" dirty="0">
+              <a:rPr lang="en-US" sz="1400" dirty="0">
                 <a:solidFill>
                   <a:srgbClr val="2F3E47"/>
                 </a:solidFill>
@@ -9409,156 +10859,15 @@
                 <a:ea typeface="Calibri" pitchFamily="34" charset="-122"/>
                 <a:cs typeface="Calibri" pitchFamily="34" charset="-120"/>
               </a:rPr>
-              <a:t>Fertilisant en microdoses d'acides aminés, azote, phosphore et potassium, issu de ressources renouvelables.</a:t>
-            </a:r>
-            <a:endParaRPr lang="en-US" sz="1350" dirty="0"/>
-          </a:p>
-          <a:p>
-            <a:pPr algn="l" marL="342900" indent="-342900">
-              <a:lnSpc>
-                <a:spcPct val="122000"/>
-              </a:lnSpc>
-              <a:spcAft>
-                <a:spcPts val="1000"/>
-              </a:spcAft>
-              <a:buSzPct val="100000"/>
-              <a:buChar char="•"/>
-            </a:pPr>
-            <a:r>
-              <a:rPr lang="en-US" sz="1350" dirty="0">
-                <a:solidFill>
-                  <a:srgbClr val="2F3E47"/>
-                </a:solidFill>
-                <a:latin typeface="Calibri" pitchFamily="34" charset="0"/>
-                <a:ea typeface="Calibri" pitchFamily="34" charset="-122"/>
-                <a:cs typeface="Calibri" pitchFamily="34" charset="-120"/>
-              </a:rPr>
-              <a:t>Non chélatant : il n'appauvrit pas le complexe argilo-humique, déjà fragile sur sols sableux.</a:t>
-            </a:r>
-            <a:endParaRPr lang="en-US" sz="1350" dirty="0"/>
-          </a:p>
-          <a:p>
-            <a:pPr algn="l" marL="342900" indent="-342900">
-              <a:lnSpc>
-                <a:spcPct val="122000"/>
-              </a:lnSpc>
-              <a:spcAft>
-                <a:spcPts val="1000"/>
-              </a:spcAft>
-              <a:buSzPct val="100000"/>
-              <a:buChar char="•"/>
-            </a:pPr>
-            <a:r>
-              <a:rPr lang="en-US" sz="1350" dirty="0">
-                <a:solidFill>
-                  <a:srgbClr val="2F3E47"/>
-                </a:solidFill>
-                <a:latin typeface="Calibri" pitchFamily="34" charset="0"/>
-                <a:ea typeface="Calibri" pitchFamily="34" charset="-122"/>
-                <a:cs typeface="Calibri" pitchFamily="34" charset="-120"/>
-              </a:rPr>
-              <a:t>Certifié SOHISCERT et EU Bio, utilisé dans 60 pays — argument utile pour les exportateurs de légumes et de mangues.</a:t>
-            </a:r>
-            <a:endParaRPr lang="en-US" sz="1350" dirty="0"/>
-          </a:p>
-          <a:p>
-            <a:pPr algn="l" marL="342900" indent="-342900">
-              <a:lnSpc>
-                <a:spcPct val="122000"/>
-              </a:lnSpc>
-              <a:spcAft>
-                <a:spcPts val="1000"/>
-              </a:spcAft>
-              <a:buSzPct val="100000"/>
-              <a:buChar char="•"/>
-            </a:pPr>
-            <a:r>
-              <a:rPr lang="en-US" sz="1350" dirty="0">
-                <a:solidFill>
-                  <a:srgbClr val="2F3E47"/>
-                </a:solidFill>
-                <a:latin typeface="Calibri" pitchFamily="34" charset="0"/>
-                <a:ea typeface="Calibri" pitchFamily="34" charset="-122"/>
-                <a:cs typeface="Calibri" pitchFamily="34" charset="-120"/>
-              </a:rPr>
-              <a:t>1 à 4 flacons de 140 ml par hectare, compatibles avec un pulvérisateur à dos comme avec la fertirrigation.</a:t>
-            </a:r>
-            <a:endParaRPr lang="en-US" sz="1350" dirty="0"/>
-          </a:p>
-        </p:txBody>
-      </p:sp>
-      <p:sp>
-        <p:nvSpPr>
-          <p:cNvPr id="8" name="Shape 6"/>
-          <p:cNvSpPr/>
-          <p:nvPr/>
-        </p:nvSpPr>
-        <p:spPr>
-          <a:xfrm>
-            <a:off x="594360" y="4846320"/>
-            <a:ext cx="11002975" cy="960120"/>
-          </a:xfrm>
-          <a:prstGeom prst="roundRect">
-            <a:avLst>
-              <a:gd name="adj" fmla="val 7619"/>
-            </a:avLst>
-          </a:prstGeom>
-          <a:solidFill>
-            <a:srgbClr val="EEF2F5"/>
-          </a:solidFill>
-          <a:ln w="9525">
-            <a:solidFill>
-              <a:srgbClr val="D8E1E7"/>
-            </a:solidFill>
-            <a:prstDash val="solid"/>
-          </a:ln>
-        </p:spPr>
-      </p:sp>
-      <p:sp>
-        <p:nvSpPr>
-          <p:cNvPr id="9" name="Text 7"/>
-          <p:cNvSpPr txBox="1"/>
-          <p:nvPr/>
-        </p:nvSpPr>
-        <p:spPr>
-          <a:xfrm>
-            <a:off x="822960" y="4983480"/>
-            <a:ext cx="10545775" cy="713232"/>
-          </a:xfrm>
-          <a:prstGeom prst="rect">
-            <a:avLst/>
-          </a:prstGeom>
-          <a:noFill/>
-          <a:ln/>
-        </p:spPr>
-        <p:txBody>
-          <a:bodyPr wrap="square" lIns="0" tIns="0" rIns="0" bIns="0" rtlCol="0" anchor="t"/>
-          <a:lstStyle/>
-          <a:p>
-            <a:pPr algn="l" indent="0" marL="0">
-              <a:lnSpc>
-                <a:spcPct val="118000"/>
-              </a:lnSpc>
-              <a:buNone/>
-            </a:pPr>
-            <a:r>
-              <a:rPr lang="en-US" sz="1100" dirty="0">
-                <a:solidFill>
-                  <a:srgbClr val="6B7D87"/>
-                </a:solidFill>
-                <a:latin typeface="Calibri" pitchFamily="34" charset="0"/>
-                <a:ea typeface="Calibri" pitchFamily="34" charset="-122"/>
-                <a:cs typeface="Calibri" pitchFamily="34" charset="-120"/>
-              </a:rPr>
-              <a:t>Les deux produits se vendent séparément mais ont été conçus pour se renforcer : l'hydro-rétenteur prolonge la disponibilité de l'eau, le fertilisant valorise cette eau sans dégrader le sol.</a:t>
-            </a:r>
-            <a:endParaRPr lang="en-US" sz="1100" dirty="0"/>
-          </a:p>
-        </p:txBody>
-      </p:sp>
-      <p:sp>
-        <p:nvSpPr>
-          <p:cNvPr id="10" name="Text 8"/>
+              <a:t>Sur ces cultures de diversification, EVERGREEN® se teste en une saison ; le riz en submersion n'est pas sa cible.</a:t>
+            </a:r>
+            <a:endParaRPr lang="en-US" sz="1400" dirty="0"/>
+          </a:p>
+        </p:txBody>
+      </p:sp>
+      <p:sp>
+        <p:nvSpPr>
+          <p:cNvPr id="6" name="Text 3"/>
           <p:cNvSpPr txBox="1"/>
           <p:nvPr/>
         </p:nvSpPr>
@@ -9599,7 +10908,7 @@
       </p:sp>
       <p:sp>
         <p:nvSpPr>
-          <p:cNvPr id="11" name="Text 9"/>
+          <p:cNvPr id="7" name="Text 4"/>
           <p:cNvSpPr txBox="1"/>
           <p:nvPr/>
         </p:nvSpPr>
@@ -9703,7 +11012,7 @@
                 <a:ea typeface="Calibri" pitchFamily="34" charset="-122"/>
                 <a:cs typeface="Calibri" pitchFamily="34" charset="-120"/>
               </a:rPr>
-              <a:t>Le reste de la gamme</a:t>
+              <a:t>NOTRE RÉPONSE</a:t>
             </a:r>
             <a:endParaRPr lang="en-US" sz="1150" dirty="0"/>
           </a:p>
@@ -9742,7 +11051,7 @@
                 <a:ea typeface="Cambria" pitchFamily="34" charset="-122"/>
                 <a:cs typeface="Cambria" pitchFamily="34" charset="-120"/>
               </a:rPr>
-              <a:t>Protéger les cultures, fixer les sols</a:t>
+              <a:t>Retenir l'eau, nourrir sans épuiser</a:t>
             </a:r>
             <a:endParaRPr lang="en-US" sz="3000" dirty="0"/>
           </a:p>
@@ -9781,7 +11090,7 @@
                 <a:ea typeface="Cambria" pitchFamily="34" charset="-122"/>
                 <a:cs typeface="Cambria" pitchFamily="34" charset="-120"/>
               </a:rPr>
-              <a:t>NAPEMA® — protéger sans résidu</a:t>
+              <a:t>EVERGREEN® — retenir l'eau</a:t>
             </a:r>
             <a:endParaRPr lang="en-US" sz="1600" dirty="0"/>
           </a:p>
@@ -9827,7 +11136,7 @@
                 <a:ea typeface="Calibri" pitchFamily="34" charset="-122"/>
                 <a:cs typeface="Calibri" pitchFamily="34" charset="-120"/>
               </a:rPr>
-              <a:t>Lutte contre maladies, parasites, champignons et ravageurs, sans molécule de synthèse.</a:t>
+              <a:t>Hydro-rétenteur à base de potassium, placé dans la zone racinaire au semis, à la plantation ou à la reprise.</a:t>
             </a:r>
             <a:endParaRPr lang="en-US" sz="1350" dirty="0"/>
           </a:p>
@@ -9851,7 +11160,7 @@
                 <a:ea typeface="Calibri" pitchFamily="34" charset="-122"/>
                 <a:cs typeface="Calibri" pitchFamily="34" charset="-120"/>
               </a:rPr>
-              <a:t>Pulvérisation foliaire et racinaire, à effet préventif comme curatif.</a:t>
+              <a:t>Capte l'eau de pluie ou d'irrigation et la restitue progressivement, ce qui amortit une pause de pluie en début d'hivernage.</a:t>
             </a:r>
             <a:endParaRPr lang="en-US" sz="1350" dirty="0"/>
           </a:p>
@@ -9875,7 +11184,7 @@
                 <a:ea typeface="Calibri" pitchFamily="34" charset="-122"/>
                 <a:cs typeface="Calibri" pitchFamily="34" charset="-120"/>
               </a:rPr>
-              <a:t>Aucun résidu dans le sol, la plante ou l'air : pollinisateurs et auxiliaires préservés.</a:t>
+              <a:t>Capacité d'absorption de l'ordre de 300 fois son poids ; durée d'effet utile de 3 à 4 ans dans le sol.</a:t>
             </a:r>
             <a:endParaRPr lang="en-US" sz="1350" dirty="0"/>
           </a:p>
@@ -9899,7 +11208,7 @@
                 <a:ea typeface="Calibri" pitchFamily="34" charset="-122"/>
                 <a:cs typeface="Calibri" pitchFamily="34" charset="-120"/>
               </a:rPr>
-              <a:t>Formulé sur mesure pour un problème précis : cochenille, HLB des agrumes, nématodes.</a:t>
+              <a:t>Se dégrade de 20 à 25 % par an, sans accumulation ni risque de surdosage.</a:t>
             </a:r>
             <a:endParaRPr lang="en-US" sz="1350" dirty="0"/>
           </a:p>
@@ -9938,7 +11247,7 @@
                 <a:ea typeface="Cambria" pitchFamily="34" charset="-122"/>
                 <a:cs typeface="Cambria" pitchFamily="34" charset="-120"/>
               </a:rPr>
-              <a:t>Paulownia ALTIFOLIA® — l'arbre des régions chaudes</a:t>
+              <a:t>ECOFERT® — nourrir sans épuiser</a:t>
             </a:r>
             <a:endParaRPr lang="en-US" sz="1600" dirty="0"/>
           </a:p>
@@ -9984,7 +11293,7 @@
                 <a:ea typeface="Calibri" pitchFamily="34" charset="-122"/>
                 <a:cs typeface="Calibri" pitchFamily="34" charset="-120"/>
               </a:rPr>
-              <a:t>13 à 15 m en six à huit ans, avec un tronc de gros diamètre.</a:t>
+              <a:t>Fertilisant en microdoses d'acides aminés, azote, phosphore et potassium, issu de ressources renouvelables.</a:t>
             </a:r>
             <a:endParaRPr lang="en-US" sz="1350" dirty="0"/>
           </a:p>
@@ -10008,7 +11317,7 @@
                 <a:ea typeface="Calibri" pitchFamily="34" charset="-122"/>
                 <a:cs typeface="Calibri" pitchFamily="34" charset="-120"/>
               </a:rPr>
-              <a:t>Associé à 100 g d'EVERGREEN® par plant, l'irrigation nécessaire diminue de 50 %.</a:t>
+              <a:t>Non chélatant : il n'appauvrit pas le complexe argilo-humique, déjà fragile sur sols sableux.</a:t>
             </a:r>
             <a:endParaRPr lang="en-US" sz="1350" dirty="0"/>
           </a:p>
@@ -10032,7 +11341,7 @@
                 <a:ea typeface="Calibri" pitchFamily="34" charset="-122"/>
                 <a:cs typeface="Calibri" pitchFamily="34" charset="-120"/>
               </a:rPr>
-              <a:t>Résiste de −25 °C à +45 °C ; son bois ne s'enflamme qu'à partir de 426 °C.</a:t>
+              <a:t>Certifié SOHISCERT et EU Bio, utilisé dans 60 pays — argument utile pour les exportateurs de légumes et de mangues.</a:t>
             </a:r>
             <a:endParaRPr lang="en-US" sz="1350" dirty="0"/>
           </a:p>
@@ -10056,7 +11365,7 @@
                 <a:ea typeface="Calibri" pitchFamily="34" charset="-122"/>
                 <a:cs typeface="Calibri" pitchFamily="34" charset="-120"/>
               </a:rPr>
-              <a:t>Brise-vent, protection des sols contre l'érosion, 400 à 700 kg de miel par hectare.</a:t>
+              <a:t>1 à 4 flacons de 140 ml par hectare, compatibles avec un pulvérisateur à dos comme avec la fertirrigation.</a:t>
             </a:r>
             <a:endParaRPr lang="en-US" sz="1350" dirty="0"/>
           </a:p>
@@ -10125,7 +11434,7 @@
                 <a:ea typeface="Calibri" pitchFamily="34" charset="-122"/>
                 <a:cs typeface="Calibri" pitchFamily="34" charset="-120"/>
               </a:rPr>
-              <a:t>Plants livrés en pot (25 à 30 cm), certifiés indemnes de maladies et remplacés sous garantie en cas de perte. Première coupe à la fin de la sixième année, bois valorisé autour de 400 à 450 € le m³.</a:t>
+              <a:t>Les deux produits se vendent séparément mais ont été conçus pour se renforcer : l'hydro-rétenteur prolonge la disponibilité de l'eau, le fertilisant valorise cette eau sans dégrader le sol.</a:t>
             </a:r>
             <a:endParaRPr lang="en-US" sz="1100" dirty="0"/>
           </a:p>

--- a/public/documents/countries/senegal.pptx
+++ b/public/documents/countries/senegal.pptx
@@ -122,7 +122,7 @@
 </p:presentation>
 </file>
 
-<file path=ppt/charts/chart80.xml><?xml version="1.0" encoding="utf-8"?>
+<file path=ppt/charts/chart84.xml><?xml version="1.0" encoding="utf-8"?>
 <c:chartSpace xmlns:c="http://schemas.openxmlformats.org/drawingml/2006/chart" xmlns:a="http://schemas.openxmlformats.org/drawingml/2006/main" xmlns:r="http://schemas.openxmlformats.org/officeDocument/2006/relationships">
   <c:date1904 val="0"/>
   <c:roundedCorners val="1"/>
@@ -381,7 +381,7 @@
 </c:chartSpace>
 </file>
 
-<file path=ppt/charts/chart81.xml><?xml version="1.0" encoding="utf-8"?>
+<file path=ppt/charts/chart85.xml><?xml version="1.0" encoding="utf-8"?>
 <c:chartSpace xmlns:c="http://schemas.openxmlformats.org/drawingml/2006/chart" xmlns:a="http://schemas.openxmlformats.org/drawingml/2006/main" xmlns:r="http://schemas.openxmlformats.org/officeDocument/2006/relationships">
   <c:date1904 val="0"/>
   <c:roundedCorners val="1"/>
@@ -626,7 +626,7 @@
 </c:chartSpace>
 </file>
 
-<file path=ppt/charts/chart82.xml><?xml version="1.0" encoding="utf-8"?>
+<file path=ppt/charts/chart86.xml><?xml version="1.0" encoding="utf-8"?>
 <c:chartSpace xmlns:c="http://schemas.openxmlformats.org/drawingml/2006/chart" xmlns:a="http://schemas.openxmlformats.org/drawingml/2006/main" xmlns:r="http://schemas.openxmlformats.org/officeDocument/2006/relationships">
   <c:date1904 val="0"/>
   <c:roundedCorners val="1"/>
@@ -934,7 +934,7 @@
 </c:chartSpace>
 </file>
 
-<file path=ppt/charts/chart83.xml><?xml version="1.0" encoding="utf-8"?>
+<file path=ppt/charts/chart87.xml><?xml version="1.0" encoding="utf-8"?>
 <c:chartSpace xmlns:c="http://schemas.openxmlformats.org/drawingml/2006/chart" xmlns:a="http://schemas.openxmlformats.org/drawingml/2006/main" xmlns:r="http://schemas.openxmlformats.org/officeDocument/2006/relationships">
   <c:date1904 val="0"/>
   <c:roundedCorners val="1"/>
@@ -3460,7 +3460,7 @@
       </p:sp>
       <p:pic>
         <p:nvPicPr>
-          <p:cNvPr id="5" name="Image 1" descr="/workspace/scratch/50eb4f7d8e13/green-solutions-web/public/images/logo-icon.png">    </p:cNvPr>
+          <p:cNvPr id="5" name="Image 1" descr="/home/claude/green-solutions-web/public/images/logo-icon.png">    </p:cNvPr>
           <p:cNvPicPr>
             <a:picLocks noChangeAspect="1"/>
           </p:cNvPicPr>
@@ -3484,7 +3484,7 @@
       </p:pic>
       <p:pic>
         <p:nvPicPr>
-          <p:cNvPr id="6" name="Image 2" descr="/workspace/scratch/50eb4f7d8e13/green-solutions-web/scripts/dossiers/drapeaux/senegal.png">    </p:cNvPr>
+          <p:cNvPr id="6" name="Image 2" descr="/home/claude/green-solutions-web/scripts/dossiers/drapeaux/senegal.png">    </p:cNvPr>
           <p:cNvPicPr>
             <a:picLocks noChangeAspect="1"/>
           </p:cNvPicPr>
@@ -7750,7 +7750,7 @@
                 <a:ea typeface="Calibri" pitchFamily="34" charset="-122"/>
                 <a:cs typeface="Calibri" pitchFamily="34" charset="-120"/>
               </a:rPr>
-              <a:t>contact@evergreen-ecosorb.com · Green Solutions Groupe AIM SA, 46, route de la Condémine, 1475 Forel, Suisse</a:t>
+              <a:t>contact@green-solutions-group.com · Green Solutions Groupe AIM SA, 46, route de la Condémine, 1475 Forel, Suisse</a:t>
             </a:r>
             <a:endParaRPr lang="en-US" sz="1400" dirty="0"/>
           </a:p>
@@ -7758,7 +7758,7 @@
       </p:sp>
       <p:pic>
         <p:nvPicPr>
-          <p:cNvPr id="6" name="Image 1" descr="/workspace/scratch/50eb4f7d8e13/green-solutions-web/scripts/dossiers/sceau-aim-clair.png">    </p:cNvPr>
+          <p:cNvPr id="6" name="Image 1" descr="/home/claude/green-solutions-web/scripts/dossiers/sceau-aim-clair.png">    </p:cNvPr>
           <p:cNvPicPr>
             <a:picLocks noChangeAspect="1"/>
           </p:cNvPicPr>
